--- a/slides/00_orientation/00_orientation.pptx
+++ b/slides/00_orientation/00_orientation.pptx
@@ -597,7 +597,7 @@
           <a:lstStyle/>
           <a:p>
             <a:r>
-              <a:t>학사일정상 중간고사 기간은 10-20~26이지만 8주차 휴강으로 1주 순연했습니다. 코딩테스트에서 LLM 사용을 허용하는 이유는 실무에서도 사용하기 때문입니다. 대신 문제가 "LLM에 그대로 넣으면 풀리는" 형태가 아닙니다.</a:t>
+              <a:t>학사일정상 중간고사 기간은 10월 20일부터 26일까지지만, 8주차 휴강으로 시험을 한 주 늦췄습니다. 코딩테스트에서는 실무 환경을 고려해 LLM 사용을 허용합니다. 단순히 문제를 입력해 답을 얻는 방식이 아니라, 제공된 데이터를 분석하고 결과를 검증하는 과정을 평가합니다.</a:t>
             </a:r>
           </a:p>
         </p:txBody>
@@ -667,7 +667,7 @@
           <a:lstStyle/>
           <a:p>
             <a:r>
-              <a:t>매일 타는 셔틀이 대상입니다. 데이터가 없는 상태에서 시작한다는 점이 이 프로젝트의 요점입니다. 시간표를 GTFS로 옮기고 승하차를 세어 보면, 교통 데이터가 어떻게 만들어지는지 알게 됩니다. 조사는 8주차 휴강 주에 캠퍼스에서 합니다.</a:t>
+              <a:t>학생들이 매일 이용하는 셔틀을 분석 대상으로 삼습니다. 기존 GTFS와 승하차 기록이 없기 때문에 시간표를 직접 옮기고 현장에서 승하차 인원을 조사합니다. 이 과정을 통해 교통 데이터가 만들어지는 절차도 함께 익힙니다. 현장 조사는 8주차 휴강 기간에 교내에서 진행합니다.</a:t>
             </a:r>
           </a:p>
         </p:txBody>
@@ -737,7 +737,7 @@
           <a:lstStyle/>
           <a:p>
             <a:r>
-              <a:t>배점은 100점입니다. 팀 55점(데이터 20 · 정확도 20 · 발표 15), 개인 45점(설계 20 · 해석 25)이고 동료평가로 ±10% 조정합니다. 개인 45점은 자기가 맡은 시나리오의 설계와 지표 해석입니다. 팀 점수만으로 개인 점수가 정해지지 않습니다. 산출물이 수업 진도와 맞물려 있어, 수업만 따라오면 프로젝트가 저절로 쌓입니다.</a:t>
+              <a:t>총점은 100점입니다. 팀 점수는 55점으로 데이터 20점, 정확도 20점, 발표 15점입니다. 개인 점수는 45점으로 시나리오 설계 20점과 지표 해석 25점입니다. 여기에 동료평가 결과를 반영해 ±10%를 조정합니다. 개인이 맡은 시나리오를 별도로 평가하므로 팀 점수만으로 개인 점수가 결정되지는 않습니다. 각 산출물은 수업 진도에 맞춰 단계별로 제출합니다.</a:t>
             </a:r>
           </a:p>
         </p:txBody>
@@ -807,7 +807,7 @@
           <a:lstStyle/>
           <a:p>
             <a:r>
-              <a:t>무엇과 비교했고 어디가 달랐는지를 쓰는 것이 과제에서 실제로 채점하는 부분입니다. 코드가 돌아가기만 하면 되는 과제는 없습니다.</a:t>
+              <a:t>모든 과제에서 코드 실행 여부뿐 아니라 비교 기준과 결과의 차이를 평가합니다. 무엇과 비교했는지, 차이가 있다면 원인이 무엇인지 결과에 함께 작성해야 합니다.</a:t>
             </a:r>
           </a:p>
         </p:txBody>
@@ -877,7 +877,7 @@
           <a:lstStyle/>
           <a:p>
             <a:r>
-              <a:t>requirements.txt가 버전을 전부 고정해 두었으므로, 같은 버전이면 교재와 같은 그림이 나옵니다. 수요일 수업 전까지 이 네 줄이 되는 상태로 와야 합니다. 막히면 단톡방에 올리세요.</a:t>
+              <a:t>requirements.txt에는 패키지 버전이 고정되어 있어 같은 환경에서 교재와 같은 결과를 재현할 수 있습니다. 수요일 수업 전까지 명령을 모두 실행하고 import가 오류 없이 끝나는지 확인해 주세요. 설치 중 문제가 생기면 단톡방에 오류 메시지를 올리면 됩니다.</a:t>
             </a:r>
           </a:p>
         </p:txBody>
@@ -947,7 +947,7 @@
           <a:lstStyle/>
           <a:p>
             <a:r>
-              <a:t>노트북 사양 걱정은 하지 않아도 됩니다. 무거운 계산은 서버가 하고, 서버에 문제가 생겨도 교재의 녹화 모드로 진도가 나갑니다.</a:t>
+              <a:t>계산량이 큰 작업은 공용 서버에서 실행하므로 개인 노트북의 성능은 실습 진행에 큰 영향을 주지 않습니다. 서버에 연결할 수 없는 경우에는 교재에 저장된 실행 결과를 사용합니다.</a:t>
             </a:r>
           </a:p>
         </p:txBody>
@@ -1017,7 +1017,7 @@
           <a:lstStyle/>
           <a:p>
             <a:r>
-              <a:t>교재는 제가 이 수업을 위해 쓰고 있는 책이고, 여러분이 첫 독자입니다. 오탈자·이상한 설명을 찾아 주면 반영합니다. 책을 사지 않아도 됩니다.</a:t>
+              <a:t>주교재는 이 수업을 위해 작성 중인 공개 교재입니다. 학생들이 수업에서 처음 사용하게 됩니다. 오탈자나 이해하기 어려운 설명을 알려 주면 교재에 반영하겠습니다. 별도로 책을 구입할 필요는 없습니다.</a:t>
             </a:r>
           </a:p>
         </p:txBody>
@@ -1087,7 +1087,7 @@
           <a:lstStyle/>
           <a:p>
             <a:r>
-              <a:t>질문은 단톡방이 가장 빠릅니다. 상담은 전원 1회씩 진행하니, 상담이 불가능한 날짜와 시간을 오늘 시트에 적어 주세요.</a:t>
+              <a:t>수업 관련 질문은 단톡방에서 가장 빠르게 확인할 수 있습니다. 학기 중 모든 학생과 한 차례씩 상담할 예정이니, 오늘 배포하는 시트에 상담이 어려운 날짜와 시간을 적어 주세요.</a:t>
             </a:r>
           </a:p>
         </p:txBody>
@@ -1157,7 +1157,7 @@
           <a:lstStyle/>
           <a:p>
             <a:r>
-              <a:t>기말은 무당이 한 노선으로 범위가 닫혀 있고, P-실무프로젝트는 실제 지자체 노선망을 다룹니다. 시내버스 노선 조정, 광역버스 평가, 저수요 노선 DRT 전환 같은 메뉴가 있고 자유주제는 승인제입니다. 상세는 p-practical-project 저장소에 있습니다.</a:t>
+              <a:t>기말 프로젝트는 무당이 한 노선을 분석하고, P-실무프로젝트는 실제 지자체의 노선망으로 범위를 넓힙니다. 시내버스 노선 조정, 광역버스 평가, 저수요 노선의 DRT 전환 등을 주제로 선택할 수 있습니다. 자유주제는 사전에 승인을 받아야 하며, 세부 내용은 p-practical-project 저장소에서 안내합니다.</a:t>
             </a:r>
           </a:p>
         </p:txBody>
@@ -1227,7 +1227,7 @@
           <a:lstStyle/>
           <a:p>
             <a:r>
-              <a:t>오리엔테이션 뒤 남는 시간에 1주차 화요일분 — 교재 1장 「왜 시뮬레이션인가」 — 을 시작합니다.</a:t>
+              <a:t>오리엔테이션을 마친 뒤 시간이 남으면 1주차 화요일 수업인 교재 1장 「왜 시뮬레이션인가」를 시작합니다.</a:t>
             </a:r>
           </a:p>
         </p:txBody>
@@ -1297,7 +1297,7 @@
           <a:lstStyle/>
           <a:p>
             <a:r>
-              <a:t>과목 이름은 스마트 교통물류지만, 개론 수업이 아닙니다. 결과물이 하나 있는 수업입니다. 학기가 끝나면 여러분 손에 시뮬레이터 한 대가 남습니다. 이론을 먼저 다 배우고 나중에 적용하는 순서가 아니라, 만들다가 막히는 지점에서 그때 필요한 이론을 다루는 순서입니다.</a:t>
+              <a:t>스마트 교통물류 전반을 훑는 개론 수업은 아닙니다. 한 학기 동안 하나의 시뮬레이터를 단계별로 완성합니다. 이론을 모두 배운 뒤 적용하는 방식이 아니라, 구현 단계마다 필요한 이론을 배우고 바로 적용합니다.</a:t>
             </a:r>
           </a:p>
         </p:txBody>
@@ -1367,7 +1367,7 @@
           <a:lstStyle/>
           <a:p>
             <a:r>
-              <a:t>이 그림이 학기 전체의 진도표입니다. 도로망(2~4주차), 경로 탐색(3·5·6주차), 수요(7주차), 배차와 루프(10~11주차). 매주 이 그림의 상자 하나를 채웁니다.</a:t>
+              <a:t>이 그림은 한 학기 동안 다룰 범위를 보여 줍니다. 2~4주차에는 도로망, 3·5·6주차에는 경로 탐색, 7주차에는 수요, 10~11주차에는 배차와 시뮬레이션 루프를 다룹니다.</a:t>
             </a:r>
           </a:p>
         </p:txBody>
@@ -1437,7 +1437,7 @@
           <a:lstStyle/>
           <a:p>
             <a:r>
-              <a:t>전부 직접 짜면 12주 안에 시뮬레이터가 완성되지 않습니다. 짧은 세 개만 직접 짜고, 나머지는 읽고 실험합니다. 직접 짠 코드는 항상 기준과 대조합니다 — 다익스트라는 NetworkX와, RAPTOR는 실제 엔진과.</a:t>
+              <a:t>모든 기능을 직접 구현하지는 않습니다. 학습 목표와 직접 관련된 알고리즘 세 개는 직접 작성하고, 나머지는 제공 코드나 외부 엔진을 활용합니다. 직접 구현한 결과는 기준 구현과 대조합니다. 다익스트라는 NetworkX, RAPTOR는 DTUMOS 결과와 비교합니다.</a:t>
             </a:r>
           </a:p>
         </p:txBody>
@@ -1507,7 +1507,7 @@
           <a:lstStyle/>
           <a:p>
             <a:r>
-              <a:t>3주차가 직접 구현 세 개 중 첫 번째입니다.</a:t>
+              <a:t>3주차에는 첫 번째 직접 구현 과제인 최단경로 알고리즘을 다룹니다.</a:t>
             </a:r>
           </a:p>
         </p:txBody>
@@ -1647,7 +1647,7 @@
           <a:lstStyle/>
           <a:p>
             <a:r>
-              <a:t>11주차에 직접 구현 세 개 중 마지막인 시뮬레이션 루프를 짜면 시뮬레이터가 완성됩니다.</a:t>
+              <a:t>11주차에는 세 번째 직접 구현 과제인 시뮬레이션 루프를 작성합니다. 이 단계까지 마치면 한 학기 동안 만든 구성요소가 하나의 시뮬레이터로 연결됩니다.</a:t>
             </a:r>
           </a:p>
         </p:txBody>
@@ -1717,7 +1717,7 @@
           <a:lstStyle/>
           <a:p>
             <a:r>
-              <a:t>LLM 금지가 아니라 권장입니다. 다만 LLM이 짠 코드를 설명하지 못하면 시험에서 그대로 드러납니다. 대조 습관 — 무엇과 비교했고 어디가 달랐는지 — 이 과목이 기르려는 태도입니다.</a:t>
+              <a:t>수업과 코딩테스트에서 LLM을 사용할 수 있습니다. 다만 생성된 코드를 설명하고 수정할 수 있어야 합니다. 코드가 실행되는지만 확인하지 말고, 무엇과 비교했으며 결과가 어떻게 다른지도 기록해야 합니다.</a:t>
             </a:r>
           </a:p>
         </p:txBody>
@@ -5355,7 +5355,7 @@
           <a:lstStyle/>
           <a:p>
             <a:r>
-              <a:t>도시 모빌리티 시뮬레이터를 밑바닥부터 만드는 12주</a:t>
+              <a:t>도시 모빌리티 시뮬레이터를 직접 만드는 12주</a:t>
             </a:r>
           </a:p>
         </p:txBody>
@@ -5436,7 +5436,7 @@
           <a:lstStyle/>
           <a:p>
             <a:r>
-              <a:t>2.2 12주 흐름 — 5~8주차</a:t>
+              <a:t>2.2 5~8주차: 대중교통과 통행 수요</a:t>
             </a:r>
           </a:p>
         </p:txBody>
@@ -5457,7 +5457,7 @@
           <a:lstStyle/>
           <a:p>
             <a:r>
-              <a:t>2. 12주 흐름</a:t>
+              <a:t>2. 12주 수업 일정</a:t>
             </a:r>
           </a:p>
         </p:txBody>
@@ -5657,7 +5657,7 @@
                           </a:solidFill>
                           <a:latin typeface="Pretendard Medium"/>
                         </a:rPr>
-                        <a:t>만드는 것</a:t>
+                        <a:t>실습 결과</a:t>
                       </a:r>
                     </a:p>
                   </a:txBody>
@@ -5801,7 +5801,7 @@
                           </a:solidFill>
                           <a:latin typeface="Pretendard Medium"/>
                         </a:rPr>
-                        <a:t>밑바닥부터 RAPTOR</a:t>
+                        <a:t>RAPTOR 직접 구현</a:t>
                       </a:r>
                     </a:p>
                   </a:txBody>
@@ -6494,7 +6494,7 @@
           <a:lstStyle/>
           <a:p>
             <a:r>
-              <a:t>2.3 12주 흐름 — 9~12주차</a:t>
+              <a:t>2.3 9~12주차: 시험과 기말 프로젝트</a:t>
             </a:r>
           </a:p>
         </p:txBody>
@@ -6515,7 +6515,7 @@
           <a:lstStyle/>
           <a:p>
             <a:r>
-              <a:t>2. 12주 흐름</a:t>
+              <a:t>2. 12주 수업 일정</a:t>
             </a:r>
           </a:p>
         </p:txBody>
@@ -6715,7 +6715,7 @@
                           </a:solidFill>
                           <a:latin typeface="Pretendard Medium"/>
                         </a:rPr>
-                        <a:t>만드는 것</a:t>
+                        <a:t>실습 결과</a:t>
                       </a:r>
                     </a:p>
                   </a:txBody>
@@ -7573,7 +7573,7 @@
           <a:lstStyle/>
           <a:p>
             <a:r>
-              <a:t>2. 12주 흐름</a:t>
+              <a:t>2. 12주 수업 일정</a:t>
             </a:r>
           </a:p>
         </p:txBody>
@@ -7595,31 +7595,37 @@
           <a:p>
             <a:pPr/>
             <a:r>
-              <a:t>화요일 개념·코드, 수요일 직접 작성과 실행 — 노트북 매 시간 지참</a:t>
+              <a:t>화요일: 개념과 코드 설명 · 수요일: 직접 구현과 실행</a:t>
+            </a:r>
+          </a:p>
+          <a:p>
+            <a:pPr lvl="1"/>
+            <a:r>
+              <a:t>매 시간 노트북 지참</a:t>
             </a:r>
           </a:p>
           <a:p>
             <a:pPr/>
             <a:r>
-              <a:t>수업 중 LLM 사용 — ChatGPT·Claude·Gemini 구독 권장</a:t>
+              <a:t>수업 중 LLM 사용 가능 — ChatGPT·Claude·Gemini 등</a:t>
             </a:r>
           </a:p>
           <a:p>
             <a:pPr lvl="1"/>
             <a:r>
-              <a:t>조건: 나온 코드를 이해하고 막힌 곳을 고칠 수 있을 것 (코딩테스트에서도 사용 가능)</a:t>
+              <a:t>조건: 생성된 코드를 설명하고 오류를 수정할 수 있는 수준</a:t>
             </a:r>
           </a:p>
           <a:p>
             <a:pPr/>
             <a:r>
-              <a:t>"돌아간다"와 "맞다"의 구분 — 직접 짠 코드는 항상 기준과 대조</a:t>
+              <a:t>실행 성공과 결과 검증의 구분</a:t>
             </a:r>
           </a:p>
           <a:p>
             <a:pPr lvl="1"/>
             <a:r>
-              <a:t>이 습관이 이 과목에서 가장 오래 남는 것</a:t>
+              <a:t>직접 구현한 결과는 기준 구현과 대조</a:t>
             </a:r>
           </a:p>
         </p:txBody>
@@ -7797,7 +7803,7 @@
               <a:t>3.3  </a:t>
             </a:r>
             <a:r>
-              <a:t>기말 팀 프로젝트 — 무당이</a:t>
+              <a:t>기말 팀 프로젝트: 무당이</a:t>
             </a:r>
           </a:p>
           <a:p>
@@ -7833,7 +7839,7 @@
               <a:t>3.5  </a:t>
             </a:r>
             <a:r>
-              <a:t>과제</a:t>
+              <a:t>과제와 공통 평가 기준</a:t>
             </a:r>
           </a:p>
         </p:txBody>
@@ -8615,25 +8621,25 @@
           <a:p>
             <a:pPr/>
             <a:r>
-              <a:t>일시 10-27(화) · 범위 교재 0~8장과 12장</a:t>
+              <a:t>일시·범위: 10-27(화) · 교재 0~8장과 12장</a:t>
             </a:r>
           </a:p>
           <a:p>
             <a:pPr/>
             <a:r>
-              <a:t>구성: 단답형 closed-book 40% + 코딩테스트 open-book 60%</a:t>
+              <a:t>구성: 단답형 closed-book 40% · 코딩테스트 open-book 60%</a:t>
             </a:r>
           </a:p>
           <a:p>
             <a:pPr lvl="1"/>
             <a:r>
-              <a:t>코딩테스트는 사이버캠퍼스 출제, ipynb와 데이터 제공, LLM 사용 가능</a:t>
+              <a:t>사이버캠퍼스에서 출제 · ipynb와 데이터 제공 · LLM 사용 가능</a:t>
             </a:r>
           </a:p>
           <a:p>
             <a:pPr/>
             <a:r>
-              <a:t>출제 방향: 암기가 아니라 주어진 데이터에서 답을 뽑아내는 과정</a:t>
+              <a:t>평가 내용: 주어진 데이터를 분석해 답을 도출하는 과정</a:t>
             </a:r>
           </a:p>
         </p:txBody>
@@ -8720,7 +8726,7 @@
           <a:lstStyle/>
           <a:p>
             <a:r>
-              <a:t>3.3 기말 팀 프로젝트 — 무당이</a:t>
+              <a:t>3.3 기말 팀 프로젝트: 무당이</a:t>
             </a:r>
           </a:p>
         </p:txBody>
@@ -8763,7 +8769,7 @@
           <a:p>
             <a:pPr/>
             <a:r>
-              <a:t>대상: 가천대 교내셔틀 무당이 — 개선 시나리오 효과를 수치로 제시</a:t>
+              <a:t>대상: 가천대 교내셔틀 무당이 — 개선 시나리오의 효과를 수치로 비교</a:t>
             </a:r>
           </a:p>
           <a:p>
@@ -8775,13 +8781,13 @@
           <a:p>
             <a:pPr/>
             <a:r>
-              <a:t>출발 조건: GTFS 없음, 승하차 기록 없음 → 둘 다 직접 작성·조사</a:t>
+              <a:t>시작 조건: GTFS와 승하차 기록 없음 → 시간표 작성과 현장 조사부터 진행</a:t>
             </a:r>
           </a:p>
           <a:p>
             <a:pPr/>
             <a:r>
-              <a:t>분담: 팀은 현황 재현, 팀원 각자 개선 시나리오 1개</a:t>
+              <a:t>역할 분담: 팀 단위 현황 재현 · 개인별 개선 시나리오 1개</a:t>
             </a:r>
           </a:p>
           <a:p>
@@ -9573,7 +9579,7 @@
                           </a:solidFill>
                           <a:latin typeface="Pretendard Medium"/>
                         </a:rPr>
-                        <a:t>개인+팀</a:t>
+                        <a:t>개인·팀</a:t>
                       </a:r>
                     </a:p>
                   </a:txBody>
@@ -9684,7 +9690,7 @@
           <a:lstStyle/>
           <a:p>
             <a:r>
-              <a:t>3.5 과제</a:t>
+              <a:t>3.5 과제와 공통 평가 기준</a:t>
             </a:r>
           </a:p>
         </p:txBody>
@@ -9745,7 +9751,7 @@
           <a:p>
             <a:pPr/>
             <a:r>
-              <a:t>세 과제 공통 산출물: 돌아가는 코드가 아니라 기준과 대조한 결과</a:t>
+              <a:t>공통 평가 내용: 기준 결과와의 대조 및 차이 해석</a:t>
             </a:r>
           </a:p>
         </p:txBody>
@@ -9887,7 +9893,7 @@
               <a:t>4.1  </a:t>
             </a:r>
             <a:r>
-              <a:t>환경 설치</a:t>
+              <a:t>실습 환경 설치</a:t>
             </a:r>
           </a:p>
           <a:p>
@@ -9905,7 +9911,7 @@
               <a:t>4.2  </a:t>
             </a:r>
             <a:r>
-              <a:t>엔진과 코랩</a:t>
+              <a:t>실행 환경 선택</a:t>
             </a:r>
           </a:p>
           <a:p>
@@ -10060,7 +10066,7 @@
                           </a:solidFill>
                           <a:latin typeface="Pretendard"/>
                         </a:rPr>
-                        <a:t>이 과목</a:t>
+                        <a:t>수업 소개</a:t>
                       </a:r>
                     </a:p>
                   </a:txBody>
@@ -10096,7 +10102,7 @@
                           </a:solidFill>
                           <a:latin typeface="Pretendard Medium"/>
                         </a:rPr>
-                        <a:t>1.1 이 과목에서 만드는 것  ·  1.2 시뮬레이터의 네 부분  ·  1.3 학습 목표  ·  1.4 직접 짜는 것과 가져다 쓰는 것</a:t>
+                        <a:t>1.1 한 학기 동안 만들 시뮬레이터  ·  1.2 시뮬레이터의 전체 구조  ·  1.3 학습 성과  ·  1.4 직접 구현과 기존 도구 활용</a:t>
                       </a:r>
                     </a:p>
                   </a:txBody>
@@ -10170,7 +10176,7 @@
                           </a:solidFill>
                           <a:latin typeface="Pretendard"/>
                         </a:rPr>
-                        <a:t>12주 흐름</a:t>
+                        <a:t>12주 수업 일정</a:t>
                       </a:r>
                     </a:p>
                   </a:txBody>
@@ -10206,7 +10212,7 @@
                           </a:solidFill>
                           <a:latin typeface="Pretendard Medium"/>
                         </a:rPr>
-                        <a:t>2.1 12주 흐름 — 1~4주차  ·  2.2 12주 흐름 — 5~8주차  ·  2.3 12주 흐름 — 9~12주차  ·  2.4 수업 방식</a:t>
+                        <a:t>2.1 1~4주차: 도로망과 경로 탐색  ·  2.2 5~8주차: 대중교통과 통행 수요  ·  2.3 9~12주차: 시험과 기말 프로젝트  ·  2.4 수업 방식</a:t>
                       </a:r>
                     </a:p>
                   </a:txBody>
@@ -10316,7 +10322,7 @@
                           </a:solidFill>
                           <a:latin typeface="Pretendard Medium"/>
                         </a:rPr>
-                        <a:t>3.1 평가 비중  ·  3.2 중간시험  ·  3.3 기말 팀 프로젝트 — 무당이  ·  3.4 프로젝트 일정과 배점  ·  3.5 과제</a:t>
+                        <a:t>3.1 평가 비중  ·  3.2 중간시험  ·  3.3 기말 팀 프로젝트: 무당이  ·  3.4 프로젝트 일정과 배점  ·  3.5 과제와 공통 평가 기준</a:t>
                       </a:r>
                     </a:p>
                   </a:txBody>
@@ -10426,7 +10432,7 @@
                           </a:solidFill>
                           <a:latin typeface="Pretendard Medium"/>
                         </a:rPr>
-                        <a:t>4.1 환경 설치  ·  4.2 엔진과 코랩  ·  4.3 교재와 참고 자료</a:t>
+                        <a:t>4.1 실습 환경 설치  ·  4.2 실행 환경 선택  ·  4.3 교재와 참고 자료</a:t>
                       </a:r>
                     </a:p>
                   </a:txBody>
@@ -10500,7 +10506,7 @@
                           </a:solidFill>
                           <a:latin typeface="Pretendard"/>
                         </a:rPr>
-                        <a:t>운영과 오늘 할 일</a:t>
+                        <a:t>수업 운영 안내</a:t>
                       </a:r>
                     </a:p>
                   </a:txBody>
@@ -10536,7 +10542,7 @@
                           </a:solidFill>
                           <a:latin typeface="Pretendard Medium"/>
                         </a:rPr>
-                        <a:t>5.1 운영 정보  ·  5.2 종강 이후 — P-실무프로젝트  ·  5.3 오늘 할 일</a:t>
+                        <a:t>5.1 수업 시간과 소통 채널  ·  5.2 종강 이후 — P-실무프로젝트  ·  5.3 오늘 할 일</a:t>
                       </a:r>
                     </a:p>
                   </a:txBody>
@@ -10647,7 +10653,7 @@
           <a:lstStyle/>
           <a:p>
             <a:r>
-              <a:t>4.1 환경 설치</a:t>
+              <a:t>4.1 실습 환경 설치</a:t>
             </a:r>
           </a:p>
         </p:txBody>
@@ -10708,7 +10714,7 @@
           <a:p>
             <a:pPr/>
             <a:r>
-              <a:t>확인: import 한 줄</a:t>
+              <a:t>설치 확인: import 한 줄</a:t>
             </a:r>
           </a:p>
         </p:txBody>
@@ -10861,7 +10867,7 @@
           <a:lstStyle/>
           <a:p>
             <a:r>
-              <a:t>4.2 엔진과 코랩</a:t>
+              <a:t>4.2 실행 환경 선택</a:t>
             </a:r>
           </a:p>
         </p:txBody>
@@ -10904,25 +10910,25 @@
           <a:p>
             <a:pPr/>
             <a:r>
-              <a:t>기본: 강의용 공용 서버</a:t>
+              <a:t>기본 환경: 강의용 공용 서버</a:t>
             </a:r>
           </a:p>
           <a:p>
             <a:pPr lvl="1"/>
             <a:r>
-              <a:t>서버 없이도 교재의 녹화 결과로 모든 코드 실행 — 복습에 추가 설치 없음</a:t>
+              <a:t>서버 연결 없이도 교재의 녹화 결과로 코드 실행 가능</a:t>
             </a:r>
           </a:p>
           <a:p>
             <a:pPr/>
             <a:r>
-              <a:t>엔진 내부 확인 실습: 각자 노트북에서 Docker · 사전 빌드 이미지 배포</a:t>
+              <a:t>엔진 내부 확인: 개인 노트북의 Docker와 사전 빌드 이미지 사용</a:t>
             </a:r>
           </a:p>
           <a:p>
             <a:pPr/>
             <a:r>
-              <a:t>구글 코랩: 각 장의 Colab 배지 → 첫 셀에서 smartmob.colab.bootstrap()</a:t>
+              <a:t>Google Colab: 각 장의 Colab 배지 → 첫 셀에서 smartmob.colab.bootstrap()</a:t>
             </a:r>
           </a:p>
         </p:txBody>
@@ -11178,7 +11184,7 @@
           <a:lstStyle/>
           <a:p>
             <a:r>
-              <a:t>운영과 오늘 할 일</a:t>
+              <a:t>수업 운영 안내</a:t>
             </a:r>
           </a:p>
         </p:txBody>
@@ -11212,7 +11218,7 @@
               <a:t>5.1  </a:t>
             </a:r>
             <a:r>
-              <a:t>운영 정보</a:t>
+              <a:t>수업 시간과 소통 채널</a:t>
             </a:r>
           </a:p>
           <a:p>
@@ -11287,7 +11293,7 @@
           <a:lstStyle/>
           <a:p>
             <a:r>
-              <a:t>5.1 운영 정보</a:t>
+              <a:t>5.1 수업 시간과 소통 채널</a:t>
             </a:r>
           </a:p>
         </p:txBody>
@@ -11308,7 +11314,7 @@
           <a:lstStyle/>
           <a:p>
             <a:r>
-              <a:t>5. 운영과 오늘 할 일</a:t>
+              <a:t>5. 수업 운영 안내</a:t>
             </a:r>
           </a:p>
         </p:txBody>
@@ -11903,7 +11909,7 @@
           <a:lstStyle/>
           <a:p>
             <a:r>
-              <a:t>5. 운영과 오늘 할 일</a:t>
+              <a:t>5. 수업 운영 안내</a:t>
             </a:r>
           </a:p>
         </p:txBody>
@@ -11931,7 +11937,7 @@
           <a:p>
             <a:pPr/>
             <a:r>
-              <a:t>주제: 자유 — 실제 지자체·광역교통의 버스 노선 개선안 평가</a:t>
+              <a:t>주제: 실제 지자체·광역교통의 버스 노선 개선안 평가</a:t>
             </a:r>
           </a:p>
           <a:p>
@@ -12051,7 +12057,7 @@
           <a:lstStyle/>
           <a:p>
             <a:r>
-              <a:t>5. 운영과 오늘 할 일</a:t>
+              <a:t>5. 수업 운영 안내</a:t>
             </a:r>
           </a:p>
         </p:txBody>
@@ -12079,7 +12085,7 @@
           <a:p>
             <a:pPr/>
             <a:r>
-              <a:t>상담일정 시트에 상담 불가능한 날짜·시간 기입</a:t>
+              <a:t>상담 일정 시트에 상담이 어려운 날짜·시간 기입</a:t>
             </a:r>
           </a:p>
           <a:p>
@@ -12097,7 +12103,13 @@
           <a:p>
             <a:pPr/>
             <a:r>
-              <a:t>다음 시간 수 15:00 210호 — 하남시 도로망 읽기와 첫 시뮬레이션 · 노트북 지참</a:t>
+              <a:t>다음 수업: 수요일 15:00, 210호</a:t>
+            </a:r>
+          </a:p>
+          <a:p>
+            <a:pPr lvl="1"/>
+            <a:r>
+              <a:t>하남시 도로망 읽기와 첫 시뮬레이션 · 노트북 지참</a:t>
             </a:r>
           </a:p>
         </p:txBody>
@@ -12286,7 +12298,7 @@
           <a:lstStyle/>
           <a:p>
             <a:r>
-              <a:t>이 과목</a:t>
+              <a:t>수업 소개</a:t>
             </a:r>
           </a:p>
         </p:txBody>
@@ -12320,7 +12332,7 @@
               <a:t>1.1  </a:t>
             </a:r>
             <a:r>
-              <a:t>이 과목에서 만드는 것</a:t>
+              <a:t>한 학기 동안 만들 시뮬레이터</a:t>
             </a:r>
           </a:p>
           <a:p>
@@ -12338,7 +12350,7 @@
               <a:t>1.2  </a:t>
             </a:r>
             <a:r>
-              <a:t>시뮬레이터의 네 부분</a:t>
+              <a:t>시뮬레이터의 전체 구조</a:t>
             </a:r>
           </a:p>
           <a:p>
@@ -12356,7 +12368,7 @@
               <a:t>1.3  </a:t>
             </a:r>
             <a:r>
-              <a:t>학습 목표</a:t>
+              <a:t>학습 성과</a:t>
             </a:r>
           </a:p>
           <a:p>
@@ -12374,7 +12386,7 @@
               <a:t>1.4  </a:t>
             </a:r>
             <a:r>
-              <a:t>직접 짜는 것과 가져다 쓰는 것</a:t>
+              <a:t>직접 구현과 기존 도구 활용</a:t>
             </a:r>
           </a:p>
         </p:txBody>
@@ -12413,7 +12425,7 @@
           <a:lstStyle/>
           <a:p>
             <a:r>
-              <a:t>1.1 이 과목에서 만드는 것</a:t>
+              <a:t>1.1 한 학기 동안 만들 시뮬레이터</a:t>
             </a:r>
           </a:p>
         </p:txBody>
@@ -12434,7 +12446,7 @@
           <a:lstStyle/>
           <a:p>
             <a:r>
-              <a:t>1. 이 과목</a:t>
+              <a:t>1. 수업 소개</a:t>
             </a:r>
           </a:p>
         </p:txBody>
@@ -12456,7 +12468,7 @@
           <a:p>
             <a:pPr/>
             <a:r>
-              <a:t>결과물: 도시 모빌리티 시뮬레이터 한 대 — 12주간 밑바닥부터</a:t>
+              <a:t>한 학기 결과물: 도시 모빌리티 시뮬레이터</a:t>
             </a:r>
           </a:p>
           <a:p>
@@ -12468,19 +12480,13 @@
           <a:p>
             <a:pPr/>
             <a:r>
-              <a:t>마지막 적용 대상: 가천대 교내셔틀 무당이의 개선안 분석</a:t>
+              <a:t>기말 적용 대상: 가천대 교내셔틀 무당이의 개선안 분석</a:t>
             </a:r>
           </a:p>
           <a:p>
             <a:pPr/>
             <a:r>
-              <a:t>데이터 분석·최적화·머신러닝은 별도 단원 없음</a:t>
-            </a:r>
-          </a:p>
-          <a:p>
-            <a:pPr lvl="1"/>
-            <a:r>
-              <a:t>시뮬레이터를 만들다 필요해진 지점에서 하나씩</a:t>
+              <a:t>데이터 분석·최적화·머신러닝: 구현 과정에 필요한 시점마다 적용</a:t>
             </a:r>
           </a:p>
         </p:txBody>
@@ -12567,7 +12573,7 @@
           <a:lstStyle/>
           <a:p>
             <a:r>
-              <a:t>1.2 시뮬레이터의 네 부분</a:t>
+              <a:t>1.2 시뮬레이터의 전체 구조</a:t>
             </a:r>
           </a:p>
         </p:txBody>
@@ -12588,7 +12594,7 @@
           <a:lstStyle/>
           <a:p>
             <a:r>
-              <a:t>1. 이 과목</a:t>
+              <a:t>1. 수업 소개</a:t>
             </a:r>
           </a:p>
         </p:txBody>
@@ -12720,7 +12726,7 @@
           <a:lstStyle/>
           <a:p>
             <a:r>
-              <a:t>1.3 학습 목표</a:t>
+              <a:t>1.3 학습 성과</a:t>
             </a:r>
           </a:p>
         </p:txBody>
@@ -12741,7 +12747,7 @@
           <a:lstStyle/>
           <a:p>
             <a:r>
-              <a:t>1. 이 과목</a:t>
+              <a:t>1. 수업 소개</a:t>
             </a:r>
           </a:p>
         </p:txBody>
@@ -12868,7 +12874,7 @@
           <a:lstStyle/>
           <a:p>
             <a:r>
-              <a:t>1.4 직접 짜는 것과 가져다 쓰는 것</a:t>
+              <a:t>1.4 직접 구현과 기존 도구 활용</a:t>
             </a:r>
           </a:p>
         </p:txBody>
@@ -12889,7 +12895,7 @@
           <a:lstStyle/>
           <a:p>
             <a:r>
-              <a:t>1. 이 과목</a:t>
+              <a:t>1. 수업 소개</a:t>
             </a:r>
           </a:p>
         </p:txBody>
@@ -12911,7 +12917,7 @@
           <a:p>
             <a:pPr/>
             <a:r>
-              <a:t>직접 작성 3개 — 라이브러리 없이</a:t>
+              <a:t>직접 구현: 라이브러리 없이 알고리즘 3개 작성</a:t>
             </a:r>
           </a:p>
           <a:p>
@@ -12923,7 +12929,7 @@
           <a:p>
             <a:pPr/>
             <a:r>
-              <a:t>읽고 실험 — 수요 생성기, 배차 알고리즘</a:t>
+              <a:t>제공 코드 활용: 수요 생성기와 배차 알고리즘</a:t>
             </a:r>
           </a:p>
           <a:p>
@@ -12935,7 +12941,7 @@
           <a:p>
             <a:pPr/>
             <a:r>
-              <a:t>엔진 위임 — 무거운 계산은 DTUMOS에 HTTP 호출</a:t>
+              <a:t>외부 엔진 활용: 계산량이 큰 작업은 DTUMOS에 HTTP 요청</a:t>
             </a:r>
           </a:p>
           <a:p>
@@ -13049,7 +13055,7 @@
           <a:lstStyle/>
           <a:p>
             <a:r>
-              <a:t>12주 흐름</a:t>
+              <a:t>12주 수업 일정</a:t>
             </a:r>
           </a:p>
         </p:txBody>
@@ -13083,7 +13089,7 @@
               <a:t>2.1  </a:t>
             </a:r>
             <a:r>
-              <a:t>12주 흐름 — 1~4주차</a:t>
+              <a:t>1~4주차: 도로망과 경로 탐색</a:t>
             </a:r>
           </a:p>
           <a:p>
@@ -13101,7 +13107,7 @@
               <a:t>2.2  </a:t>
             </a:r>
             <a:r>
-              <a:t>12주 흐름 — 5~8주차</a:t>
+              <a:t>5~8주차: 대중교통과 통행 수요</a:t>
             </a:r>
           </a:p>
           <a:p>
@@ -13119,7 +13125,7 @@
               <a:t>2.3  </a:t>
             </a:r>
             <a:r>
-              <a:t>12주 흐름 — 9~12주차</a:t>
+              <a:t>9~12주차: 시험과 기말 프로젝트</a:t>
             </a:r>
           </a:p>
           <a:p>
@@ -13176,7 +13182,7 @@
           <a:lstStyle/>
           <a:p>
             <a:r>
-              <a:t>2.1 12주 흐름 — 1~4주차</a:t>
+              <a:t>2.1 1~4주차: 도로망과 경로 탐색</a:t>
             </a:r>
           </a:p>
         </p:txBody>
@@ -13197,7 +13203,7 @@
           <a:lstStyle/>
           <a:p>
             <a:r>
-              <a:t>2. 12주 흐름</a:t>
+              <a:t>2. 12주 수업 일정</a:t>
             </a:r>
           </a:p>
         </p:txBody>
@@ -13397,7 +13403,7 @@
                           </a:solidFill>
                           <a:latin typeface="Pretendard Medium"/>
                         </a:rPr>
-                        <a:t>만드는 것</a:t>
+                        <a:t>실습 결과</a:t>
                       </a:r>
                     </a:p>
                   </a:txBody>
@@ -13905,7 +13911,7 @@
                           </a:solidFill>
                           <a:latin typeface="Pretendard Medium"/>
                         </a:rPr>
-                        <a:t>밑바닥부터 최단경로</a:t>
+                        <a:t>최단경로 직접 구현</a:t>
                       </a:r>
                     </a:p>
                   </a:txBody>

--- a/slides/00_orientation/00_orientation.pptx
+++ b/slides/00_orientation/00_orientation.pptx
@@ -4,24 +4,26 @@
   <p:sldMasterIdLst>
     <p:sldMasterId id="2147483648" r:id="rId1"/>
   </p:sldMasterIdLst>
+  <p:notesMasterIdLst>
+    <p:notesMasterId r:id="rId16"/>
+  </p:notesMasterIdLst>
   <p:sldIdLst>
-    <p:sldId id="256" r:id="rId7"/>
-    <p:sldId id="257" r:id="rId8"/>
-    <p:sldId id="258" r:id="rId9"/>
-    <p:sldId id="259" r:id="rId10"/>
-    <p:sldId id="260" r:id="rId11"/>
-    <p:sldId id="261" r:id="rId12"/>
-    <p:sldId id="262" r:id="rId13"/>
-    <p:sldId id="263" r:id="rId14"/>
-    <p:sldId id="264" r:id="rId15"/>
-    <p:sldId id="265" r:id="rId16"/>
-    <p:sldId id="266" r:id="rId17"/>
-    <p:sldId id="267" r:id="rId18"/>
-    <p:sldId id="268" r:id="rId19"/>
-    <p:sldId id="269" r:id="rId20"/>
-    <p:sldId id="270" r:id="rId21"/>
+    <p:sldId id="256" r:id="rId2"/>
+    <p:sldId id="257" r:id="rId3"/>
+    <p:sldId id="258" r:id="rId4"/>
+    <p:sldId id="260" r:id="rId5"/>
+    <p:sldId id="261" r:id="rId6"/>
+    <p:sldId id="262" r:id="rId7"/>
+    <p:sldId id="263" r:id="rId8"/>
+    <p:sldId id="264" r:id="rId9"/>
+    <p:sldId id="265" r:id="rId10"/>
+    <p:sldId id="266" r:id="rId11"/>
+    <p:sldId id="267" r:id="rId12"/>
+    <p:sldId id="268" r:id="rId13"/>
+    <p:sldId id="269" r:id="rId14"/>
+    <p:sldId id="270" r:id="rId15"/>
   </p:sldIdLst>
-  <p:sldSz cx="12191695" cy="6858000" type="screen4x3"/>
+  <p:sldSz cx="12192000" cy="6858000"/>
   <p:notesSz cx="6858000" cy="9144000"/>
   <p:defaultTextStyle>
     <a:defPPr>
@@ -118,11 +120,27 @@
       </a:defRPr>
     </a:lvl9pPr>
   </p:defaultTextStyle>
+  <p:extLst>
+    <p:ext uri="{EFAFB233-063F-42B5-8137-9DF3F51BA10A}">
+      <p15:sldGuideLst xmlns:p15="http://schemas.microsoft.com/office/powerpoint/2012/main">
+        <p15:guide id="1" orient="horz" pos="2160">
+          <p15:clr>
+            <a:srgbClr val="A4A3A4"/>
+          </p15:clr>
+        </p15:guide>
+        <p15:guide id="2" pos="2880">
+          <p15:clr>
+            <a:srgbClr val="A4A3A4"/>
+          </p15:clr>
+        </p15:guide>
+      </p15:sldGuideLst>
+    </p:ext>
+  </p:extLst>
 </p:presentation>
 </file>
 
 <file path=ppt/notesMasters/notesMaster1.xml><?xml version="1.0" encoding="utf-8"?>
-<p:notesMaster xmlns:a="http://schemas.openxmlformats.org/drawingml/2006/main" xmlns:p="http://schemas.openxmlformats.org/presentationml/2006/main" xmlns:r="http://schemas.openxmlformats.org/officeDocument/2006/relationships">
+<p:notesMaster xmlns:a="http://schemas.openxmlformats.org/drawingml/2006/main" xmlns:r="http://schemas.openxmlformats.org/officeDocument/2006/relationships" xmlns:p="http://schemas.openxmlformats.org/presentationml/2006/main">
   <p:cSld>
     <p:bg>
       <p:bgRef idx="1001">
@@ -145,7 +163,7 @@
       </p:grpSpPr>
       <p:sp>
         <p:nvSpPr>
-          <p:cNvPr id="2" name="Header Placeholder 1"/>
+          <p:cNvPr id="2" name="머리글 개체 틀 1"/>
           <p:cNvSpPr>
             <a:spLocks noGrp="1"/>
           </p:cNvSpPr>
@@ -156,7 +174,7 @@
         <p:spPr>
           <a:xfrm>
             <a:off x="0" y="0"/>
-            <a:ext cx="2971800" cy="457200"/>
+            <a:ext cx="2971800" cy="458788"/>
           </a:xfrm>
           <a:prstGeom prst="rect">
             <a:avLst/>
@@ -170,13 +188,13 @@
             </a:lvl1pPr>
           </a:lstStyle>
           <a:p>
-            <a:endParaRPr lang="en-US"/>
-          </a:p>
-        </p:txBody>
-      </p:sp>
-      <p:sp>
-        <p:nvSpPr>
-          <p:cNvPr id="3" name="Date Placeholder 2"/>
+            <a:endParaRPr kumimoji="1" lang="ko-KR" altLang="en-US"/>
+          </a:p>
+        </p:txBody>
+      </p:sp>
+      <p:sp>
+        <p:nvSpPr>
+          <p:cNvPr id="3" name="날짜 개체 틀 2"/>
           <p:cNvSpPr>
             <a:spLocks noGrp="1"/>
           </p:cNvSpPr>
@@ -187,7 +205,7 @@
         <p:spPr>
           <a:xfrm>
             <a:off x="3884613" y="0"/>
-            <a:ext cx="2971800" cy="457200"/>
+            <a:ext cx="2971800" cy="458788"/>
           </a:xfrm>
           <a:prstGeom prst="rect">
             <a:avLst/>
@@ -201,17 +219,17 @@
             </a:lvl1pPr>
           </a:lstStyle>
           <a:p>
-            <a:fld id="{0F89C1C7-3DCD-1040-A9CF-14679D8B5DDD}" type="datetimeFigureOut">
-              <a:rPr lang="en-US" smtClean="0"/>
-              <a:t>10/17/16</a:t>
+            <a:fld id="{24C93016-817A-204A-86F5-3FEED79E8F95}" type="datetimeFigureOut">
+              <a:rPr kumimoji="1" lang="ko-KR" altLang="en-US" smtClean="0"/>
+              <a:t>2026. 9. 8.</a:t>
             </a:fld>
-            <a:endParaRPr lang="en-US"/>
-          </a:p>
-        </p:txBody>
-      </p:sp>
-      <p:sp>
-        <p:nvSpPr>
-          <p:cNvPr id="4" name="Slide Image Placeholder 3"/>
+            <a:endParaRPr kumimoji="1" lang="ko-KR" altLang="en-US"/>
+          </a:p>
+        </p:txBody>
+      </p:sp>
+      <p:sp>
+        <p:nvSpPr>
+          <p:cNvPr id="4" name="슬라이드 이미지 개체 틀 3"/>
           <p:cNvSpPr>
             <a:spLocks noGrp="1" noRot="1" noChangeAspect="1"/>
           </p:cNvSpPr>
@@ -221,8 +239,8 @@
         </p:nvSpPr>
         <p:spPr>
           <a:xfrm>
-            <a:off x="1143000" y="685800"/>
-            <a:ext cx="4572000" cy="3429000"/>
+            <a:off x="685800" y="1143000"/>
+            <a:ext cx="5486400" cy="3086100"/>
           </a:xfrm>
           <a:prstGeom prst="rect">
             <a:avLst/>
@@ -238,13 +256,13 @@
           <a:bodyPr vert="horz" lIns="91440" tIns="45720" rIns="91440" bIns="45720" rtlCol="0" anchor="ctr"/>
           <a:lstStyle/>
           <a:p>
-            <a:endParaRPr lang="en-US"/>
-          </a:p>
-        </p:txBody>
-      </p:sp>
-      <p:sp>
-        <p:nvSpPr>
-          <p:cNvPr id="5" name="Notes Placeholder 4"/>
+            <a:endParaRPr lang="ko-KR" altLang="en-US"/>
+          </a:p>
+        </p:txBody>
+      </p:sp>
+      <p:sp>
+        <p:nvSpPr>
+          <p:cNvPr id="5" name="슬라이드 노트 개체 틀 4"/>
           <p:cNvSpPr>
             <a:spLocks noGrp="1"/>
           </p:cNvSpPr>
@@ -254,8 +272,8 @@
         </p:nvSpPr>
         <p:spPr>
           <a:xfrm>
-            <a:off x="685800" y="4343400"/>
-            <a:ext cx="5486400" cy="4114800"/>
+            <a:off x="685800" y="4400550"/>
+            <a:ext cx="5486400" cy="3600450"/>
           </a:xfrm>
           <a:prstGeom prst="rect">
             <a:avLst/>
@@ -267,44 +285,43 @@
           <a:p>
             <a:pPr lvl="0"/>
             <a:r>
-              <a:rPr lang="en-US" smtClean="0"/>
-              <a:t>Click to edit Master text styles</a:t>
+              <a:rPr kumimoji="1" lang="ko-KR" altLang="en-US"/>
+              <a:t>마스터 텍스트 스타일을 편집하려면 클릭</a:t>
             </a:r>
           </a:p>
           <a:p>
             <a:pPr lvl="1"/>
             <a:r>
-              <a:rPr lang="en-US" smtClean="0"/>
-              <a:t>Second level</a:t>
+              <a:rPr kumimoji="1" lang="ko-KR" altLang="en-US"/>
+              <a:t>두 번째 수준</a:t>
             </a:r>
           </a:p>
           <a:p>
             <a:pPr lvl="2"/>
             <a:r>
-              <a:rPr lang="en-US" smtClean="0"/>
-              <a:t>Third level</a:t>
+              <a:rPr kumimoji="1" lang="ko-KR" altLang="en-US"/>
+              <a:t>세 번째 수준</a:t>
             </a:r>
           </a:p>
           <a:p>
             <a:pPr lvl="3"/>
             <a:r>
-              <a:rPr lang="en-US" smtClean="0"/>
-              <a:t>Fourth level</a:t>
+              <a:rPr kumimoji="1" lang="ko-KR" altLang="en-US"/>
+              <a:t>네 번째 수준</a:t>
             </a:r>
           </a:p>
           <a:p>
             <a:pPr lvl="4"/>
             <a:r>
-              <a:rPr lang="en-US" smtClean="0"/>
-              <a:t>Fifth level</a:t>
-            </a:r>
-            <a:endParaRPr lang="en-US"/>
-          </a:p>
-        </p:txBody>
-      </p:sp>
-      <p:sp>
-        <p:nvSpPr>
-          <p:cNvPr id="6" name="Footer Placeholder 5"/>
+              <a:rPr kumimoji="1" lang="ko-KR" altLang="en-US"/>
+              <a:t>다섯 번째 수준</a:t>
+            </a:r>
+          </a:p>
+        </p:txBody>
+      </p:sp>
+      <p:sp>
+        <p:nvSpPr>
+          <p:cNvPr id="6" name="바닥글 개체 틀 5"/>
           <p:cNvSpPr>
             <a:spLocks noGrp="1"/>
           </p:cNvSpPr>
@@ -315,7 +332,7 @@
         <p:spPr>
           <a:xfrm>
             <a:off x="0" y="8685213"/>
-            <a:ext cx="2971800" cy="457200"/>
+            <a:ext cx="2971800" cy="458787"/>
           </a:xfrm>
           <a:prstGeom prst="rect">
             <a:avLst/>
@@ -329,13 +346,13 @@
             </a:lvl1pPr>
           </a:lstStyle>
           <a:p>
-            <a:endParaRPr lang="en-US"/>
-          </a:p>
-        </p:txBody>
-      </p:sp>
-      <p:sp>
-        <p:nvSpPr>
-          <p:cNvPr id="7" name="Slide Number Placeholder 6"/>
+            <a:endParaRPr kumimoji="1" lang="ko-KR" altLang="en-US"/>
+          </a:p>
+        </p:txBody>
+      </p:sp>
+      <p:sp>
+        <p:nvSpPr>
+          <p:cNvPr id="7" name="슬라이드 번호 개체 틀 6"/>
           <p:cNvSpPr>
             <a:spLocks noGrp="1"/>
           </p:cNvSpPr>
@@ -346,7 +363,7 @@
         <p:spPr>
           <a:xfrm>
             <a:off x="3884613" y="8685213"/>
-            <a:ext cx="2971800" cy="457200"/>
+            <a:ext cx="2971800" cy="458787"/>
           </a:xfrm>
           <a:prstGeom prst="rect">
             <a:avLst/>
@@ -360,24 +377,24 @@
             </a:lvl1pPr>
           </a:lstStyle>
           <a:p>
-            <a:fld id="{BB5E49A5-4136-284D-997B-48E1D791AD67}" type="slidenum">
-              <a:rPr lang="en-US" smtClean="0"/>
+            <a:fld id="{7DDAA2F9-9555-CF45-A89A-4C8A368D5BF6}" type="slidenum">
+              <a:rPr kumimoji="1" lang="ko-KR" altLang="en-US" smtClean="0"/>
               <a:t>‹#›</a:t>
             </a:fld>
-            <a:endParaRPr lang="en-US"/>
+            <a:endParaRPr kumimoji="1" lang="ko-KR" altLang="en-US"/>
           </a:p>
         </p:txBody>
       </p:sp>
     </p:spTree>
     <p:extLst>
       <p:ext uri="{BB962C8B-B14F-4D97-AF65-F5344CB8AC3E}">
-        <p14:creationId xmlns:p14="http://schemas.microsoft.com/office/powerpoint/2010/main" val="2623252185"/>
+        <p14:creationId xmlns:p14="http://schemas.microsoft.com/office/powerpoint/2010/main" val="3365955283"/>
       </p:ext>
     </p:extLst>
   </p:cSld>
   <p:clrMap bg1="lt1" tx1="dk1" bg2="lt2" tx2="dk2" accent1="accent1" accent2="accent2" accent3="accent3" accent4="accent4" accent5="accent5" accent6="accent6" hlink="hlink" folHlink="folHlink"/>
   <p:notesStyle>
-    <a:lvl1pPr marL="0" algn="l" defTabSz="457200" rtl="0" eaLnBrk="1" latinLnBrk="0" hangingPunct="1">
+    <a:lvl1pPr marL="0" algn="l" defTabSz="914400" rtl="0" eaLnBrk="1" latinLnBrk="1" hangingPunct="1">
       <a:defRPr sz="1200" kern="1200">
         <a:solidFill>
           <a:schemeClr val="tx1"/>
@@ -387,7 +404,7 @@
         <a:cs typeface="+mn-cs"/>
       </a:defRPr>
     </a:lvl1pPr>
-    <a:lvl2pPr marL="457200" algn="l" defTabSz="457200" rtl="0" eaLnBrk="1" latinLnBrk="0" hangingPunct="1">
+    <a:lvl2pPr marL="457200" algn="l" defTabSz="914400" rtl="0" eaLnBrk="1" latinLnBrk="1" hangingPunct="1">
       <a:defRPr sz="1200" kern="1200">
         <a:solidFill>
           <a:schemeClr val="tx1"/>
@@ -397,7 +414,7 @@
         <a:cs typeface="+mn-cs"/>
       </a:defRPr>
     </a:lvl2pPr>
-    <a:lvl3pPr marL="914400" algn="l" defTabSz="457200" rtl="0" eaLnBrk="1" latinLnBrk="0" hangingPunct="1">
+    <a:lvl3pPr marL="914400" algn="l" defTabSz="914400" rtl="0" eaLnBrk="1" latinLnBrk="1" hangingPunct="1">
       <a:defRPr sz="1200" kern="1200">
         <a:solidFill>
           <a:schemeClr val="tx1"/>
@@ -407,7 +424,7 @@
         <a:cs typeface="+mn-cs"/>
       </a:defRPr>
     </a:lvl3pPr>
-    <a:lvl4pPr marL="1371600" algn="l" defTabSz="457200" rtl="0" eaLnBrk="1" latinLnBrk="0" hangingPunct="1">
+    <a:lvl4pPr marL="1371600" algn="l" defTabSz="914400" rtl="0" eaLnBrk="1" latinLnBrk="1" hangingPunct="1">
       <a:defRPr sz="1200" kern="1200">
         <a:solidFill>
           <a:schemeClr val="tx1"/>
@@ -417,7 +434,7 @@
         <a:cs typeface="+mn-cs"/>
       </a:defRPr>
     </a:lvl4pPr>
-    <a:lvl5pPr marL="1828800" algn="l" defTabSz="457200" rtl="0" eaLnBrk="1" latinLnBrk="0" hangingPunct="1">
+    <a:lvl5pPr marL="1828800" algn="l" defTabSz="914400" rtl="0" eaLnBrk="1" latinLnBrk="1" hangingPunct="1">
       <a:defRPr sz="1200" kern="1200">
         <a:solidFill>
           <a:schemeClr val="tx1"/>
@@ -427,7 +444,7 @@
         <a:cs typeface="+mn-cs"/>
       </a:defRPr>
     </a:lvl5pPr>
-    <a:lvl6pPr marL="2286000" algn="l" defTabSz="457200" rtl="0" eaLnBrk="1" latinLnBrk="0" hangingPunct="1">
+    <a:lvl6pPr marL="2286000" algn="l" defTabSz="914400" rtl="0" eaLnBrk="1" latinLnBrk="1" hangingPunct="1">
       <a:defRPr sz="1200" kern="1200">
         <a:solidFill>
           <a:schemeClr val="tx1"/>
@@ -437,7 +454,7 @@
         <a:cs typeface="+mn-cs"/>
       </a:defRPr>
     </a:lvl6pPr>
-    <a:lvl7pPr marL="2743200" algn="l" defTabSz="457200" rtl="0" eaLnBrk="1" latinLnBrk="0" hangingPunct="1">
+    <a:lvl7pPr marL="2743200" algn="l" defTabSz="914400" rtl="0" eaLnBrk="1" latinLnBrk="1" hangingPunct="1">
       <a:defRPr sz="1200" kern="1200">
         <a:solidFill>
           <a:schemeClr val="tx1"/>
@@ -447,7 +464,7 @@
         <a:cs typeface="+mn-cs"/>
       </a:defRPr>
     </a:lvl7pPr>
-    <a:lvl8pPr marL="3200400" algn="l" defTabSz="457200" rtl="0" eaLnBrk="1" latinLnBrk="0" hangingPunct="1">
+    <a:lvl8pPr marL="3200400" algn="l" defTabSz="914400" rtl="0" eaLnBrk="1" latinLnBrk="1" hangingPunct="1">
       <a:defRPr sz="1200" kern="1200">
         <a:solidFill>
           <a:schemeClr val="tx1"/>
@@ -457,7 +474,7 @@
         <a:cs typeface="+mn-cs"/>
       </a:defRPr>
     </a:lvl8pPr>
-    <a:lvl9pPr marL="3657600" algn="l" defTabSz="457200" rtl="0" eaLnBrk="1" latinLnBrk="0" hangingPunct="1">
+    <a:lvl9pPr marL="3657600" algn="l" defTabSz="914400" rtl="0" eaLnBrk="1" latinLnBrk="1" hangingPunct="1">
       <a:defRPr sz="1200" kern="1200">
         <a:solidFill>
           <a:schemeClr val="tx1"/>
@@ -472,7 +489,7 @@
 </file>
 
 <file path=ppt/notesSlides/notesSlide1.xml><?xml version="1.0" encoding="utf-8"?>
-<p:notes xmlns:a="http://schemas.openxmlformats.org/drawingml/2006/main" xmlns:p="http://schemas.openxmlformats.org/presentationml/2006/main" xmlns:r="http://schemas.openxmlformats.org/officeDocument/2006/relationships">
+<p:notes xmlns:a="http://schemas.openxmlformats.org/drawingml/2006/main" xmlns:r="http://schemas.openxmlformats.org/officeDocument/2006/relationships" xmlns:p="http://schemas.openxmlformats.org/presentationml/2006/main">
   <p:cSld>
     <p:spTree>
       <p:nvGrpSpPr>
@@ -492,7 +509,7 @@
         <p:nvSpPr>
           <p:cNvPr id="2" name="Slide Image Placeholder 1"/>
           <p:cNvSpPr>
-            <a:spLocks noGrp="1"/>
+            <a:spLocks noGrp="1" noRot="1" noChangeAspect="1"/>
           </p:cNvSpPr>
           <p:nvPr>
             <p:ph type="sldImg" idx="2"/>
@@ -507,7 +524,7 @@
             <a:spLocks noGrp="1"/>
           </p:cNvSpPr>
           <p:nvPr>
-            <p:ph type="body" idx="3" sz="quarter"/>
+            <p:ph type="body" sz="quarter" idx="3"/>
           </p:nvPr>
         </p:nvSpPr>
         <p:spPr/>
@@ -528,7 +545,7 @@
             <a:spLocks noGrp="1"/>
           </p:cNvSpPr>
           <p:nvPr>
-            <p:ph type="sldNum" idx="5" sz="quarter"/>
+            <p:ph type="sldNum" sz="quarter" idx="5"/>
           </p:nvPr>
         </p:nvSpPr>
         <p:spPr/>
@@ -542,7 +559,7 @@
 </file>
 
 <file path=ppt/slideLayouts/slideLayout1.xml><?xml version="1.0" encoding="utf-8"?>
-<p:sldLayout xmlns:a="http://schemas.openxmlformats.org/drawingml/2006/main" xmlns:r="http://schemas.openxmlformats.org/officeDocument/2006/relationships" xmlns:p="http://schemas.openxmlformats.org/presentationml/2006/main" type="title" preserve="1" showMasterSp="0">
+<p:sldLayout xmlns:a="http://schemas.openxmlformats.org/drawingml/2006/main" xmlns:r="http://schemas.openxmlformats.org/officeDocument/2006/relationships" xmlns:p="http://schemas.openxmlformats.org/presentationml/2006/main" showMasterSp="0" type="title" preserve="1">
   <p:cSld name="Title Slide">
     <p:spTree>
       <p:nvGrpSpPr>
@@ -575,7 +592,7 @@
           </a:xfrm>
         </p:spPr>
         <p:txBody>
-          <a:bodyPr anchor="b" wrap="square" lIns="91440" tIns="91440" rIns="91440" bIns="91440">
+          <a:bodyPr wrap="square" lIns="91440" tIns="91440" rIns="91440" bIns="91440" anchor="b">
             <a:normAutofit/>
           </a:bodyPr>
           <a:lstStyle>
@@ -584,7 +601,7 @@
                 <a:spcPts val="0"/>
               </a:spcBef>
               <a:buNone/>
-              <a:defRPr sz="3400" kern="1200" b="1">
+              <a:defRPr sz="3400" b="1" kern="1200">
                 <a:solidFill>
                   <a:schemeClr val="tx2"/>
                 </a:solidFill>
@@ -596,10 +613,9 @@
           </a:lstStyle>
           <a:p>
             <a:r>
-              <a:rPr lang="en-US" smtClean="0"/>
+              <a:rPr lang="en-US"/>
               <a:t>Click to edit Master title style</a:t>
             </a:r>
-            <a:endParaRPr lang="en-US"/>
           </a:p>
         </p:txBody>
       </p:sp>
@@ -620,7 +636,7 @@
           </a:xfrm>
         </p:spPr>
         <p:txBody>
-          <a:bodyPr anchor="t" wrap="square" lIns="91440" tIns="91440" rIns="91440" bIns="91440">
+          <a:bodyPr wrap="square" lIns="91440" tIns="91440" rIns="91440" bIns="91440" anchor="t">
             <a:normAutofit/>
           </a:bodyPr>
           <a:lstStyle>
@@ -641,10 +657,9 @@
           </a:lstStyle>
           <a:p>
             <a:r>
-              <a:rPr lang="en-US" smtClean="0"/>
+              <a:rPr lang="en-US"/>
               <a:t>Click to edit Master subtitle style</a:t>
             </a:r>
-            <a:endParaRPr lang="en-US"/>
           </a:p>
         </p:txBody>
       </p:sp>
@@ -720,10 +735,9 @@
           <a:lstStyle/>
           <a:p>
             <a:r>
-              <a:rPr lang="en-US" smtClean="0"/>
+              <a:rPr lang="en-US"/>
               <a:t>Click to edit Master title style</a:t>
             </a:r>
-            <a:endParaRPr lang="en-US"/>
           </a:p>
         </p:txBody>
       </p:sp>
@@ -744,45 +758,44 @@
           </a:xfrm>
         </p:spPr>
         <p:txBody>
-          <a:bodyPr anchor="t" wrap="square" lIns="91440" tIns="91440" rIns="91440" bIns="91440">
+          <a:bodyPr wrap="square" lIns="91440" tIns="91440" rIns="91440" bIns="91440" anchor="t">
             <a:normAutofit/>
           </a:bodyPr>
           <a:lstStyle/>
           <a:p>
             <a:pPr lvl="0"/>
             <a:r>
-              <a:rPr lang="en-US" smtClean="0"/>
+              <a:rPr lang="en-US"/>
               <a:t>Click to edit Master text styles</a:t>
             </a:r>
           </a:p>
           <a:p>
             <a:pPr lvl="1"/>
             <a:r>
-              <a:rPr lang="en-US" smtClean="0"/>
+              <a:rPr lang="en-US"/>
               <a:t>Second level</a:t>
             </a:r>
           </a:p>
           <a:p>
             <a:pPr lvl="2"/>
             <a:r>
-              <a:rPr lang="en-US" smtClean="0"/>
+              <a:rPr lang="en-US"/>
               <a:t>Third level</a:t>
             </a:r>
           </a:p>
           <a:p>
             <a:pPr lvl="3"/>
             <a:r>
-              <a:rPr lang="en-US" smtClean="0"/>
+              <a:rPr lang="en-US"/>
               <a:t>Fourth level</a:t>
             </a:r>
           </a:p>
           <a:p>
             <a:pPr lvl="4"/>
             <a:r>
-              <a:rPr lang="en-US" smtClean="0"/>
+              <a:rPr lang="en-US"/>
               <a:t>Fifth level</a:t>
             </a:r>
-            <a:endParaRPr lang="en-US"/>
           </a:p>
         </p:txBody>
       </p:sp>
@@ -852,7 +865,7 @@
 </file>
 
 <file path=ppt/slideLayouts/slideLayout3.xml><?xml version="1.0" encoding="utf-8"?>
-<p:sldLayout xmlns:a="http://schemas.openxmlformats.org/drawingml/2006/main" xmlns:r="http://schemas.openxmlformats.org/officeDocument/2006/relationships" xmlns:p="http://schemas.openxmlformats.org/presentationml/2006/main" type="secHead" preserve="1" showMasterSp="0">
+<p:sldLayout xmlns:a="http://schemas.openxmlformats.org/drawingml/2006/main" xmlns:r="http://schemas.openxmlformats.org/officeDocument/2006/relationships" xmlns:p="http://schemas.openxmlformats.org/presentationml/2006/main" showMasterSp="0" type="secHead" preserve="1">
   <p:cSld name="Section Header">
     <p:spTree>
       <p:nvGrpSpPr>
@@ -885,7 +898,7 @@
           </a:xfrm>
         </p:spPr>
         <p:txBody>
-          <a:bodyPr anchor="b" wrap="square" lIns="91440" tIns="91440" rIns="91440" bIns="91440">
+          <a:bodyPr wrap="square" lIns="91440" tIns="91440" rIns="91440" bIns="91440" anchor="b">
             <a:normAutofit/>
           </a:bodyPr>
           <a:lstStyle>
@@ -894,7 +907,7 @@
                 <a:spcPts val="0"/>
               </a:spcBef>
               <a:buNone/>
-              <a:defRPr sz="3200" kern="1200" b="1">
+              <a:defRPr sz="3200" b="1" kern="1200">
                 <a:solidFill>
                   <a:schemeClr val="tx2"/>
                 </a:solidFill>
@@ -906,10 +919,9 @@
           </a:lstStyle>
           <a:p>
             <a:r>
-              <a:rPr lang="en-US" smtClean="0"/>
+              <a:rPr lang="en-US"/>
               <a:t>Click to edit Master title style</a:t>
             </a:r>
-            <a:endParaRPr lang="en-US"/>
           </a:p>
         </p:txBody>
       </p:sp>
@@ -930,7 +942,7 @@
           </a:xfrm>
         </p:spPr>
         <p:txBody>
-          <a:bodyPr anchor="t" wrap="square" lIns="91440" tIns="91440" rIns="91440" bIns="91440">
+          <a:bodyPr wrap="square" lIns="91440" tIns="91440" rIns="91440" bIns="91440" anchor="t">
             <a:normAutofit/>
           </a:bodyPr>
           <a:lstStyle>
@@ -952,7 +964,7 @@
           <a:p>
             <a:pPr lvl="0"/>
             <a:r>
-              <a:rPr lang="en-US" smtClean="0"/>
+              <a:rPr lang="en-US"/>
               <a:t>Click to edit Master text styles</a:t>
             </a:r>
           </a:p>
@@ -1082,10 +1094,9 @@
           <a:lstStyle/>
           <a:p>
             <a:r>
-              <a:rPr lang="en-US" smtClean="0"/>
+              <a:rPr lang="en-US"/>
               <a:t>Click to edit Master title style</a:t>
             </a:r>
-            <a:endParaRPr lang="en-US"/>
           </a:p>
         </p:txBody>
       </p:sp>
@@ -1106,45 +1117,44 @@
           </a:xfrm>
         </p:spPr>
         <p:txBody>
-          <a:bodyPr anchor="t" wrap="square" lIns="91440" tIns="91440" rIns="91440" bIns="91440">
+          <a:bodyPr wrap="square" lIns="91440" tIns="91440" rIns="91440" bIns="91440" anchor="t">
             <a:normAutofit/>
           </a:bodyPr>
           <a:lstStyle/>
           <a:p>
             <a:pPr lvl="0"/>
             <a:r>
-              <a:rPr lang="en-US" smtClean="0"/>
+              <a:rPr lang="en-US"/>
               <a:t>Click to edit Master text styles</a:t>
             </a:r>
           </a:p>
           <a:p>
             <a:pPr lvl="1"/>
             <a:r>
-              <a:rPr lang="en-US" smtClean="0"/>
+              <a:rPr lang="en-US"/>
               <a:t>Second level</a:t>
             </a:r>
           </a:p>
           <a:p>
             <a:pPr lvl="2"/>
             <a:r>
-              <a:rPr lang="en-US" smtClean="0"/>
+              <a:rPr lang="en-US"/>
               <a:t>Third level</a:t>
             </a:r>
           </a:p>
           <a:p>
             <a:pPr lvl="3"/>
             <a:r>
-              <a:rPr lang="en-US" smtClean="0"/>
+              <a:rPr lang="en-US"/>
               <a:t>Fourth level</a:t>
             </a:r>
           </a:p>
           <a:p>
             <a:pPr lvl="4"/>
             <a:r>
-              <a:rPr lang="en-US" smtClean="0"/>
+              <a:rPr lang="en-US"/>
               <a:t>Fifth level</a:t>
             </a:r>
-            <a:endParaRPr lang="en-US"/>
           </a:p>
         </p:txBody>
       </p:sp>
@@ -1165,45 +1175,44 @@
           </a:xfrm>
         </p:spPr>
         <p:txBody>
-          <a:bodyPr anchor="t" wrap="square" lIns="91440" tIns="91440" rIns="91440" bIns="91440">
+          <a:bodyPr wrap="square" lIns="91440" tIns="91440" rIns="91440" bIns="91440" anchor="t">
             <a:normAutofit/>
           </a:bodyPr>
           <a:lstStyle/>
           <a:p>
             <a:pPr lvl="0"/>
             <a:r>
-              <a:rPr lang="en-US" smtClean="0"/>
+              <a:rPr lang="en-US"/>
               <a:t>Click to edit Master text styles</a:t>
             </a:r>
           </a:p>
           <a:p>
             <a:pPr lvl="1"/>
             <a:r>
-              <a:rPr lang="en-US" smtClean="0"/>
+              <a:rPr lang="en-US"/>
               <a:t>Second level</a:t>
             </a:r>
           </a:p>
           <a:p>
             <a:pPr lvl="2"/>
             <a:r>
-              <a:rPr lang="en-US" smtClean="0"/>
+              <a:rPr lang="en-US"/>
               <a:t>Third level</a:t>
             </a:r>
           </a:p>
           <a:p>
             <a:pPr lvl="3"/>
             <a:r>
-              <a:rPr lang="en-US" smtClean="0"/>
+              <a:rPr lang="en-US"/>
               <a:t>Fourth level</a:t>
             </a:r>
           </a:p>
           <a:p>
             <a:pPr lvl="4"/>
             <a:r>
-              <a:rPr lang="en-US" smtClean="0"/>
+              <a:rPr lang="en-US"/>
               <a:t>Fifth level</a:t>
             </a:r>
-            <a:endParaRPr lang="en-US"/>
           </a:p>
         </p:txBody>
       </p:sp>
@@ -1272,7 +1281,7 @@
 </p:sldLayout>
 </file>
 
-<file path=ppt/slideLayouts/slideLayout6.xml><?xml version="1.0" encoding="utf-8"?>
+<file path=ppt/slideLayouts/slideLayout5.xml><?xml version="1.0" encoding="utf-8"?>
 <p:sldLayout xmlns:a="http://schemas.openxmlformats.org/drawingml/2006/main" xmlns:r="http://schemas.openxmlformats.org/officeDocument/2006/relationships" xmlns:p="http://schemas.openxmlformats.org/presentationml/2006/main" type="titleOnly" preserve="1">
   <p:cSld name="Title Only">
     <p:spTree>
@@ -1310,10 +1319,9 @@
           <a:lstStyle/>
           <a:p>
             <a:r>
-              <a:rPr lang="en-US" smtClean="0"/>
+              <a:rPr lang="en-US"/>
               <a:t>Click to edit Master title style</a:t>
             </a:r>
-            <a:endParaRPr lang="en-US"/>
           </a:p>
         </p:txBody>
       </p:sp>
@@ -1382,7 +1390,7 @@
 </p:sldLayout>
 </file>
 
-<file path=ppt/slideLayouts/slideLayout7.xml><?xml version="1.0" encoding="utf-8"?>
+<file path=ppt/slideLayouts/slideLayout6.xml><?xml version="1.0" encoding="utf-8"?>
 <p:sldLayout xmlns:a="http://schemas.openxmlformats.org/drawingml/2006/main" xmlns:r="http://schemas.openxmlformats.org/officeDocument/2006/relationships" xmlns:p="http://schemas.openxmlformats.org/presentationml/2006/main" type="blank" preserve="1">
   <p:cSld name="Blank">
     <p:spTree>
@@ -1464,7 +1472,7 @@
 </p:sldLayout>
 </file>
 
-<file path=ppt/slideLayouts/slideLayout8.xml><?xml version="1.0" encoding="utf-8"?>
+<file path=ppt/slideLayouts/slideLayout7.xml><?xml version="1.0" encoding="utf-8"?>
 <p:sldLayout xmlns:a="http://schemas.openxmlformats.org/drawingml/2006/main" xmlns:r="http://schemas.openxmlformats.org/officeDocument/2006/relationships" xmlns:p="http://schemas.openxmlformats.org/presentationml/2006/main" type="objTx" preserve="1">
   <p:cSld name="Content and Figure">
     <p:spTree>
@@ -1506,10 +1514,9 @@
           </a:lstStyle>
           <a:p>
             <a:r>
-              <a:rPr lang="en-US" smtClean="0"/>
+              <a:rPr lang="en-US"/>
               <a:t>Click to edit Master title style</a:t>
             </a:r>
-            <a:endParaRPr lang="en-US"/>
           </a:p>
         </p:txBody>
       </p:sp>
@@ -1530,45 +1537,44 @@
           </a:xfrm>
         </p:spPr>
         <p:txBody>
-          <a:bodyPr anchor="t" wrap="square" lIns="91440" tIns="91440" rIns="91440" bIns="91440">
+          <a:bodyPr wrap="square" lIns="91440" tIns="91440" rIns="91440" bIns="91440" anchor="t">
             <a:normAutofit/>
           </a:bodyPr>
           <a:lstStyle/>
           <a:p>
             <a:pPr lvl="0"/>
             <a:r>
-              <a:rPr lang="en-US" smtClean="0"/>
+              <a:rPr lang="en-US"/>
               <a:t>Click to edit Master text styles</a:t>
             </a:r>
           </a:p>
           <a:p>
             <a:pPr lvl="1"/>
             <a:r>
-              <a:rPr lang="en-US" smtClean="0"/>
+              <a:rPr lang="en-US"/>
               <a:t>Second level</a:t>
             </a:r>
           </a:p>
           <a:p>
             <a:pPr lvl="2"/>
             <a:r>
-              <a:rPr lang="en-US" smtClean="0"/>
+              <a:rPr lang="en-US"/>
               <a:t>Third level</a:t>
             </a:r>
           </a:p>
           <a:p>
             <a:pPr lvl="3"/>
             <a:r>
-              <a:rPr lang="en-US" smtClean="0"/>
+              <a:rPr lang="en-US"/>
               <a:t>Fourth level</a:t>
             </a:r>
           </a:p>
           <a:p>
             <a:pPr lvl="4"/>
             <a:r>
-              <a:rPr lang="en-US" smtClean="0"/>
+              <a:rPr lang="en-US"/>
               <a:t>Fifth level</a:t>
             </a:r>
-            <a:endParaRPr lang="en-US"/>
           </a:p>
         </p:txBody>
       </p:sp>
@@ -1679,16 +1685,15 @@
           </a:prstGeom>
         </p:spPr>
         <p:txBody>
-          <a:bodyPr vert="horz" lIns="91440" tIns="91440" rIns="91440" bIns="91440" rtlCol="0" anchor="b" wrap="square">
+          <a:bodyPr vert="horz" wrap="square" lIns="91440" tIns="91440" rIns="91440" bIns="91440" rtlCol="0" anchor="b">
             <a:normAutofit/>
           </a:bodyPr>
           <a:lstStyle/>
           <a:p>
             <a:r>
-              <a:rPr lang="en-US" smtClean="0"/>
+              <a:rPr lang="en-US"/>
               <a:t>Click to edit Master title style</a:t>
             </a:r>
-            <a:endParaRPr lang="en-US"/>
           </a:p>
         </p:txBody>
       </p:sp>
@@ -1712,45 +1717,44 @@
           </a:prstGeom>
         </p:spPr>
         <p:txBody>
-          <a:bodyPr vert="horz" lIns="91440" tIns="91440" rIns="91440" bIns="91440" rtlCol="0" anchor="t" wrap="square">
+          <a:bodyPr vert="horz" wrap="square" lIns="91440" tIns="91440" rIns="91440" bIns="91440" rtlCol="0" anchor="t">
             <a:normAutofit/>
           </a:bodyPr>
           <a:lstStyle/>
           <a:p>
             <a:pPr lvl="0"/>
             <a:r>
-              <a:rPr lang="en-US" smtClean="0"/>
+              <a:rPr lang="en-US"/>
               <a:t>Click to edit Master text styles</a:t>
             </a:r>
           </a:p>
           <a:p>
             <a:pPr lvl="1"/>
             <a:r>
-              <a:rPr lang="en-US" smtClean="0"/>
+              <a:rPr lang="en-US"/>
               <a:t>Second level</a:t>
             </a:r>
           </a:p>
           <a:p>
             <a:pPr lvl="2"/>
             <a:r>
-              <a:rPr lang="en-US" smtClean="0"/>
+              <a:rPr lang="en-US"/>
               <a:t>Third level</a:t>
             </a:r>
           </a:p>
           <a:p>
             <a:pPr lvl="3"/>
             <a:r>
-              <a:rPr lang="en-US" smtClean="0"/>
+              <a:rPr lang="en-US"/>
               <a:t>Fourth level</a:t>
             </a:r>
           </a:p>
           <a:p>
             <a:pPr lvl="4"/>
             <a:r>
-              <a:rPr lang="en-US" smtClean="0"/>
+              <a:rPr lang="en-US"/>
               <a:t>Fifth level</a:t>
             </a:r>
-            <a:endParaRPr lang="en-US"/>
           </a:p>
         </p:txBody>
       </p:sp>
@@ -1774,7 +1778,7 @@
           </a:prstGeom>
         </p:spPr>
         <p:txBody>
-          <a:bodyPr vert="horz" lIns="91440" tIns="91440" rIns="91440" bIns="91440" rtlCol="0" anchor="ctr" wrap="square"/>
+          <a:bodyPr vert="horz" wrap="square" lIns="91440" tIns="91440" rIns="91440" bIns="91440" rtlCol="0" anchor="ctr"/>
           <a:lstStyle>
             <a:lvl1pPr marL="0" indent="0" algn="l" defTabSz="457200" rtl="0" eaLnBrk="1" latinLnBrk="0" hangingPunct="1">
               <a:spcBef>
@@ -1816,7 +1820,7 @@
           </a:prstGeom>
         </p:spPr>
         <p:txBody>
-          <a:bodyPr vert="horz" lIns="91440" tIns="91440" rIns="91440" bIns="91440" rtlCol="0" anchor="ctr" wrap="square"/>
+          <a:bodyPr vert="horz" wrap="square" lIns="91440" tIns="91440" rIns="91440" bIns="91440" rtlCol="0" anchor="ctr"/>
           <a:lstStyle>
             <a:lvl1pPr marL="0" indent="0" algn="r" defTabSz="457200" rtl="0" eaLnBrk="1" latinLnBrk="0" hangingPunct="1">
               <a:spcBef>
@@ -1876,9 +1880,9 @@
     <p:sldLayoutId id="2147483650" r:id="rId2"/>
     <p:sldLayoutId id="2147483651" r:id="rId3"/>
     <p:sldLayoutId id="2147483652" r:id="rId4"/>
-    <p:sldLayoutId id="2147483654" r:id="rId6"/>
-    <p:sldLayoutId id="2147483655" r:id="rId7"/>
-    <p:sldLayoutId id="2147483656" r:id="rId8"/>
+    <p:sldLayoutId id="2147483654" r:id="rId5"/>
+    <p:sldLayoutId id="2147483655" r:id="rId6"/>
+    <p:sldLayoutId id="2147483656" r:id="rId7"/>
   </p:sldLayoutIdLst>
   <p:txStyles>
     <p:titleStyle>
@@ -1887,7 +1891,7 @@
           <a:spcPts val="0"/>
         </a:spcBef>
         <a:buNone/>
-        <a:defRPr sz="2800" kern="1200" b="1">
+        <a:defRPr sz="2800" b="1" kern="1200">
           <a:solidFill>
             <a:schemeClr val="tx2"/>
           </a:solidFill>
@@ -1958,96 +1962,6 @@
           <a:cs typeface="+mn-cs"/>
         </a:defRPr>
       </a:lvl9pPr>
-      <a:lvl1pPr marL="256032" indent="-256032" algn="l" defTabSz="457200" rtl="0" eaLnBrk="1" latinLnBrk="0" hangingPunct="1">
-        <a:spcBef>
-          <a:spcPts val="800"/>
-        </a:spcBef>
-        <a:buClr>
-          <a:schemeClr val="accent1"/>
-        </a:buClr>
-        <a:buFont typeface="Arial"/>
-        <a:buChar char="•"/>
-        <a:defRPr sz="1800" kern="1200">
-          <a:solidFill>
-            <a:schemeClr val="tx1"/>
-          </a:solidFill>
-          <a:latin typeface="+mn-lt"/>
-          <a:ea typeface="+mn-ea"/>
-          <a:cs typeface="+mn-cs"/>
-        </a:defRPr>
-      </a:lvl1pPr>
-      <a:lvl2pPr marL="530352" indent="-274320" algn="l" defTabSz="457200" rtl="0" eaLnBrk="1" latinLnBrk="0" hangingPunct="1">
-        <a:spcBef>
-          <a:spcPts val="400"/>
-        </a:spcBef>
-        <a:buClr>
-          <a:schemeClr val="accent1"/>
-        </a:buClr>
-        <a:buFont typeface="Arial"/>
-        <a:buChar char="–"/>
-        <a:defRPr sz="1600" kern="1200">
-          <a:solidFill>
-            <a:schemeClr val="tx1"/>
-          </a:solidFill>
-          <a:latin typeface="+mn-lt"/>
-          <a:ea typeface="+mn-ea"/>
-          <a:cs typeface="+mn-cs"/>
-        </a:defRPr>
-      </a:lvl2pPr>
-      <a:lvl3pPr marL="786384" indent="-256032" algn="l" defTabSz="457200" rtl="0" eaLnBrk="1" latinLnBrk="0" hangingPunct="1">
-        <a:spcBef>
-          <a:spcPts val="300"/>
-        </a:spcBef>
-        <a:buClr>
-          <a:schemeClr val="accent1"/>
-        </a:buClr>
-        <a:buFont typeface="Arial"/>
-        <a:buChar char="·"/>
-        <a:defRPr sz="1400" kern="1200">
-          <a:solidFill>
-            <a:schemeClr val="tx1"/>
-          </a:solidFill>
-          <a:latin typeface="+mn-lt"/>
-          <a:ea typeface="+mn-ea"/>
-          <a:cs typeface="+mn-cs"/>
-        </a:defRPr>
-      </a:lvl3pPr>
-      <a:lvl4pPr marL="1042415" indent="-256031" algn="l" defTabSz="457200" rtl="0" eaLnBrk="1" latinLnBrk="0" hangingPunct="1">
-        <a:spcBef>
-          <a:spcPts val="200"/>
-        </a:spcBef>
-        <a:buClr>
-          <a:schemeClr val="accent1"/>
-        </a:buClr>
-        <a:buFont typeface="Arial"/>
-        <a:buChar char="·"/>
-        <a:defRPr sz="1300" kern="1200">
-          <a:solidFill>
-            <a:schemeClr val="tx1"/>
-          </a:solidFill>
-          <a:latin typeface="+mn-lt"/>
-          <a:ea typeface="+mn-ea"/>
-          <a:cs typeface="+mn-cs"/>
-        </a:defRPr>
-      </a:lvl4pPr>
-      <a:lvl5pPr marL="1298448" indent="-256033" algn="l" defTabSz="457200" rtl="0" eaLnBrk="1" latinLnBrk="0" hangingPunct="1">
-        <a:spcBef>
-          <a:spcPts val="200"/>
-        </a:spcBef>
-        <a:buClr>
-          <a:schemeClr val="accent1"/>
-        </a:buClr>
-        <a:buFont typeface="Arial"/>
-        <a:buChar char="·"/>
-        <a:defRPr sz="1200" kern="1200">
-          <a:solidFill>
-            <a:schemeClr val="tx1"/>
-          </a:solidFill>
-          <a:latin typeface="+mn-lt"/>
-          <a:ea typeface="+mn-ea"/>
-          <a:cs typeface="+mn-cs"/>
-        </a:defRPr>
-      </a:lvl5pPr>
     </p:bodyStyle>
     <p:otherStyle>
       <a:defPPr>
@@ -2149,7 +2063,7 @@
 </file>
 
 <file path=ppt/slides/slide1.xml><?xml version="1.0" encoding="utf-8"?>
-<p:sld xmlns:a="http://schemas.openxmlformats.org/drawingml/2006/main" xmlns:p="http://schemas.openxmlformats.org/presentationml/2006/main" xmlns:r="http://schemas.openxmlformats.org/officeDocument/2006/relationships">
+<p:sld xmlns:a="http://schemas.openxmlformats.org/drawingml/2006/main" xmlns:r="http://schemas.openxmlformats.org/officeDocument/2006/relationships" xmlns:p="http://schemas.openxmlformats.org/presentationml/2006/main">
   <p:cSld name="md:cover|1201fdaa84">
     <p:spTree>
       <p:nvGrpSpPr>
@@ -2157,7 +2071,14 @@
         <p:cNvGrpSpPr/>
         <p:nvPr/>
       </p:nvGrpSpPr>
-      <p:grpSpPr/>
+      <p:grpSpPr>
+        <a:xfrm>
+          <a:off x="0" y="0"/>
+          <a:ext cx="0" cy="0"/>
+          <a:chOff x="0" y="0"/>
+          <a:chExt cx="0" cy="0"/>
+        </a:xfrm>
+      </p:grpSpPr>
       <p:sp>
         <p:nvSpPr>
           <p:cNvPr id="2" name="Title 1"/>
@@ -2219,15 +2140,22 @@
 </file>
 
 <file path=ppt/slides/slide10.xml><?xml version="1.0" encoding="utf-8"?>
-<p:sld xmlns:a="http://schemas.openxmlformats.org/drawingml/2006/main" xmlns:p="http://schemas.openxmlformats.org/presentationml/2006/main" xmlns:r="http://schemas.openxmlformats.org/officeDocument/2006/relationships">
-  <p:cSld name="md:9#1|580dad1d0c">
+<p:sld xmlns:a="http://schemas.openxmlformats.org/drawingml/2006/main" xmlns:r="http://schemas.openxmlformats.org/officeDocument/2006/relationships" xmlns:p="http://schemas.openxmlformats.org/presentationml/2006/main">
+  <p:cSld name="md:9-2#1|917e075a50">
     <p:spTree>
       <p:nvGrpSpPr>
         <p:cNvPr id="1" name=""/>
         <p:cNvGrpSpPr/>
         <p:nvPr/>
       </p:nvGrpSpPr>
-      <p:grpSpPr/>
+      <p:grpSpPr>
+        <a:xfrm>
+          <a:off x="0" y="0"/>
+          <a:ext cx="0" cy="0"/>
+          <a:chOff x="0" y="0"/>
+          <a:chExt cx="0" cy="0"/>
+        </a:xfrm>
+      </p:grpSpPr>
       <p:sp>
         <p:nvSpPr>
           <p:cNvPr id="2" name="Title 1"/>
@@ -2244,14 +2172,54 @@
           <a:lstStyle/>
           <a:p>
             <a:r>
-              <a:t>9. 실습 환경 — 설치</a:t>
-            </a:r>
-          </a:p>
-        </p:txBody>
-      </p:sp>
-      <p:sp>
-        <p:nvSpPr>
-          <p:cNvPr id="100" name="Footer Placeholder 3"/>
+              <a:t>9. 실습 환경 — 엔진과 코랩</a:t>
+            </a:r>
+          </a:p>
+        </p:txBody>
+      </p:sp>
+      <p:sp>
+        <p:nvSpPr>
+          <p:cNvPr id="3" name="Content Placeholder 2"/>
+          <p:cNvSpPr>
+            <a:spLocks noGrp="1"/>
+          </p:cNvSpPr>
+          <p:nvPr>
+            <p:ph idx="1"/>
+          </p:nvPr>
+        </p:nvSpPr>
+        <p:spPr/>
+        <p:txBody>
+          <a:bodyPr/>
+          <a:lstStyle/>
+          <a:p>
+            <a:r>
+              <a:t>시뮬레이션 엔진은 강의용 공용 서버를 씁니다. 서버에 붙지 못해도 교재에 녹화된 실행 결과로 모든 코드가 돌아가므로, 집에서 복습할 때 설치할 것이 따로 없습니다.</a:t>
+            </a:r>
+          </a:p>
+          <a:p>
+            <a:r>
+              <a:t>엔진 내부를 직접 열어 보는 실습은 각자 노트북에서 Docker로 돌립니다. 사전 빌드 이미지를 배포합니다.</a:t>
+            </a:r>
+          </a:p>
+          <a:p>
+            <a:r>
+              <a:t>구글 코랩도 됩니다. 각 장의 Colab 배지를 누르고 첫 셀에서 </a:t>
+            </a:r>
+            <a:r>
+              <a:rPr>
+                <a:latin typeface="Consolas"/>
+              </a:rPr>
+              <a:t>smartmob.colab.bootstrap()</a:t>
+            </a:r>
+            <a:r>
+              <a:t>을 실행합니다.</a:t>
+            </a:r>
+          </a:p>
+        </p:txBody>
+      </p:sp>
+      <p:sp>
+        <p:nvSpPr>
+          <p:cNvPr id="100" name="Footer Placeholder 4"/>
           <p:cNvSpPr>
             <a:spLocks noGrp="1"/>
           </p:cNvSpPr>
@@ -2277,7 +2245,7 @@
       </p:sp>
       <p:sp>
         <p:nvSpPr>
-          <p:cNvPr id="101" name="Slide Number Placeholder 4"/>
+          <p:cNvPr id="101" name="Slide Number Placeholder 5"/>
           <p:cNvSpPr>
             <a:spLocks noGrp="1"/>
           </p:cNvSpPr>
@@ -2297,196 +2265,9 @@
           <a:p>
             <a:fld id="{C1FF6DA9-008F-8B48-92A6-B652298478BF}" type="slidenum">
               <a:rPr lang="en-US" smtClean="0"/>
-              <a:t>‹#›</a:t>
+              <a:t>10</a:t>
             </a:fld>
             <a:endParaRPr lang="en-US"/>
-          </a:p>
-        </p:txBody>
-      </p:sp>
-      <p:sp>
-        <p:nvSpPr>
-          <p:cNvPr id="102" name="Text"/>
-          <p:cNvSpPr txBox="1"/>
-          <p:nvPr/>
-        </p:nvSpPr>
-        <p:spPr>
-          <a:xfrm>
-            <a:off x="548640" y="1600200"/>
-            <a:ext cx="11094415" cy="661670"/>
-          </a:xfrm>
-          <a:prstGeom prst="rect">
-            <a:avLst/>
-          </a:prstGeom>
-          <a:noFill/>
-        </p:spPr>
-        <p:txBody>
-          <a:bodyPr wrap="square" anchor="t">
-            <a:spAutoFit/>
-          </a:bodyPr>
-          <a:lstStyle/>
-          <a:p>
-            <a:pPr marL="256032" indent="-256032">
-              <a:spcBef>
-                <a:spcPts val="800"/>
-              </a:spcBef>
-              <a:buClr>
-                <a:schemeClr val="accent1"/>
-              </a:buClr>
-              <a:buFont typeface="Arial"/>
-              <a:buChar char="•"/>
-            </a:pPr>
-            <a:r>
-              <a:rPr sz="1800"/>
-              <a:t>Python 3.11을 씁니다. 교재 저장소를 받고 의존성을 설치하면 끝납니다.</a:t>
-            </a:r>
-          </a:p>
-        </p:txBody>
-      </p:sp>
-      <p:sp>
-        <p:nvSpPr>
-          <p:cNvPr id="103" name="Code"/>
-          <p:cNvSpPr/>
-          <p:nvPr/>
-        </p:nvSpPr>
-        <p:spPr>
-          <a:xfrm>
-            <a:off x="548640" y="2353310"/>
-            <a:ext cx="11094415" cy="937259"/>
-          </a:xfrm>
-          <a:prstGeom prst="rect">
-            <a:avLst/>
-          </a:prstGeom>
-          <a:solidFill>
-            <a:srgbClr val="F3F4F6"/>
-          </a:solidFill>
-          <a:ln>
-            <a:noFill/>
-          </a:ln>
-          <a:effectLst/>
-        </p:spPr>
-        <p:style>
-          <a:lnRef idx="1">
-            <a:schemeClr val="accent1"/>
-          </a:lnRef>
-          <a:fillRef idx="3">
-            <a:schemeClr val="accent1"/>
-          </a:fillRef>
-          <a:effectRef idx="2">
-            <a:schemeClr val="accent1"/>
-          </a:effectRef>
-          <a:fontRef idx="minor">
-            <a:schemeClr val="lt1"/>
-          </a:fontRef>
-        </p:style>
-        <p:txBody>
-          <a:bodyPr rtlCol="0" anchor="t" wrap="square" lIns="182880" rIns="182880" tIns="137160" bIns="137160"/>
-          <a:lstStyle/>
-          <a:p>
-            <a:pPr algn="l"/>
-            <a:r>
-              <a:rPr sz="1200">
-                <a:solidFill>
-                  <a:srgbClr val="1F2937"/>
-                </a:solidFill>
-                <a:latin typeface="Consolas"/>
-              </a:rPr>
-              <a:t>git clone https://github.com/jihoyeo/mobility-simulation-book.git</a:t>
-            </a:r>
-          </a:p>
-          <a:p>
-            <a:pPr algn="l"/>
-            <a:r>
-              <a:rPr sz="1200">
-                <a:solidFill>
-                  <a:srgbClr val="1F2937"/>
-                </a:solidFill>
-                <a:latin typeface="Consolas"/>
-              </a:rPr>
-              <a:t>cd mobility-simulation-book</a:t>
-            </a:r>
-          </a:p>
-          <a:p>
-            <a:pPr algn="l"/>
-            <a:r>
-              <a:rPr sz="1200">
-                <a:solidFill>
-                  <a:srgbClr val="1F2937"/>
-                </a:solidFill>
-                <a:latin typeface="Consolas"/>
-              </a:rPr>
-              <a:t>pip install -r requirements.txt</a:t>
-            </a:r>
-          </a:p>
-        </p:txBody>
-      </p:sp>
-      <p:sp>
-        <p:nvSpPr>
-          <p:cNvPr id="104" name="Text"/>
-          <p:cNvSpPr txBox="1"/>
-          <p:nvPr/>
-        </p:nvSpPr>
-        <p:spPr>
-          <a:xfrm>
-            <a:off x="548640" y="3473450"/>
-            <a:ext cx="11094415" cy="2653030"/>
-          </a:xfrm>
-          <a:prstGeom prst="rect">
-            <a:avLst/>
-          </a:prstGeom>
-          <a:noFill/>
-        </p:spPr>
-        <p:txBody>
-          <a:bodyPr wrap="square" anchor="t">
-            <a:spAutoFit/>
-          </a:bodyPr>
-          <a:lstStyle/>
-          <a:p>
-            <a:pPr marL="256032" indent="-256032">
-              <a:spcBef>
-                <a:spcPts val="800"/>
-              </a:spcBef>
-              <a:buClr>
-                <a:schemeClr val="accent1"/>
-              </a:buClr>
-              <a:buFont typeface="Arial"/>
-              <a:buChar char="•"/>
-            </a:pPr>
-            <a:r>
-              <a:rPr sz="1800">
-                <a:latin typeface="Consolas"/>
-              </a:rPr>
-              <a:t>requirements.txt</a:t>
-            </a:r>
-            <a:r>
-              <a:rPr sz="1800"/>
-              <a:t>는 버전을 전부 고정해 두었습니다. 같은 버전이면 같은 그림이 나옵니다.</a:t>
-            </a:r>
-          </a:p>
-          <a:p>
-            <a:pPr marL="256032" indent="-256032">
-              <a:spcBef>
-                <a:spcPts val="800"/>
-              </a:spcBef>
-              <a:buClr>
-                <a:schemeClr val="accent1"/>
-              </a:buClr>
-              <a:buFont typeface="Arial"/>
-              <a:buChar char="•"/>
-            </a:pPr>
-            <a:r>
-              <a:rPr sz="1800"/>
-              <a:t>설치가 끝났는지는 </a:t>
-            </a:r>
-            <a:r>
-              <a:rPr sz="1800">
-                <a:latin typeface="Consolas"/>
-              </a:rPr>
-              <a:t>from smartmob import Dtumos</a:t>
-            </a:r>
-            <a:r>
-              <a:rPr sz="1800"/>
-              <a:t> 한 줄로 확인합니다.</a:t>
-            </a:r>
           </a:p>
         </p:txBody>
       </p:sp>
@@ -2499,15 +2280,22 @@
 </file>
 
 <file path=ppt/slides/slide11.xml><?xml version="1.0" encoding="utf-8"?>
-<p:sld xmlns:a="http://schemas.openxmlformats.org/drawingml/2006/main" xmlns:p="http://schemas.openxmlformats.org/presentationml/2006/main" xmlns:r="http://schemas.openxmlformats.org/officeDocument/2006/relationships">
-  <p:cSld name="md:9-2#1|917e075a50">
+<p:sld xmlns:a="http://schemas.openxmlformats.org/drawingml/2006/main" xmlns:r="http://schemas.openxmlformats.org/officeDocument/2006/relationships" xmlns:p="http://schemas.openxmlformats.org/presentationml/2006/main">
+  <p:cSld name="md:10#1|51aa5c7a5e">
     <p:spTree>
       <p:nvGrpSpPr>
         <p:cNvPr id="1" name=""/>
         <p:cNvGrpSpPr/>
         <p:nvPr/>
       </p:nvGrpSpPr>
-      <p:grpSpPr/>
+      <p:grpSpPr>
+        <a:xfrm>
+          <a:off x="0" y="0"/>
+          <a:ext cx="0" cy="0"/>
+          <a:chOff x="0" y="0"/>
+          <a:chExt cx="0" cy="0"/>
+        </a:xfrm>
+      </p:grpSpPr>
       <p:sp>
         <p:nvSpPr>
           <p:cNvPr id="2" name="Title 1"/>
@@ -2524,7 +2312,7 @@
           <a:lstStyle/>
           <a:p>
             <a:r>
-              <a:t>9. 실습 환경 — 엔진과 코랩</a:t>
+              <a:t>10. 교재와 참고 자료</a:t>
             </a:r>
           </a:p>
         </p:txBody>
@@ -2544,30 +2332,37 @@
           <a:bodyPr/>
           <a:lstStyle/>
           <a:p>
-            <a:pPr/>
-            <a:r>
-              <a:t>시뮬레이션 엔진은 강의용 공용 서버를 씁니다. 서버에 붙지 못해도 교재에 녹화된 실행 결과로 모든 코드가 돌아가므로, 집에서 복습할 때 설치할 것이 따로 없습니다.</a:t>
-            </a:r>
-          </a:p>
-          <a:p>
-            <a:pPr/>
-            <a:r>
-              <a:t>엔진 내부를 직접 열어 보는 실습은 각자 노트북에서 Docker로 돌립니다. 사전 빌드 이미지를 배포합니다.</a:t>
-            </a:r>
-          </a:p>
-          <a:p>
-            <a:pPr/>
-            <a:r>
-              <a:t>구글 코랩도 됩니다. 각 장의 Colab 배지를 누르고 첫 셀에서 </a:t>
-            </a:r>
-            <a:r>
-              <a:rPr>
-                <a:latin typeface="Consolas"/>
-              </a:rPr>
-              <a:t>smartmob.colab.bootstrap()</a:t>
-            </a:r>
-            <a:r>
-              <a:t>을 실행합니다.</a:t>
+            <a:r>
+              <a:t>주교재: </a:t>
+            </a:r>
+            <a:r>
+              <a:rPr i="1"/>
+              <a:t>Urban Mobility Simulation — Digital Twin for Urban Mobility Systems</a:t>
+            </a:r>
+            <a:r>
+              <a:t> (jihoyeo.github.io/mobility-simulation-book). 학기 중 계속 고쳐지므로 웹으로 읽는 것이 항상 최신본입니다. 코드는 같은 이름의 GitHub 저장소에 있습니다.</a:t>
+            </a:r>
+          </a:p>
+          <a:p>
+            <a:r>
+              <a:t>부교재: 『핸즈온 머신러닝 3판』(10주차 ETA 예측 모델의 배경), Google OR-Tools 문서(10주차 배차·물류 최적화 실습).</a:t>
+            </a:r>
+          </a:p>
+          <a:p>
+            <a:r>
+              <a:t>참고 문헌은 해당 주차에 다시 안내합니다.</a:t>
+            </a:r>
+          </a:p>
+          <a:p>
+            <a:pPr lvl="1"/>
+            <a:r>
+              <a:t>Boeing (2017) OSMnx — 2주차 · Delling, Pajor &amp; Werneck (2015) RAPTOR 원논문 — 5~6주차</a:t>
+            </a:r>
+          </a:p>
+          <a:p>
+            <a:pPr lvl="1"/>
+            <a:r>
+              <a:t>Kuhn (1955) 헝가리안 방법 — 10주차 · Alonso-Mora et al. (2017) 라이드셰어링 배차 — 10~11주차 · Lopez et al. (2018) SUMO — 1주차 비교 대상</a:t>
             </a:r>
           </a:p>
         </p:txBody>
@@ -2620,7 +2415,7 @@
           <a:p>
             <a:fld id="{C1FF6DA9-008F-8B48-92A6-B652298478BF}" type="slidenum">
               <a:rPr lang="en-US" smtClean="0"/>
-              <a:t>‹#›</a:t>
+              <a:t>11</a:t>
             </a:fld>
             <a:endParaRPr lang="en-US"/>
           </a:p>
@@ -2635,153 +2430,7 @@
 </file>
 
 <file path=ppt/slides/slide12.xml><?xml version="1.0" encoding="utf-8"?>
-<p:sld xmlns:a="http://schemas.openxmlformats.org/drawingml/2006/main" xmlns:p="http://schemas.openxmlformats.org/presentationml/2006/main" xmlns:r="http://schemas.openxmlformats.org/officeDocument/2006/relationships">
-  <p:cSld name="md:10#1|51aa5c7a5e">
-    <p:spTree>
-      <p:nvGrpSpPr>
-        <p:cNvPr id="1" name=""/>
-        <p:cNvGrpSpPr/>
-        <p:nvPr/>
-      </p:nvGrpSpPr>
-      <p:grpSpPr/>
-      <p:sp>
-        <p:nvSpPr>
-          <p:cNvPr id="2" name="Title 1"/>
-          <p:cNvSpPr>
-            <a:spLocks noGrp="1"/>
-          </p:cNvSpPr>
-          <p:nvPr>
-            <p:ph type="title"/>
-          </p:nvPr>
-        </p:nvSpPr>
-        <p:spPr/>
-        <p:txBody>
-          <a:bodyPr/>
-          <a:lstStyle/>
-          <a:p>
-            <a:r>
-              <a:t>10. 교재와 참고 자료</a:t>
-            </a:r>
-          </a:p>
-        </p:txBody>
-      </p:sp>
-      <p:sp>
-        <p:nvSpPr>
-          <p:cNvPr id="3" name="Content Placeholder 2"/>
-          <p:cNvSpPr>
-            <a:spLocks noGrp="1"/>
-          </p:cNvSpPr>
-          <p:nvPr>
-            <p:ph idx="1"/>
-          </p:nvPr>
-        </p:nvSpPr>
-        <p:spPr/>
-        <p:txBody>
-          <a:bodyPr/>
-          <a:lstStyle/>
-          <a:p>
-            <a:pPr/>
-            <a:r>
-              <a:t>주교재: </a:t>
-            </a:r>
-            <a:r>
-              <a:rPr i="1"/>
-              <a:t>Urban Mobility Simulation — Digital Twin for Urban Mobility Systems</a:t>
-            </a:r>
-            <a:r>
-              <a:t> (jihoyeo.github.io/mobility-simulation-book). 학기 중 계속 고쳐지므로 웹으로 읽는 것이 항상 최신본입니다. 코드는 같은 이름의 GitHub 저장소에 있습니다.</a:t>
-            </a:r>
-          </a:p>
-          <a:p>
-            <a:pPr/>
-            <a:r>
-              <a:t>부교재: 『핸즈온 머신러닝 3판』(10주차 ETA 예측 모델의 배경), Google OR-Tools 문서(10주차 배차·물류 최적화 실습).</a:t>
-            </a:r>
-          </a:p>
-          <a:p>
-            <a:pPr/>
-            <a:r>
-              <a:t>참고 문헌은 해당 주차에 다시 안내합니다.</a:t>
-            </a:r>
-          </a:p>
-          <a:p>
-            <a:pPr lvl="1"/>
-            <a:r>
-              <a:t>Boeing (2017) OSMnx — 2주차 · Delling, Pajor &amp; Werneck (2015) RAPTOR 원논문 — 5~6주차</a:t>
-            </a:r>
-          </a:p>
-          <a:p>
-            <a:pPr lvl="1"/>
-            <a:r>
-              <a:t>Kuhn (1955) 헝가리안 방법 — 10주차 · Alonso-Mora et al. (2017) 라이드셰어링 배차 — 10~11주차 · Lopez et al. (2018) SUMO — 1주차 비교 대상</a:t>
-            </a:r>
-          </a:p>
-        </p:txBody>
-      </p:sp>
-      <p:sp>
-        <p:nvSpPr>
-          <p:cNvPr id="100" name="Footer Placeholder 4"/>
-          <p:cNvSpPr>
-            <a:spLocks noGrp="1"/>
-          </p:cNvSpPr>
-          <p:nvPr>
-            <p:ph type="ftr" sz="quarter" idx="11"/>
-          </p:nvPr>
-        </p:nvSpPr>
-        <p:spPr>
-          <a:xfrm>
-            <a:off x="548640" y="6355080"/>
-            <a:ext cx="8229600" cy="320040"/>
-          </a:xfrm>
-        </p:spPr>
-        <p:txBody>
-          <a:bodyPr/>
-          <a:lstStyle/>
-          <a:p>
-            <a:r>
-              <a:t>스마트 교통물류 2026-2 · 오리엔테이션</a:t>
-            </a:r>
-          </a:p>
-        </p:txBody>
-      </p:sp>
-      <p:sp>
-        <p:nvSpPr>
-          <p:cNvPr id="101" name="Slide Number Placeholder 5"/>
-          <p:cNvSpPr>
-            <a:spLocks noGrp="1"/>
-          </p:cNvSpPr>
-          <p:nvPr>
-            <p:ph type="sldNum" sz="quarter" idx="12"/>
-          </p:nvPr>
-        </p:nvSpPr>
-        <p:spPr>
-          <a:xfrm>
-            <a:off x="10545775" y="6355080"/>
-            <a:ext cx="1097280" cy="320040"/>
-          </a:xfrm>
-        </p:spPr>
-        <p:txBody>
-          <a:bodyPr/>
-          <a:lstStyle/>
-          <a:p>
-            <a:fld id="{C1FF6DA9-008F-8B48-92A6-B652298478BF}" type="slidenum">
-              <a:rPr lang="en-US" smtClean="0"/>
-              <a:t>‹#›</a:t>
-            </a:fld>
-            <a:endParaRPr lang="en-US"/>
-          </a:p>
-        </p:txBody>
-      </p:sp>
-    </p:spTree>
-  </p:cSld>
-  <p:clrMapOvr>
-    <a:masterClrMapping/>
-  </p:clrMapOvr>
-</p:sld>
-</file>
-
-<file path=ppt/slides/slide13.xml><?xml version="1.0" encoding="utf-8"?>
-<p:sld xmlns:a="http://schemas.openxmlformats.org/drawingml/2006/main" xmlns:p="http://schemas.openxmlformats.org/presentationml/2006/main" xmlns:r="http://schemas.openxmlformats.org/officeDocument/2006/relationships">
+<p:sld xmlns:a="http://schemas.openxmlformats.org/drawingml/2006/main" xmlns:r="http://schemas.openxmlformats.org/officeDocument/2006/relationships" xmlns:p="http://schemas.openxmlformats.org/presentationml/2006/main">
   <p:cSld name="md:11#1|db99784ad8">
     <p:spTree>
       <p:nvGrpSpPr>
@@ -2789,7 +2438,14 @@
         <p:cNvGrpSpPr/>
         <p:nvPr/>
       </p:nvGrpSpPr>
-      <p:grpSpPr/>
+      <p:grpSpPr>
+        <a:xfrm>
+          <a:off x="0" y="0"/>
+          <a:ext cx="0" cy="0"/>
+          <a:chOff x="0" y="0"/>
+          <a:chExt cx="0" cy="0"/>
+        </a:xfrm>
+      </p:grpSpPr>
       <p:sp>
         <p:nvSpPr>
           <p:cNvPr id="2" name="Title 1"/>
@@ -2859,7 +2515,7 @@
           <a:p>
             <a:fld id="{C1FF6DA9-008F-8B48-92A6-B652298478BF}" type="slidenum">
               <a:rPr lang="en-US" smtClean="0"/>
-              <a:t>‹#›</a:t>
+              <a:t>12</a:t>
             </a:fld>
             <a:endParaRPr lang="en-US"/>
           </a:p>
@@ -2884,13 +2540,25 @@
                 <a:tableStyleId>{5940675A-B579-460E-94D1-54222C63F5DA}</a:tableStyleId>
               </a:tblPr>
               <a:tblGrid>
-                <a:gridCol w="1617664"/>
-                <a:gridCol w="9476750"/>
+                <a:gridCol w="1617664">
+                  <a:extLst>
+                    <a:ext uri="{9D8B030D-6E8A-4147-A177-3AD203B41FA5}">
+                      <a16:colId xmlns:a16="http://schemas.microsoft.com/office/drawing/2014/main" val="20000"/>
+                    </a:ext>
+                  </a:extLst>
+                </a:gridCol>
+                <a:gridCol w="9476750">
+                  <a:extLst>
+                    <a:ext uri="{9D8B030D-6E8A-4147-A177-3AD203B41FA5}">
+                      <a16:colId xmlns:a16="http://schemas.microsoft.com/office/drawing/2014/main" val="20001"/>
+                    </a:ext>
+                  </a:extLst>
+                </a:gridCol>
               </a:tblGrid>
               <a:tr h="300228">
                 <a:tc>
                   <a:txBody>
-                    <a:bodyPr wrap="square"/>
+                    <a:bodyPr/>
                     <a:lstStyle/>
                     <a:p>
                       <a:pPr algn="ctr"/>
@@ -2908,7 +2576,7 @@
                 </a:tc>
                 <a:tc>
                   <a:txBody>
-                    <a:bodyPr wrap="square"/>
+                    <a:bodyPr/>
                     <a:lstStyle/>
                     <a:p>
                       <a:pPr algn="ctr"/>
@@ -2924,11 +2592,16 @@
                     </a:solidFill>
                   </a:tcPr>
                 </a:tc>
+                <a:extLst>
+                  <a:ext uri="{0D108BD9-81ED-4DB2-BD59-A6C34878D82A}">
+                    <a16:rowId xmlns:a16="http://schemas.microsoft.com/office/drawing/2014/main" val="10000"/>
+                  </a:ext>
+                </a:extLst>
               </a:tr>
               <a:tr h="300228">
                 <a:tc>
                   <a:txBody>
-                    <a:bodyPr wrap="square"/>
+                    <a:bodyPr/>
                     <a:lstStyle/>
                     <a:p>
                       <a:r>
@@ -2941,7 +2614,7 @@
                 </a:tc>
                 <a:tc>
                   <a:txBody>
-                    <a:bodyPr wrap="square"/>
+                    <a:bodyPr/>
                     <a:lstStyle/>
                     <a:p>
                       <a:r>
@@ -2952,11 +2625,16 @@
                   </a:txBody>
                   <a:tcPr marL="54864" marR="54864" marT="27432" marB="27432"/>
                 </a:tc>
+                <a:extLst>
+                  <a:ext uri="{0D108BD9-81ED-4DB2-BD59-A6C34878D82A}">
+                    <a16:rowId xmlns:a16="http://schemas.microsoft.com/office/drawing/2014/main" val="10001"/>
+                  </a:ext>
+                </a:extLst>
               </a:tr>
               <a:tr h="300228">
                 <a:tc>
                   <a:txBody>
-                    <a:bodyPr wrap="square"/>
+                    <a:bodyPr/>
                     <a:lstStyle/>
                     <a:p>
                       <a:r>
@@ -2969,7 +2647,7 @@
                 </a:tc>
                 <a:tc>
                   <a:txBody>
-                    <a:bodyPr wrap="square"/>
+                    <a:bodyPr/>
                     <a:lstStyle/>
                     <a:p>
                       <a:r>
@@ -2980,11 +2658,16 @@
                   </a:txBody>
                   <a:tcPr marL="54864" marR="54864" marT="27432" marB="27432"/>
                 </a:tc>
+                <a:extLst>
+                  <a:ext uri="{0D108BD9-81ED-4DB2-BD59-A6C34878D82A}">
+                    <a16:rowId xmlns:a16="http://schemas.microsoft.com/office/drawing/2014/main" val="10002"/>
+                  </a:ext>
+                </a:extLst>
               </a:tr>
               <a:tr h="300228">
                 <a:tc>
                   <a:txBody>
-                    <a:bodyPr wrap="square"/>
+                    <a:bodyPr/>
                     <a:lstStyle/>
                     <a:p>
                       <a:r>
@@ -2997,7 +2680,7 @@
                 </a:tc>
                 <a:tc>
                   <a:txBody>
-                    <a:bodyPr wrap="square"/>
+                    <a:bodyPr/>
                     <a:lstStyle/>
                     <a:p>
                       <a:r>
@@ -3008,11 +2691,16 @@
                   </a:txBody>
                   <a:tcPr marL="54864" marR="54864" marT="27432" marB="27432"/>
                 </a:tc>
+                <a:extLst>
+                  <a:ext uri="{0D108BD9-81ED-4DB2-BD59-A6C34878D82A}">
+                    <a16:rowId xmlns:a16="http://schemas.microsoft.com/office/drawing/2014/main" val="10003"/>
+                  </a:ext>
+                </a:extLst>
               </a:tr>
               <a:tr h="300228">
                 <a:tc>
                   <a:txBody>
-                    <a:bodyPr wrap="square"/>
+                    <a:bodyPr/>
                     <a:lstStyle/>
                     <a:p>
                       <a:r>
@@ -3025,7 +2713,7 @@
                 </a:tc>
                 <a:tc>
                   <a:txBody>
-                    <a:bodyPr wrap="square"/>
+                    <a:bodyPr/>
                     <a:lstStyle/>
                     <a:p>
                       <a:r>
@@ -3036,11 +2724,16 @@
                   </a:txBody>
                   <a:tcPr marL="54864" marR="54864" marT="27432" marB="27432"/>
                 </a:tc>
+                <a:extLst>
+                  <a:ext uri="{0D108BD9-81ED-4DB2-BD59-A6C34878D82A}">
+                    <a16:rowId xmlns:a16="http://schemas.microsoft.com/office/drawing/2014/main" val="10004"/>
+                  </a:ext>
+                </a:extLst>
               </a:tr>
               <a:tr h="300228">
                 <a:tc>
                   <a:txBody>
-                    <a:bodyPr wrap="square"/>
+                    <a:bodyPr/>
                     <a:lstStyle/>
                     <a:p>
                       <a:r>
@@ -3053,7 +2746,7 @@
                 </a:tc>
                 <a:tc>
                   <a:txBody>
-                    <a:bodyPr wrap="square"/>
+                    <a:bodyPr/>
                     <a:lstStyle/>
                     <a:p>
                       <a:r>
@@ -3064,11 +2757,16 @@
                   </a:txBody>
                   <a:tcPr marL="54864" marR="54864" marT="27432" marB="27432"/>
                 </a:tc>
+                <a:extLst>
+                  <a:ext uri="{0D108BD9-81ED-4DB2-BD59-A6C34878D82A}">
+                    <a16:rowId xmlns:a16="http://schemas.microsoft.com/office/drawing/2014/main" val="10005"/>
+                  </a:ext>
+                </a:extLst>
               </a:tr>
               <a:tr h="300228">
                 <a:tc>
                   <a:txBody>
-                    <a:bodyPr wrap="square"/>
+                    <a:bodyPr/>
                     <a:lstStyle/>
                     <a:p>
                       <a:r>
@@ -3081,7 +2779,7 @@
                 </a:tc>
                 <a:tc>
                   <a:txBody>
-                    <a:bodyPr wrap="square"/>
+                    <a:bodyPr/>
                     <a:lstStyle/>
                     <a:p>
                       <a:r>
@@ -3092,11 +2790,16 @@
                   </a:txBody>
                   <a:tcPr marL="54864" marR="54864" marT="27432" marB="27432"/>
                 </a:tc>
+                <a:extLst>
+                  <a:ext uri="{0D108BD9-81ED-4DB2-BD59-A6C34878D82A}">
+                    <a16:rowId xmlns:a16="http://schemas.microsoft.com/office/drawing/2014/main" val="10006"/>
+                  </a:ext>
+                </a:extLst>
               </a:tr>
               <a:tr h="300228">
                 <a:tc>
                   <a:txBody>
-                    <a:bodyPr wrap="square"/>
+                    <a:bodyPr/>
                     <a:lstStyle/>
                     <a:p>
                       <a:r>
@@ -3109,7 +2812,7 @@
                 </a:tc>
                 <a:tc>
                   <a:txBody>
-                    <a:bodyPr wrap="square"/>
+                    <a:bodyPr/>
                     <a:lstStyle/>
                     <a:p>
                       <a:r>
@@ -3120,11 +2823,16 @@
                   </a:txBody>
                   <a:tcPr marL="54864" marR="54864" marT="27432" marB="27432"/>
                 </a:tc>
+                <a:extLst>
+                  <a:ext uri="{0D108BD9-81ED-4DB2-BD59-A6C34878D82A}">
+                    <a16:rowId xmlns:a16="http://schemas.microsoft.com/office/drawing/2014/main" val="10007"/>
+                  </a:ext>
+                </a:extLst>
               </a:tr>
               <a:tr h="300228">
                 <a:tc>
                   <a:txBody>
-                    <a:bodyPr wrap="square"/>
+                    <a:bodyPr/>
                     <a:lstStyle/>
                     <a:p>
                       <a:r>
@@ -3137,7 +2845,7 @@
                 </a:tc>
                 <a:tc>
                   <a:txBody>
-                    <a:bodyPr wrap="square"/>
+                    <a:bodyPr/>
                     <a:lstStyle/>
                     <a:p>
                       <a:r>
@@ -3148,11 +2856,16 @@
                   </a:txBody>
                   <a:tcPr marL="54864" marR="54864" marT="27432" marB="27432"/>
                 </a:tc>
+                <a:extLst>
+                  <a:ext uri="{0D108BD9-81ED-4DB2-BD59-A6C34878D82A}">
+                    <a16:rowId xmlns:a16="http://schemas.microsoft.com/office/drawing/2014/main" val="10008"/>
+                  </a:ext>
+                </a:extLst>
               </a:tr>
               <a:tr h="300228">
                 <a:tc>
                   <a:txBody>
-                    <a:bodyPr wrap="square"/>
+                    <a:bodyPr/>
                     <a:lstStyle/>
                     <a:p>
                       <a:r>
@@ -3165,7 +2878,7 @@
                 </a:tc>
                 <a:tc>
                   <a:txBody>
-                    <a:bodyPr wrap="square"/>
+                    <a:bodyPr/>
                     <a:lstStyle/>
                     <a:p>
                       <a:r>
@@ -3176,6 +2889,11 @@
                   </a:txBody>
                   <a:tcPr marL="54864" marR="54864" marT="27432" marB="27432"/>
                 </a:tc>
+                <a:extLst>
+                  <a:ext uri="{0D108BD9-81ED-4DB2-BD59-A6C34878D82A}">
+                    <a16:rowId xmlns:a16="http://schemas.microsoft.com/office/drawing/2014/main" val="10009"/>
+                  </a:ext>
+                </a:extLst>
               </a:tr>
             </a:tbl>
           </a:graphicData>
@@ -3189,8 +2907,8 @@
 </p:sld>
 </file>
 
-<file path=ppt/slides/slide14.xml><?xml version="1.0" encoding="utf-8"?>
-<p:sld xmlns:a="http://schemas.openxmlformats.org/drawingml/2006/main" xmlns:p="http://schemas.openxmlformats.org/presentationml/2006/main" xmlns:r="http://schemas.openxmlformats.org/officeDocument/2006/relationships">
+<file path=ppt/slides/slide13.xml><?xml version="1.0" encoding="utf-8"?>
+<p:sld xmlns:a="http://schemas.openxmlformats.org/drawingml/2006/main" xmlns:r="http://schemas.openxmlformats.org/officeDocument/2006/relationships" xmlns:p="http://schemas.openxmlformats.org/presentationml/2006/main">
   <p:cSld name="md:12#1|2b5841fef1">
     <p:spTree>
       <p:nvGrpSpPr>
@@ -3198,7 +2916,14 @@
         <p:cNvGrpSpPr/>
         <p:nvPr/>
       </p:nvGrpSpPr>
-      <p:grpSpPr/>
+      <p:grpSpPr>
+        <a:xfrm>
+          <a:off x="0" y="0"/>
+          <a:ext cx="0" cy="0"/>
+          <a:chOff x="0" y="0"/>
+          <a:chExt cx="0" cy="0"/>
+        </a:xfrm>
+      </p:grpSpPr>
       <p:sp>
         <p:nvSpPr>
           <p:cNvPr id="2" name="Title 1"/>
@@ -3235,25 +2960,21 @@
           <a:bodyPr/>
           <a:lstStyle/>
           <a:p>
-            <a:pPr/>
             <a:r>
               <a:t>11-24(화)부터 12-10(목)까지 평일 10:00–12:00, 210호. 최종발표는 12-11(금) 10:00–12:00입니다.</a:t>
             </a:r>
           </a:p>
           <a:p>
-            <a:pPr/>
-            <a:r>
-              <a:t>가천대 글로벌캠퍼스 셔틀버스 노선을 설계하고 최적화합니다. 정규 수업에서 만든 시뮬레이터를 그대로 씁니다.</a:t>
-            </a:r>
-          </a:p>
-          <a:p>
-            <a:pPr/>
-            <a:r>
-              <a:t>정해진 노선(고정 시간표)과 수요응답 방식을 같은 수요 위에서 비교하고, 차량 대수·배차간격·정원을 바꿔 가며 파레토 프론트를 그립니다.</a:t>
-            </a:r>
-          </a:p>
-          <a:p>
-            <a:pPr/>
+            <a:r>
+              <a:t>자유주제입니다. 실제 지자체나 광역교통을 대상으로 버스 노선 개선안을 시뮬레이션으로 평가합니다.</a:t>
+            </a:r>
+          </a:p>
+          <a:p>
+            <a:r>
+              <a:t>정규 수업과 기말 프로젝트에서 만든 파이프라인(GTFS 필터링 → RAPTOR → 지표)을 새 지역에 다시 적용합니다. 전국 GTFS와 수도권 생활이동 O-D를 쓰고, 주제는 첫날 11-24에 확정합니다.</a:t>
+            </a:r>
+          </a:p>
+          <a:p>
             <a:r>
               <a:t>저장소: github.com/jihoyeo/p-practical-project</a:t>
             </a:r>
@@ -3308,7 +3029,7 @@
           <a:p>
             <a:fld id="{C1FF6DA9-008F-8B48-92A6-B652298478BF}" type="slidenum">
               <a:rPr lang="en-US" smtClean="0"/>
-              <a:t>‹#›</a:t>
+              <a:t>13</a:t>
             </a:fld>
             <a:endParaRPr lang="en-US"/>
           </a:p>
@@ -3322,8 +3043,8 @@
 </p:sld>
 </file>
 
-<file path=ppt/slides/slide15.xml><?xml version="1.0" encoding="utf-8"?>
-<p:sld xmlns:a="http://schemas.openxmlformats.org/drawingml/2006/main" xmlns:p="http://schemas.openxmlformats.org/presentationml/2006/main" xmlns:r="http://schemas.openxmlformats.org/officeDocument/2006/relationships">
+<file path=ppt/slides/slide14.xml><?xml version="1.0" encoding="utf-8"?>
+<p:sld xmlns:a="http://schemas.openxmlformats.org/drawingml/2006/main" xmlns:r="http://schemas.openxmlformats.org/officeDocument/2006/relationships" xmlns:p="http://schemas.openxmlformats.org/presentationml/2006/main">
   <p:cSld name="md:13#1|3ce96930c8">
     <p:spTree>
       <p:nvGrpSpPr>
@@ -3331,7 +3052,14 @@
         <p:cNvGrpSpPr/>
         <p:nvPr/>
       </p:nvGrpSpPr>
-      <p:grpSpPr/>
+      <p:grpSpPr>
+        <a:xfrm>
+          <a:off x="0" y="0"/>
+          <a:ext cx="0" cy="0"/>
+          <a:chOff x="0" y="0"/>
+          <a:chExt cx="0" cy="0"/>
+        </a:xfrm>
+      </p:grpSpPr>
       <p:sp>
         <p:nvSpPr>
           <p:cNvPr id="2" name="Title 1"/>
@@ -3373,7 +3101,7 @@
               <a:buAutoNum type="arabicPeriod"/>
             </a:pPr>
             <a:r>
-              <a:t>거주지 설문에 응답합니다. 도로망까지 준비된 도시는 하남·성남·서울·수원 넷뿐이라, 설문 상위 10개 시군구를 미리 준비해 두고 기말 프로젝트 대상지를 그 메뉴에서 고릅니다.</a:t>
+              <a:t>카카오톡 단톡방에 들어옵니다.</a:t>
             </a:r>
           </a:p>
           <a:p>
@@ -3382,7 +3110,16 @@
               <a:buAutoNum type="arabicPeriod"/>
             </a:pPr>
             <a:r>
-              <a:t>카카오톡 단톡방에 들어옵니다.</a:t>
+              <a:t>수요일 수업 전까지 Python 3.11과 교재 저장소를 설치합니다. </a:t>
+            </a:r>
+            <a:r>
+              <a:rPr>
+                <a:latin typeface="Consolas"/>
+              </a:rPr>
+              <a:t>from smartmob import Dtumos</a:t>
+            </a:r>
+            <a:r>
+              <a:t>가 되면 끝입니다.</a:t>
             </a:r>
           </a:p>
           <a:p>
@@ -3391,29 +3128,10 @@
               <a:buAutoNum type="arabicPeriod"/>
             </a:pPr>
             <a:r>
-              <a:t>수요일 수업 전까지 Python 3.11과 교재 저장소를 설치합니다. </a:t>
-            </a:r>
-            <a:r>
-              <a:rPr>
-                <a:latin typeface="Consolas"/>
-              </a:rPr>
-              <a:t>from smartmob import Dtumos</a:t>
-            </a:r>
-            <a:r>
-              <a:t>가 되면 끝입니다.</a:t>
-            </a:r>
-          </a:p>
-          <a:p>
-            <a:pPr>
-              <a:buFont typeface="+mj-lt"/>
-              <a:buAutoNum type="arabicPeriod"/>
-            </a:pPr>
-            <a:r>
               <a:t>상담일정 시트에 상담이 불가능한 날짜와 시간을 적습니다.</a:t>
             </a:r>
           </a:p>
           <a:p>
-            <a:pPr/>
             <a:r>
               <a:t>다음 시간(수 15:00, 210호): 하남시 도로망을 읽고 첫 시뮬레이션을 돌립니다. 노트북을 가져옵니다.</a:t>
             </a:r>
@@ -3468,7 +3186,7 @@
           <a:p>
             <a:fld id="{C1FF6DA9-008F-8B48-92A6-B652298478BF}" type="slidenum">
               <a:rPr lang="en-US" smtClean="0"/>
-              <a:t>‹#›</a:t>
+              <a:t>14</a:t>
             </a:fld>
             <a:endParaRPr lang="en-US"/>
           </a:p>
@@ -3483,7 +3201,7 @@
 </file>
 
 <file path=ppt/slides/slide2.xml><?xml version="1.0" encoding="utf-8"?>
-<p:sld xmlns:a="http://schemas.openxmlformats.org/drawingml/2006/main" xmlns:p="http://schemas.openxmlformats.org/presentationml/2006/main" xmlns:r="http://schemas.openxmlformats.org/officeDocument/2006/relationships">
+<p:sld xmlns:a="http://schemas.openxmlformats.org/drawingml/2006/main" xmlns:r="http://schemas.openxmlformats.org/officeDocument/2006/relationships" xmlns:p="http://schemas.openxmlformats.org/presentationml/2006/main">
   <p:cSld name="md:1#1|5e2a6e4d82">
     <p:spTree>
       <p:nvGrpSpPr>
@@ -3491,7 +3209,14 @@
         <p:cNvGrpSpPr/>
         <p:nvPr/>
       </p:nvGrpSpPr>
-      <p:grpSpPr/>
+      <p:grpSpPr>
+        <a:xfrm>
+          <a:off x="0" y="0"/>
+          <a:ext cx="0" cy="0"/>
+          <a:chOff x="0" y="0"/>
+          <a:chExt cx="0" cy="0"/>
+        </a:xfrm>
+      </p:grpSpPr>
       <p:sp>
         <p:nvSpPr>
           <p:cNvPr id="2" name="Title 1"/>
@@ -3530,31 +3255,198 @@
           </a:xfrm>
         </p:spPr>
         <p:txBody>
-          <a:bodyPr/>
+          <a:bodyPr>
+            <a:normAutofit/>
+          </a:bodyPr>
           <a:lstStyle/>
           <a:p>
-            <a:pPr/>
-            <a:r>
-              <a:t>한 학기 동안 도시 모빌리티 시뮬레이터 한 대를 밑바닥부터 만듭니다.</a:t>
-            </a:r>
-          </a:p>
-          <a:p>
-            <a:pPr/>
-            <a:r>
-              <a:t>도로망을 읽어 최단경로를 구하고, 대중교통 시간표로 환승 경로를 찾고, 통행 수요를 만들어 차량에 배차하고, 그 결과를 지표와 그림으로 냅니다.</a:t>
-            </a:r>
-          </a:p>
-          <a:p>
-            <a:pPr/>
-            <a:r>
-              <a:t>마지막에는 각자 사는 동네의 대중교통을 시뮬레이션합니다.</a:t>
-            </a:r>
-          </a:p>
-          <a:p>
-            <a:pPr/>
-            <a:r>
-              <a:t>데이터 분석·최적화·머신러닝을 따로 배우지 않습니다. 시뮬레이터를 만드는 데 필요해진 지점에서 하나씩 다룹니다.</a:t>
-            </a:r>
+            <a:r>
+              <a:rPr dirty="0" err="1"/>
+              <a:t>한</a:t>
+            </a:r>
+            <a:r>
+              <a:rPr dirty="0"/>
+              <a:t> </a:t>
+            </a:r>
+            <a:r>
+              <a:rPr dirty="0" err="1"/>
+              <a:t>학기</a:t>
+            </a:r>
+            <a:r>
+              <a:rPr dirty="0"/>
+              <a:t> </a:t>
+            </a:r>
+            <a:r>
+              <a:rPr dirty="0" err="1"/>
+              <a:t>동안</a:t>
+            </a:r>
+            <a:r>
+              <a:rPr dirty="0"/>
+              <a:t> </a:t>
+            </a:r>
+            <a:r>
+              <a:rPr dirty="0" err="1"/>
+              <a:t>도시</a:t>
+            </a:r>
+            <a:r>
+              <a:rPr dirty="0"/>
+              <a:t> </a:t>
+            </a:r>
+            <a:r>
+              <a:rPr dirty="0" err="1"/>
+              <a:t>모빌리티</a:t>
+            </a:r>
+            <a:r>
+              <a:rPr dirty="0"/>
+              <a:t> </a:t>
+            </a:r>
+            <a:r>
+              <a:rPr dirty="0" err="1"/>
+              <a:t>시뮬레이터</a:t>
+            </a:r>
+            <a:r>
+              <a:rPr dirty="0"/>
+              <a:t> </a:t>
+            </a:r>
+            <a:r>
+              <a:rPr dirty="0" err="1"/>
+              <a:t>한</a:t>
+            </a:r>
+            <a:r>
+              <a:rPr dirty="0"/>
+              <a:t> </a:t>
+            </a:r>
+            <a:r>
+              <a:rPr dirty="0" err="1"/>
+              <a:t>대를</a:t>
+            </a:r>
+            <a:r>
+              <a:rPr dirty="0"/>
+              <a:t> </a:t>
+            </a:r>
+            <a:r>
+              <a:rPr dirty="0" err="1"/>
+              <a:t>밑바닥부터</a:t>
+            </a:r>
+            <a:r>
+              <a:rPr dirty="0"/>
+              <a:t> </a:t>
+            </a:r>
+            <a:r>
+              <a:rPr dirty="0" err="1"/>
+              <a:t>만듭니다</a:t>
+            </a:r>
+            <a:r>
+              <a:rPr dirty="0"/>
+              <a:t>.</a:t>
+            </a:r>
+            <a:endParaRPr lang="en-US" dirty="0"/>
+          </a:p>
+          <a:p>
+            <a:endParaRPr dirty="0"/>
+          </a:p>
+          <a:p>
+            <a:r>
+              <a:rPr lang="ko-KR" altLang="en-US" dirty="0"/>
+              <a:t>시뮬레이션의 </a:t>
+            </a:r>
+            <a:r>
+              <a:rPr lang="ko-KR" altLang="en-US" dirty="0" err="1"/>
+              <a:t>기초인프라를</a:t>
+            </a:r>
+            <a:r>
+              <a:rPr lang="ko-KR" altLang="en-US" dirty="0"/>
+              <a:t> 구성하는 </a:t>
+            </a:r>
+            <a:r>
+              <a:rPr dirty="0" err="1"/>
+              <a:t>도로망</a:t>
+            </a:r>
+            <a:r>
+              <a:rPr lang="en-US" altLang="ko-KR" dirty="0"/>
+              <a:t>,</a:t>
+            </a:r>
+            <a:r>
+              <a:rPr lang="ko-KR" altLang="en-US" dirty="0"/>
+              <a:t> 대중교통망</a:t>
+            </a:r>
+            <a:r>
+              <a:rPr lang="en-US" altLang="ko-KR" dirty="0"/>
+              <a:t>,</a:t>
+            </a:r>
+            <a:r>
+              <a:rPr lang="ko-KR" altLang="en-US" dirty="0"/>
+              <a:t> 통행수요를 생성하는 과정을 먼저 진행합니다</a:t>
+            </a:r>
+            <a:endParaRPr lang="en-US" altLang="ko-KR" dirty="0"/>
+          </a:p>
+          <a:p>
+            <a:endParaRPr lang="en-US" dirty="0"/>
+          </a:p>
+          <a:p>
+            <a:r>
+              <a:rPr lang="ko-KR" altLang="en-US" dirty="0"/>
+              <a:t>기초 데이터를 구축한 후에는</a:t>
+            </a:r>
+            <a:r>
+              <a:rPr lang="en-US" altLang="ko-KR" dirty="0"/>
+              <a:t>,</a:t>
+            </a:r>
+            <a:r>
+              <a:rPr lang="ko-KR" altLang="en-US" dirty="0"/>
+              <a:t> 시뮬레이션 구동에 필요한 핵심적인 알고리즘과 모델들을 공부합니다</a:t>
+            </a:r>
+            <a:r>
+              <a:rPr lang="en-US" altLang="ko-KR" dirty="0"/>
+              <a:t>.</a:t>
+            </a:r>
+            <a:r>
+              <a:rPr lang="ko-KR" altLang="en-US" dirty="0"/>
+              <a:t> </a:t>
+            </a:r>
+            <a:r>
+              <a:rPr lang="ko-KR" altLang="en-US" dirty="0" err="1"/>
+              <a:t>차량배차</a:t>
+            </a:r>
+            <a:r>
+              <a:rPr lang="ko-KR" altLang="en-US" dirty="0"/>
+              <a:t> 알고리즘</a:t>
+            </a:r>
+            <a:r>
+              <a:rPr lang="en-US" altLang="ko-KR" dirty="0"/>
+              <a:t>.</a:t>
+            </a:r>
+            <a:r>
+              <a:rPr lang="ko-KR" altLang="en-US" dirty="0"/>
+              <a:t> 재배치 알고리즘</a:t>
+            </a:r>
+            <a:r>
+              <a:rPr lang="en-US" altLang="ko-KR" dirty="0"/>
+              <a:t>,</a:t>
+            </a:r>
+            <a:r>
+              <a:rPr lang="ko-KR" altLang="en-US" dirty="0"/>
+              <a:t> 차량 경로 생성에 대해 공부합니다</a:t>
+            </a:r>
+            <a:r>
+              <a:rPr lang="en-US" altLang="ko-KR" dirty="0"/>
+              <a:t>.</a:t>
+            </a:r>
+            <a:r>
+              <a:rPr lang="ko-KR" altLang="en-US" dirty="0"/>
+              <a:t> </a:t>
+            </a:r>
+            <a:endParaRPr lang="en-US" altLang="ko-KR" dirty="0"/>
+          </a:p>
+          <a:p>
+            <a:endParaRPr dirty="0"/>
+          </a:p>
+          <a:p>
+            <a:r>
+              <a:rPr dirty="0"/>
+              <a:t>마지막에는 가천대학교 교내셔틀인 무당이를 직접 구축해보고 개선해보는 개인 프로젝트를 수행합니다.</a:t>
+            </a:r>
+            <a:endParaRPr dirty="0"/>
           </a:p>
         </p:txBody>
       </p:sp>
@@ -3606,7 +3498,7 @@
           <a:p>
             <a:fld id="{C1FF6DA9-008F-8B48-92A6-B652298478BF}" type="slidenum">
               <a:rPr lang="en-US" smtClean="0"/>
-              <a:t>‹#›</a:t>
+              <a:t>2</a:t>
             </a:fld>
             <a:endParaRPr lang="en-US"/>
           </a:p>
@@ -3645,7 +3537,7 @@
 </file>
 
 <file path=ppt/slides/slide3.xml><?xml version="1.0" encoding="utf-8"?>
-<p:sld xmlns:a="http://schemas.openxmlformats.org/drawingml/2006/main" xmlns:p="http://schemas.openxmlformats.org/presentationml/2006/main" xmlns:r="http://schemas.openxmlformats.org/officeDocument/2006/relationships">
+<p:sld xmlns:a="http://schemas.openxmlformats.org/drawingml/2006/main" xmlns:r="http://schemas.openxmlformats.org/officeDocument/2006/relationships" xmlns:p="http://schemas.openxmlformats.org/presentationml/2006/main">
   <p:cSld name="md:2#1|cb1138e7c3">
     <p:spTree>
       <p:nvGrpSpPr>
@@ -3653,7 +3545,14 @@
         <p:cNvGrpSpPr/>
         <p:nvPr/>
       </p:nvGrpSpPr>
-      <p:grpSpPr/>
+      <p:grpSpPr>
+        <a:xfrm>
+          <a:off x="0" y="0"/>
+          <a:ext cx="0" cy="0"/>
+          <a:chOff x="0" y="0"/>
+          <a:chExt cx="0" cy="0"/>
+        </a:xfrm>
+      </p:grpSpPr>
       <p:sp>
         <p:nvSpPr>
           <p:cNvPr id="2" name="Title 1"/>
@@ -3694,37 +3593,520 @@
               <a:buNone/>
             </a:pPr>
             <a:r>
-              <a:t>이 과목을 마치면 다음을 할 수 있습니다.</a:t>
-            </a:r>
-          </a:p>
-          <a:p>
-            <a:pPr/>
-            <a:r>
-              <a:t>OpenStreetMap 도로망과 GTFS 대중교통 시간표를 읽어 분석에 쓸 수 있는 형태로 만듭니다.</a:t>
-            </a:r>
-          </a:p>
-          <a:p>
-            <a:pPr/>
-            <a:r>
-              <a:t>최단경로 알고리즘(다익스트라, A*)과 대중교통 경로 탐색(RAPTOR)을 직접 구현하고, 실제 엔진과 대조해 정확도를 검증합니다.</a:t>
-            </a:r>
-          </a:p>
-          <a:p>
-            <a:pPr/>
-            <a:r>
-              <a:t>통행 수요를 생성하고, 승객과 차량을 배차하는 알고리즘을 비교합니다.</a:t>
-            </a:r>
-          </a:p>
-          <a:p>
-            <a:pPr/>
-            <a:r>
-              <a:t>이산시간 시뮬레이션 루프를 직접 짜고, 그 결과를 서비스율·대기시간·차량 가동률로 해석합니다.</a:t>
-            </a:r>
-          </a:p>
-          <a:p>
-            <a:pPr/>
-            <a:r>
-              <a:t>실제 지역을 대상으로 개선 시나리오를 설계하고, 시뮬레이션으로 그 효과를 숫자로 제시합니다.</a:t>
+              <a:rPr dirty="0" err="1"/>
+              <a:t>이</a:t>
+            </a:r>
+            <a:r>
+              <a:rPr dirty="0"/>
+              <a:t> </a:t>
+            </a:r>
+            <a:r>
+              <a:rPr dirty="0" err="1"/>
+              <a:t>과목을</a:t>
+            </a:r>
+            <a:r>
+              <a:rPr dirty="0"/>
+              <a:t> </a:t>
+            </a:r>
+            <a:r>
+              <a:rPr dirty="0" err="1"/>
+              <a:t>마치면</a:t>
+            </a:r>
+            <a:r>
+              <a:rPr dirty="0"/>
+              <a:t> </a:t>
+            </a:r>
+            <a:r>
+              <a:rPr dirty="0" err="1"/>
+              <a:t>다음을</a:t>
+            </a:r>
+            <a:r>
+              <a:rPr dirty="0"/>
+              <a:t> </a:t>
+            </a:r>
+            <a:r>
+              <a:rPr dirty="0" err="1"/>
+              <a:t>할</a:t>
+            </a:r>
+            <a:r>
+              <a:rPr dirty="0"/>
+              <a:t> </a:t>
+            </a:r>
+            <a:r>
+              <a:rPr dirty="0" err="1"/>
+              <a:t>수</a:t>
+            </a:r>
+            <a:r>
+              <a:rPr dirty="0"/>
+              <a:t> </a:t>
+            </a:r>
+            <a:r>
+              <a:rPr dirty="0" err="1"/>
+              <a:t>있습니다</a:t>
+            </a:r>
+            <a:r>
+              <a:rPr dirty="0"/>
+              <a:t>.</a:t>
+            </a:r>
+            <a:r>
+              <a:rPr lang="ko-KR" altLang="en-US" dirty="0"/>
+              <a:t> </a:t>
+            </a:r>
+            <a:r>
+              <a:rPr dirty="0"/>
+              <a:t>OpenStreetMap </a:t>
+            </a:r>
+            <a:r>
+              <a:rPr dirty="0" err="1"/>
+              <a:t>도로망과</a:t>
+            </a:r>
+            <a:r>
+              <a:rPr dirty="0"/>
+              <a:t> GTFS </a:t>
+            </a:r>
+            <a:r>
+              <a:rPr dirty="0" err="1"/>
+              <a:t>대중교통</a:t>
+            </a:r>
+            <a:r>
+              <a:rPr dirty="0"/>
+              <a:t> </a:t>
+            </a:r>
+            <a:r>
+              <a:rPr dirty="0" err="1"/>
+              <a:t>시간표를</a:t>
+            </a:r>
+            <a:r>
+              <a:rPr dirty="0"/>
+              <a:t> </a:t>
+            </a:r>
+            <a:r>
+              <a:rPr dirty="0" err="1"/>
+              <a:t>읽어</a:t>
+            </a:r>
+            <a:r>
+              <a:rPr dirty="0"/>
+              <a:t> </a:t>
+            </a:r>
+            <a:r>
+              <a:rPr dirty="0" err="1"/>
+              <a:t>분석에</a:t>
+            </a:r>
+            <a:r>
+              <a:rPr dirty="0"/>
+              <a:t> </a:t>
+            </a:r>
+            <a:r>
+              <a:rPr dirty="0" err="1"/>
+              <a:t>쓸</a:t>
+            </a:r>
+            <a:r>
+              <a:rPr dirty="0"/>
+              <a:t> </a:t>
+            </a:r>
+            <a:r>
+              <a:rPr dirty="0" err="1"/>
+              <a:t>수</a:t>
+            </a:r>
+            <a:r>
+              <a:rPr dirty="0"/>
+              <a:t> </a:t>
+            </a:r>
+            <a:r>
+              <a:rPr dirty="0" err="1"/>
+              <a:t>있는</a:t>
+            </a:r>
+            <a:r>
+              <a:rPr dirty="0"/>
+              <a:t> </a:t>
+            </a:r>
+            <a:r>
+              <a:rPr dirty="0" err="1"/>
+              <a:t>형태로</a:t>
+            </a:r>
+            <a:r>
+              <a:rPr dirty="0"/>
+              <a:t> </a:t>
+            </a:r>
+            <a:r>
+              <a:rPr dirty="0" err="1"/>
+              <a:t>만듭니다</a:t>
+            </a:r>
+            <a:r>
+              <a:rPr dirty="0"/>
+              <a:t>.</a:t>
+            </a:r>
+          </a:p>
+          <a:p>
+            <a:endParaRPr lang="en-US" dirty="0"/>
+          </a:p>
+          <a:p>
+            <a:r>
+              <a:rPr dirty="0" err="1"/>
+              <a:t>최단경로</a:t>
+            </a:r>
+            <a:r>
+              <a:rPr dirty="0"/>
+              <a:t> </a:t>
+            </a:r>
+            <a:r>
+              <a:rPr dirty="0" err="1"/>
+              <a:t>알고리즘</a:t>
+            </a:r>
+            <a:r>
+              <a:rPr dirty="0"/>
+              <a:t>(</a:t>
+            </a:r>
+            <a:r>
+              <a:rPr dirty="0" err="1"/>
+              <a:t>다익스트라</a:t>
+            </a:r>
+            <a:r>
+              <a:rPr dirty="0"/>
+              <a:t>, A*)</a:t>
+            </a:r>
+            <a:r>
+              <a:rPr dirty="0" err="1"/>
+              <a:t>과</a:t>
+            </a:r>
+            <a:r>
+              <a:rPr dirty="0"/>
+              <a:t> </a:t>
+            </a:r>
+            <a:r>
+              <a:rPr dirty="0" err="1"/>
+              <a:t>대중교통</a:t>
+            </a:r>
+            <a:r>
+              <a:rPr dirty="0"/>
+              <a:t> </a:t>
+            </a:r>
+            <a:r>
+              <a:rPr dirty="0" err="1"/>
+              <a:t>경로</a:t>
+            </a:r>
+            <a:r>
+              <a:rPr dirty="0"/>
+              <a:t> </a:t>
+            </a:r>
+            <a:r>
+              <a:rPr dirty="0" err="1"/>
+              <a:t>탐색</a:t>
+            </a:r>
+            <a:r>
+              <a:rPr dirty="0"/>
+              <a:t>(RAPTOR)</a:t>
+            </a:r>
+            <a:r>
+              <a:rPr dirty="0" err="1"/>
+              <a:t>을</a:t>
+            </a:r>
+            <a:r>
+              <a:rPr dirty="0"/>
+              <a:t> </a:t>
+            </a:r>
+            <a:r>
+              <a:rPr dirty="0" err="1"/>
+              <a:t>직접</a:t>
+            </a:r>
+            <a:r>
+              <a:rPr dirty="0"/>
+              <a:t> </a:t>
+            </a:r>
+            <a:r>
+              <a:rPr dirty="0" err="1"/>
+              <a:t>구현하고</a:t>
+            </a:r>
+            <a:r>
+              <a:rPr dirty="0"/>
+              <a:t>, </a:t>
+            </a:r>
+            <a:r>
+              <a:rPr dirty="0" err="1"/>
+              <a:t>실제</a:t>
+            </a:r>
+            <a:r>
+              <a:rPr dirty="0"/>
+              <a:t> </a:t>
+            </a:r>
+            <a:r>
+              <a:rPr dirty="0" err="1"/>
+              <a:t>엔진과</a:t>
+            </a:r>
+            <a:r>
+              <a:rPr dirty="0"/>
+              <a:t> </a:t>
+            </a:r>
+            <a:r>
+              <a:rPr dirty="0" err="1"/>
+              <a:t>대조해</a:t>
+            </a:r>
+            <a:r>
+              <a:rPr dirty="0"/>
+              <a:t> </a:t>
+            </a:r>
+            <a:r>
+              <a:rPr dirty="0" err="1"/>
+              <a:t>정확도를</a:t>
+            </a:r>
+            <a:r>
+              <a:rPr dirty="0"/>
+              <a:t> </a:t>
+            </a:r>
+            <a:r>
+              <a:rPr dirty="0" err="1"/>
+              <a:t>검증합니다</a:t>
+            </a:r>
+            <a:r>
+              <a:rPr dirty="0"/>
+              <a:t>.</a:t>
+            </a:r>
+            <a:endParaRPr lang="en-US" dirty="0"/>
+          </a:p>
+          <a:p>
+            <a:endParaRPr dirty="0"/>
+          </a:p>
+          <a:p>
+            <a:r>
+              <a:rPr dirty="0" err="1"/>
+              <a:t>통행</a:t>
+            </a:r>
+            <a:r>
+              <a:rPr dirty="0"/>
+              <a:t> </a:t>
+            </a:r>
+            <a:r>
+              <a:rPr dirty="0" err="1"/>
+              <a:t>수요를</a:t>
+            </a:r>
+            <a:r>
+              <a:rPr dirty="0"/>
+              <a:t> </a:t>
+            </a:r>
+            <a:r>
+              <a:rPr dirty="0" err="1"/>
+              <a:t>생성하고</a:t>
+            </a:r>
+            <a:r>
+              <a:rPr dirty="0"/>
+              <a:t>, </a:t>
+            </a:r>
+            <a:r>
+              <a:rPr dirty="0" err="1"/>
+              <a:t>승객과</a:t>
+            </a:r>
+            <a:r>
+              <a:rPr dirty="0"/>
+              <a:t> </a:t>
+            </a:r>
+            <a:r>
+              <a:rPr dirty="0" err="1"/>
+              <a:t>차량을</a:t>
+            </a:r>
+            <a:r>
+              <a:rPr dirty="0"/>
+              <a:t> </a:t>
+            </a:r>
+            <a:r>
+              <a:rPr dirty="0" err="1"/>
+              <a:t>배차하는</a:t>
+            </a:r>
+            <a:r>
+              <a:rPr dirty="0"/>
+              <a:t> </a:t>
+            </a:r>
+            <a:r>
+              <a:rPr dirty="0" err="1"/>
+              <a:t>알고리즘을</a:t>
+            </a:r>
+            <a:r>
+              <a:rPr dirty="0"/>
+              <a:t> </a:t>
+            </a:r>
+            <a:r>
+              <a:rPr dirty="0" err="1"/>
+              <a:t>비교합니다</a:t>
+            </a:r>
+            <a:r>
+              <a:rPr dirty="0"/>
+              <a:t>.</a:t>
+            </a:r>
+            <a:r>
+              <a:rPr lang="ko-KR" altLang="en-US" dirty="0"/>
+              <a:t> </a:t>
+            </a:r>
+            <a:r>
+              <a:rPr dirty="0" err="1"/>
+              <a:t>이산시간</a:t>
+            </a:r>
+            <a:r>
+              <a:rPr dirty="0"/>
+              <a:t> </a:t>
+            </a:r>
+            <a:r>
+              <a:rPr dirty="0" err="1"/>
+              <a:t>시뮬레이션</a:t>
+            </a:r>
+            <a:r>
+              <a:rPr dirty="0"/>
+              <a:t> </a:t>
+            </a:r>
+            <a:r>
+              <a:rPr dirty="0" err="1"/>
+              <a:t>루프를</a:t>
+            </a:r>
+            <a:r>
+              <a:rPr dirty="0"/>
+              <a:t> </a:t>
+            </a:r>
+            <a:r>
+              <a:rPr dirty="0" err="1"/>
+              <a:t>직접</a:t>
+            </a:r>
+            <a:r>
+              <a:rPr dirty="0"/>
+              <a:t> </a:t>
+            </a:r>
+            <a:r>
+              <a:rPr dirty="0" err="1"/>
+              <a:t>짜고</a:t>
+            </a:r>
+            <a:r>
+              <a:rPr dirty="0"/>
+              <a:t>, </a:t>
+            </a:r>
+            <a:r>
+              <a:rPr dirty="0" err="1"/>
+              <a:t>그</a:t>
+            </a:r>
+            <a:r>
+              <a:rPr dirty="0"/>
+              <a:t> </a:t>
+            </a:r>
+            <a:r>
+              <a:rPr dirty="0" err="1"/>
+              <a:t>결과를</a:t>
+            </a:r>
+            <a:r>
+              <a:rPr dirty="0"/>
+              <a:t> </a:t>
+            </a:r>
+            <a:r>
+              <a:rPr dirty="0" err="1"/>
+              <a:t>서비스율·대기시간·차량</a:t>
+            </a:r>
+            <a:r>
+              <a:rPr dirty="0"/>
+              <a:t> </a:t>
+            </a:r>
+            <a:r>
+              <a:rPr dirty="0" err="1"/>
+              <a:t>가동률로</a:t>
+            </a:r>
+            <a:r>
+              <a:rPr dirty="0"/>
+              <a:t> </a:t>
+            </a:r>
+            <a:r>
+              <a:rPr dirty="0" err="1"/>
+              <a:t>해석합니다</a:t>
+            </a:r>
+            <a:r>
+              <a:rPr dirty="0"/>
+              <a:t>.</a:t>
+            </a:r>
+          </a:p>
+          <a:p>
+            <a:endParaRPr lang="en-US" dirty="0"/>
+          </a:p>
+          <a:p>
+            <a:r>
+              <a:rPr dirty="0" err="1"/>
+              <a:t>실제</a:t>
+            </a:r>
+            <a:r>
+              <a:rPr dirty="0"/>
+              <a:t> </a:t>
+            </a:r>
+            <a:r>
+              <a:rPr dirty="0" err="1"/>
+              <a:t>지역을</a:t>
+            </a:r>
+            <a:r>
+              <a:rPr dirty="0"/>
+              <a:t> </a:t>
+            </a:r>
+            <a:r>
+              <a:rPr dirty="0" err="1"/>
+              <a:t>대상으로</a:t>
+            </a:r>
+            <a:r>
+              <a:rPr dirty="0"/>
+              <a:t> </a:t>
+            </a:r>
+            <a:r>
+              <a:rPr dirty="0" err="1"/>
+              <a:t>개선</a:t>
+            </a:r>
+            <a:r>
+              <a:rPr dirty="0"/>
+              <a:t> </a:t>
+            </a:r>
+            <a:r>
+              <a:rPr dirty="0" err="1"/>
+              <a:t>시나리오를</a:t>
+            </a:r>
+            <a:r>
+              <a:rPr dirty="0"/>
+              <a:t> </a:t>
+            </a:r>
+            <a:r>
+              <a:rPr dirty="0" err="1"/>
+              <a:t>설계하고</a:t>
+            </a:r>
+            <a:r>
+              <a:rPr dirty="0"/>
+              <a:t>, </a:t>
+            </a:r>
+            <a:r>
+              <a:rPr dirty="0" err="1"/>
+              <a:t>시뮬레이션으로</a:t>
+            </a:r>
+            <a:r>
+              <a:rPr dirty="0"/>
+              <a:t> </a:t>
+            </a:r>
+            <a:r>
+              <a:rPr dirty="0" err="1"/>
+              <a:t>그</a:t>
+            </a:r>
+            <a:r>
+              <a:rPr dirty="0"/>
+              <a:t> </a:t>
+            </a:r>
+            <a:r>
+              <a:rPr dirty="0" err="1"/>
+              <a:t>효과를</a:t>
+            </a:r>
+            <a:r>
+              <a:rPr dirty="0"/>
+              <a:t> </a:t>
+            </a:r>
+            <a:r>
+              <a:rPr dirty="0" err="1"/>
+              <a:t>숫자로</a:t>
+            </a:r>
+            <a:r>
+              <a:rPr dirty="0"/>
+              <a:t> </a:t>
+            </a:r>
+            <a:r>
+              <a:rPr dirty="0" err="1"/>
+              <a:t>제시합니다</a:t>
+            </a:r>
+            <a:r>
+              <a:rPr dirty="0"/>
+              <a:t>.</a:t>
             </a:r>
           </a:p>
         </p:txBody>
@@ -3777,7 +4159,7 @@
           <a:p>
             <a:fld id="{C1FF6DA9-008F-8B48-92A6-B652298478BF}" type="slidenum">
               <a:rPr lang="en-US" smtClean="0"/>
-              <a:t>‹#›</a:t>
+              <a:t>3</a:t>
             </a:fld>
             <a:endParaRPr lang="en-US"/>
           </a:p>
@@ -3792,146 +4174,7 @@
 </file>
 
 <file path=ppt/slides/slide4.xml><?xml version="1.0" encoding="utf-8"?>
-<p:sld xmlns:a="http://schemas.openxmlformats.org/drawingml/2006/main" xmlns:p="http://schemas.openxmlformats.org/presentationml/2006/main" xmlns:r="http://schemas.openxmlformats.org/officeDocument/2006/relationships">
-  <p:cSld name="md:3#1|c59b5b1a4b">
-    <p:spTree>
-      <p:nvGrpSpPr>
-        <p:cNvPr id="1" name=""/>
-        <p:cNvGrpSpPr/>
-        <p:nvPr/>
-      </p:nvGrpSpPr>
-      <p:grpSpPr/>
-      <p:sp>
-        <p:nvSpPr>
-          <p:cNvPr id="2" name="Title 1"/>
-          <p:cNvSpPr>
-            <a:spLocks noGrp="1"/>
-          </p:cNvSpPr>
-          <p:nvPr>
-            <p:ph type="title"/>
-          </p:nvPr>
-        </p:nvSpPr>
-        <p:spPr/>
-        <p:txBody>
-          <a:bodyPr/>
-          <a:lstStyle/>
-          <a:p>
-            <a:r>
-              <a:t>3. 직접 짜는 것 셋, 가져다 쓰는 것</a:t>
-            </a:r>
-          </a:p>
-        </p:txBody>
-      </p:sp>
-      <p:sp>
-        <p:nvSpPr>
-          <p:cNvPr id="3" name="Content Placeholder 2"/>
-          <p:cNvSpPr>
-            <a:spLocks noGrp="1"/>
-          </p:cNvSpPr>
-          <p:nvPr>
-            <p:ph idx="1"/>
-          </p:nvPr>
-        </p:nvSpPr>
-        <p:spPr/>
-        <p:txBody>
-          <a:bodyPr/>
-          <a:lstStyle/>
-          <a:p>
-            <a:pPr/>
-            <a:r>
-              <a:t>세 가지는 라이브러리 없이 직접 짭니다. 최단경로(3주차, 약 90줄), 대중교통 경로 탐색 RAPTOR(5주차, 약 150줄), 시뮬레이션 루프(11주차, 약 150줄)입니다.</a:t>
-            </a:r>
-          </a:p>
-          <a:p>
-            <a:pPr lvl="1"/>
-            <a:r>
-              <a:t>셋 다 짧고, 짜 보지 않으면 안에서 무슨 일이 일어나는지 알 수 없습니다.</a:t>
-            </a:r>
-          </a:p>
-          <a:p>
-            <a:pPr/>
-            <a:r>
-              <a:t>나머지는 완성된 코드를 읽고 인자를 바꿔 가며 실험합니다. 수요 생성기와 배차 알고리즘이 여기에 속합니다.</a:t>
-            </a:r>
-          </a:p>
-          <a:p>
-            <a:pPr/>
-            <a:r>
-              <a:t>무거운 계산은 DTUMOS 엔진에 HTTP로 맡깁니다. 엔진 내부는 Rust로 되어 있지만, 이 과목에서 Rust를 다루지는 않습니다.</a:t>
-            </a:r>
-          </a:p>
-          <a:p>
-            <a:pPr/>
-            <a:r>
-              <a:t>직접 짠 코드는 항상 기준과 대조합니다. 다익스트라는 NetworkX와, RAPTOR는 실제 엔진과 맞춰 봅니다.</a:t>
-            </a:r>
-          </a:p>
-        </p:txBody>
-      </p:sp>
-      <p:sp>
-        <p:nvSpPr>
-          <p:cNvPr id="100" name="Footer Placeholder 4"/>
-          <p:cNvSpPr>
-            <a:spLocks noGrp="1"/>
-          </p:cNvSpPr>
-          <p:nvPr>
-            <p:ph type="ftr" sz="quarter" idx="11"/>
-          </p:nvPr>
-        </p:nvSpPr>
-        <p:spPr>
-          <a:xfrm>
-            <a:off x="548640" y="6355080"/>
-            <a:ext cx="8229600" cy="320040"/>
-          </a:xfrm>
-        </p:spPr>
-        <p:txBody>
-          <a:bodyPr/>
-          <a:lstStyle/>
-          <a:p>
-            <a:r>
-              <a:t>스마트 교통물류 2026-2 · 오리엔테이션</a:t>
-            </a:r>
-          </a:p>
-        </p:txBody>
-      </p:sp>
-      <p:sp>
-        <p:nvSpPr>
-          <p:cNvPr id="101" name="Slide Number Placeholder 5"/>
-          <p:cNvSpPr>
-            <a:spLocks noGrp="1"/>
-          </p:cNvSpPr>
-          <p:nvPr>
-            <p:ph type="sldNum" sz="quarter" idx="12"/>
-          </p:nvPr>
-        </p:nvSpPr>
-        <p:spPr>
-          <a:xfrm>
-            <a:off x="10545775" y="6355080"/>
-            <a:ext cx="1097280" cy="320040"/>
-          </a:xfrm>
-        </p:spPr>
-        <p:txBody>
-          <a:bodyPr/>
-          <a:lstStyle/>
-          <a:p>
-            <a:fld id="{C1FF6DA9-008F-8B48-92A6-B652298478BF}" type="slidenum">
-              <a:rPr lang="en-US" smtClean="0"/>
-              <a:t>‹#›</a:t>
-            </a:fld>
-            <a:endParaRPr lang="en-US"/>
-          </a:p>
-        </p:txBody>
-      </p:sp>
-    </p:spTree>
-  </p:cSld>
-  <p:clrMapOvr>
-    <a:masterClrMapping/>
-  </p:clrMapOvr>
-</p:sld>
-</file>
-
-<file path=ppt/slides/slide5.xml><?xml version="1.0" encoding="utf-8"?>
-<p:sld xmlns:a="http://schemas.openxmlformats.org/drawingml/2006/main" xmlns:p="http://schemas.openxmlformats.org/presentationml/2006/main" xmlns:r="http://schemas.openxmlformats.org/officeDocument/2006/relationships">
+<p:sld xmlns:a="http://schemas.openxmlformats.org/drawingml/2006/main" xmlns:r="http://schemas.openxmlformats.org/officeDocument/2006/relationships" xmlns:p="http://schemas.openxmlformats.org/presentationml/2006/main">
   <p:cSld name="md:4#1|6cb6f67358">
     <p:spTree>
       <p:nvGrpSpPr>
@@ -3939,7 +4182,14 @@
         <p:cNvGrpSpPr/>
         <p:nvPr/>
       </p:nvGrpSpPr>
-      <p:grpSpPr/>
+      <p:grpSpPr>
+        <a:xfrm>
+          <a:off x="0" y="0"/>
+          <a:ext cx="0" cy="0"/>
+          <a:chOff x="0" y="0"/>
+          <a:chExt cx="0" cy="0"/>
+        </a:xfrm>
+      </p:grpSpPr>
       <p:sp>
         <p:nvSpPr>
           <p:cNvPr id="2" name="Title 1"/>
@@ -3956,8 +4206,18 @@
           <a:lstStyle/>
           <a:p>
             <a:r>
-              <a:t>4. 12주 흐름</a:t>
-            </a:r>
+              <a:rPr lang="en-US" altLang="ko-KR" dirty="0"/>
+              <a:t>3</a:t>
+            </a:r>
+            <a:r>
+              <a:rPr dirty="0"/>
+              <a:t>. 12주 </a:t>
+            </a:r>
+            <a:r>
+              <a:rPr dirty="0" err="1"/>
+              <a:t>흐름</a:t>
+            </a:r>
+            <a:endParaRPr dirty="0"/>
           </a:p>
         </p:txBody>
       </p:sp>
@@ -4009,7 +4269,7 @@
           <a:p>
             <a:fld id="{C1FF6DA9-008F-8B48-92A6-B652298478BF}" type="slidenum">
               <a:rPr lang="en-US" smtClean="0"/>
-              <a:t>‹#›</a:t>
+              <a:t>4</a:t>
             </a:fld>
             <a:endParaRPr lang="en-US"/>
           </a:p>
@@ -4034,16 +4294,46 @@
                 <a:tableStyleId>{5940675A-B579-460E-94D1-54222C63F5DA}</a:tableStyleId>
               </a:tblPr>
               <a:tblGrid>
-                <a:gridCol w="1136674"/>
-                <a:gridCol w="2484501"/>
-                <a:gridCol w="1174168"/>
-                <a:gridCol w="2616719"/>
-                <a:gridCol w="3682351"/>
+                <a:gridCol w="1136674">
+                  <a:extLst>
+                    <a:ext uri="{9D8B030D-6E8A-4147-A177-3AD203B41FA5}">
+                      <a16:colId xmlns:a16="http://schemas.microsoft.com/office/drawing/2014/main" val="20000"/>
+                    </a:ext>
+                  </a:extLst>
+                </a:gridCol>
+                <a:gridCol w="2484501">
+                  <a:extLst>
+                    <a:ext uri="{9D8B030D-6E8A-4147-A177-3AD203B41FA5}">
+                      <a16:colId xmlns:a16="http://schemas.microsoft.com/office/drawing/2014/main" val="20001"/>
+                    </a:ext>
+                  </a:extLst>
+                </a:gridCol>
+                <a:gridCol w="1174168">
+                  <a:extLst>
+                    <a:ext uri="{9D8B030D-6E8A-4147-A177-3AD203B41FA5}">
+                      <a16:colId xmlns:a16="http://schemas.microsoft.com/office/drawing/2014/main" val="20002"/>
+                    </a:ext>
+                  </a:extLst>
+                </a:gridCol>
+                <a:gridCol w="2616719">
+                  <a:extLst>
+                    <a:ext uri="{9D8B030D-6E8A-4147-A177-3AD203B41FA5}">
+                      <a16:colId xmlns:a16="http://schemas.microsoft.com/office/drawing/2014/main" val="20003"/>
+                    </a:ext>
+                  </a:extLst>
+                </a:gridCol>
+                <a:gridCol w="3682351">
+                  <a:extLst>
+                    <a:ext uri="{9D8B030D-6E8A-4147-A177-3AD203B41FA5}">
+                      <a16:colId xmlns:a16="http://schemas.microsoft.com/office/drawing/2014/main" val="20004"/>
+                    </a:ext>
+                  </a:extLst>
+                </a:gridCol>
               </a:tblGrid>
               <a:tr h="268478">
                 <a:tc>
                   <a:txBody>
-                    <a:bodyPr wrap="square"/>
+                    <a:bodyPr/>
                     <a:lstStyle/>
                     <a:p>
                       <a:pPr algn="ctr"/>
@@ -4061,7 +4351,7 @@
                 </a:tc>
                 <a:tc>
                   <a:txBody>
-                    <a:bodyPr wrap="square"/>
+                    <a:bodyPr/>
                     <a:lstStyle/>
                     <a:p>
                       <a:pPr algn="ctr"/>
@@ -4079,7 +4369,7 @@
                 </a:tc>
                 <a:tc>
                   <a:txBody>
-                    <a:bodyPr wrap="square"/>
+                    <a:bodyPr/>
                     <a:lstStyle/>
                     <a:p>
                       <a:pPr algn="ctr"/>
@@ -4097,7 +4387,7 @@
                 </a:tc>
                 <a:tc>
                   <a:txBody>
-                    <a:bodyPr wrap="square"/>
+                    <a:bodyPr/>
                     <a:lstStyle/>
                     <a:p>
                       <a:pPr algn="ctr"/>
@@ -4115,7 +4405,7 @@
                 </a:tc>
                 <a:tc>
                   <a:txBody>
-                    <a:bodyPr wrap="square"/>
+                    <a:bodyPr/>
                     <a:lstStyle/>
                     <a:p>
                       <a:pPr algn="ctr"/>
@@ -4131,11 +4421,16 @@
                     </a:solidFill>
                   </a:tcPr>
                 </a:tc>
+                <a:extLst>
+                  <a:ext uri="{0D108BD9-81ED-4DB2-BD59-A6C34878D82A}">
+                    <a16:rowId xmlns:a16="http://schemas.microsoft.com/office/drawing/2014/main" val="10000"/>
+                  </a:ext>
+                </a:extLst>
               </a:tr>
               <a:tr h="268478">
                 <a:tc>
                   <a:txBody>
-                    <a:bodyPr wrap="square"/>
+                    <a:bodyPr/>
                     <a:lstStyle/>
                     <a:p>
                       <a:pPr algn="r"/>
@@ -4149,7 +4444,7 @@
                 </a:tc>
                 <a:tc>
                   <a:txBody>
-                    <a:bodyPr wrap="square"/>
+                    <a:bodyPr/>
                     <a:lstStyle/>
                     <a:p>
                       <a:r>
@@ -4162,7 +4457,7 @@
                 </a:tc>
                 <a:tc>
                   <a:txBody>
-                    <a:bodyPr wrap="square"/>
+                    <a:bodyPr/>
                     <a:lstStyle/>
                     <a:p>
                       <a:r>
@@ -4175,7 +4470,7 @@
                 </a:tc>
                 <a:tc>
                   <a:txBody>
-                    <a:bodyPr wrap="square"/>
+                    <a:bodyPr/>
                     <a:lstStyle/>
                     <a:p>
                       <a:r>
@@ -4188,7 +4483,7 @@
                 </a:tc>
                 <a:tc>
                   <a:txBody>
-                    <a:bodyPr wrap="square"/>
+                    <a:bodyPr/>
                     <a:lstStyle/>
                     <a:p>
                       <a:r>
@@ -4199,11 +4494,16 @@
                   </a:txBody>
                   <a:tcPr marL="54864" marR="54864" marT="27432" marB="27432"/>
                 </a:tc>
+                <a:extLst>
+                  <a:ext uri="{0D108BD9-81ED-4DB2-BD59-A6C34878D82A}">
+                    <a16:rowId xmlns:a16="http://schemas.microsoft.com/office/drawing/2014/main" val="10001"/>
+                  </a:ext>
+                </a:extLst>
               </a:tr>
               <a:tr h="268478">
                 <a:tc>
                   <a:txBody>
-                    <a:bodyPr wrap="square"/>
+                    <a:bodyPr/>
                     <a:lstStyle/>
                     <a:p>
                       <a:pPr algn="r"/>
@@ -4217,7 +4517,7 @@
                 </a:tc>
                 <a:tc>
                   <a:txBody>
-                    <a:bodyPr wrap="square"/>
+                    <a:bodyPr/>
                     <a:lstStyle/>
                     <a:p>
                       <a:r>
@@ -4230,7 +4530,7 @@
                 </a:tc>
                 <a:tc>
                   <a:txBody>
-                    <a:bodyPr wrap="square"/>
+                    <a:bodyPr/>
                     <a:lstStyle/>
                     <a:p>
                       <a:r>
@@ -4243,7 +4543,7 @@
                 </a:tc>
                 <a:tc>
                   <a:txBody>
-                    <a:bodyPr wrap="square"/>
+                    <a:bodyPr/>
                     <a:lstStyle/>
                     <a:p>
                       <a:r>
@@ -4256,7 +4556,7 @@
                 </a:tc>
                 <a:tc>
                   <a:txBody>
-                    <a:bodyPr wrap="square"/>
+                    <a:bodyPr/>
                     <a:lstStyle/>
                     <a:p>
                       <a:r>
@@ -4267,11 +4567,16 @@
                   </a:txBody>
                   <a:tcPr marL="54864" marR="54864" marT="27432" marB="27432"/>
                 </a:tc>
+                <a:extLst>
+                  <a:ext uri="{0D108BD9-81ED-4DB2-BD59-A6C34878D82A}">
+                    <a16:rowId xmlns:a16="http://schemas.microsoft.com/office/drawing/2014/main" val="10002"/>
+                  </a:ext>
+                </a:extLst>
               </a:tr>
               <a:tr h="268478">
                 <a:tc>
                   <a:txBody>
-                    <a:bodyPr wrap="square"/>
+                    <a:bodyPr/>
                     <a:lstStyle/>
                     <a:p>
                       <a:pPr algn="r"/>
@@ -4285,7 +4590,7 @@
                 </a:tc>
                 <a:tc>
                   <a:txBody>
-                    <a:bodyPr wrap="square"/>
+                    <a:bodyPr/>
                     <a:lstStyle/>
                     <a:p>
                       <a:r>
@@ -4298,7 +4603,7 @@
                 </a:tc>
                 <a:tc>
                   <a:txBody>
-                    <a:bodyPr wrap="square"/>
+                    <a:bodyPr/>
                     <a:lstStyle/>
                     <a:p>
                       <a:r>
@@ -4311,7 +4616,7 @@
                 </a:tc>
                 <a:tc>
                   <a:txBody>
-                    <a:bodyPr wrap="square"/>
+                    <a:bodyPr/>
                     <a:lstStyle/>
                     <a:p>
                       <a:r>
@@ -4324,22 +4629,27 @@
                 </a:tc>
                 <a:tc>
                   <a:txBody>
-                    <a:bodyPr wrap="square"/>
+                    <a:bodyPr/>
                     <a:lstStyle/>
                     <a:p>
                       <a:r>
                         <a:rPr sz="1000" b="1"/>
-                        <a:t>다익스트라·A\* 직접 구현</a:t>
-                      </a:r>
-                    </a:p>
-                  </a:txBody>
-                  <a:tcPr marL="54864" marR="54864" marT="27432" marB="27432"/>
-                </a:tc>
+                        <a:t>다익스트라·A* 직접 구현</a:t>
+                      </a:r>
+                    </a:p>
+                  </a:txBody>
+                  <a:tcPr marL="54864" marR="54864" marT="27432" marB="27432"/>
+                </a:tc>
+                <a:extLst>
+                  <a:ext uri="{0D108BD9-81ED-4DB2-BD59-A6C34878D82A}">
+                    <a16:rowId xmlns:a16="http://schemas.microsoft.com/office/drawing/2014/main" val="10003"/>
+                  </a:ext>
+                </a:extLst>
               </a:tr>
               <a:tr h="268478">
                 <a:tc>
                   <a:txBody>
-                    <a:bodyPr wrap="square"/>
+                    <a:bodyPr/>
                     <a:lstStyle/>
                     <a:p>
                       <a:pPr algn="r"/>
@@ -4353,7 +4663,7 @@
                 </a:tc>
                 <a:tc>
                   <a:txBody>
-                    <a:bodyPr wrap="square"/>
+                    <a:bodyPr/>
                     <a:lstStyle/>
                     <a:p>
                       <a:r>
@@ -4366,7 +4676,7 @@
                 </a:tc>
                 <a:tc>
                   <a:txBody>
-                    <a:bodyPr wrap="square"/>
+                    <a:bodyPr/>
                     <a:lstStyle/>
                     <a:p>
                       <a:r>
@@ -4379,7 +4689,7 @@
                 </a:tc>
                 <a:tc>
                   <a:txBody>
-                    <a:bodyPr wrap="square"/>
+                    <a:bodyPr/>
                     <a:lstStyle/>
                     <a:p>
                       <a:r>
@@ -4392,7 +4702,7 @@
                 </a:tc>
                 <a:tc>
                   <a:txBody>
-                    <a:bodyPr wrap="square"/>
+                    <a:bodyPr/>
                     <a:lstStyle/>
                     <a:p>
                       <a:r>
@@ -4403,11 +4713,16 @@
                   </a:txBody>
                   <a:tcPr marL="54864" marR="54864" marT="27432" marB="27432"/>
                 </a:tc>
+                <a:extLst>
+                  <a:ext uri="{0D108BD9-81ED-4DB2-BD59-A6C34878D82A}">
+                    <a16:rowId xmlns:a16="http://schemas.microsoft.com/office/drawing/2014/main" val="10004"/>
+                  </a:ext>
+                </a:extLst>
               </a:tr>
               <a:tr h="268478">
                 <a:tc>
                   <a:txBody>
-                    <a:bodyPr wrap="square"/>
+                    <a:bodyPr/>
                     <a:lstStyle/>
                     <a:p>
                       <a:pPr algn="r"/>
@@ -4421,7 +4736,7 @@
                 </a:tc>
                 <a:tc>
                   <a:txBody>
-                    <a:bodyPr wrap="square"/>
+                    <a:bodyPr/>
                     <a:lstStyle/>
                     <a:p>
                       <a:r>
@@ -4434,7 +4749,7 @@
                 </a:tc>
                 <a:tc>
                   <a:txBody>
-                    <a:bodyPr wrap="square"/>
+                    <a:bodyPr/>
                     <a:lstStyle/>
                     <a:p>
                       <a:r>
@@ -4447,7 +4762,7 @@
                 </a:tc>
                 <a:tc>
                   <a:txBody>
-                    <a:bodyPr wrap="square"/>
+                    <a:bodyPr/>
                     <a:lstStyle/>
                     <a:p>
                       <a:r>
@@ -4460,7 +4775,7 @@
                 </a:tc>
                 <a:tc>
                   <a:txBody>
-                    <a:bodyPr wrap="square"/>
+                    <a:bodyPr/>
                     <a:lstStyle/>
                     <a:p>
                       <a:r>
@@ -4471,11 +4786,16 @@
                   </a:txBody>
                   <a:tcPr marL="54864" marR="54864" marT="27432" marB="27432"/>
                 </a:tc>
+                <a:extLst>
+                  <a:ext uri="{0D108BD9-81ED-4DB2-BD59-A6C34878D82A}">
+                    <a16:rowId xmlns:a16="http://schemas.microsoft.com/office/drawing/2014/main" val="10005"/>
+                  </a:ext>
+                </a:extLst>
               </a:tr>
               <a:tr h="268478">
                 <a:tc>
                   <a:txBody>
-                    <a:bodyPr wrap="square"/>
+                    <a:bodyPr/>
                     <a:lstStyle/>
                     <a:p>
                       <a:pPr algn="r"/>
@@ -4489,7 +4809,7 @@
                 </a:tc>
                 <a:tc>
                   <a:txBody>
-                    <a:bodyPr wrap="square"/>
+                    <a:bodyPr/>
                     <a:lstStyle/>
                     <a:p>
                       <a:r>
@@ -4502,7 +4822,7 @@
                 </a:tc>
                 <a:tc>
                   <a:txBody>
-                    <a:bodyPr wrap="square"/>
+                    <a:bodyPr/>
                     <a:lstStyle/>
                     <a:p>
                       <a:r>
@@ -4515,7 +4835,7 @@
                 </a:tc>
                 <a:tc>
                   <a:txBody>
-                    <a:bodyPr wrap="square"/>
+                    <a:bodyPr/>
                     <a:lstStyle/>
                     <a:p>
                       <a:r>
@@ -4528,7 +4848,7 @@
                 </a:tc>
                 <a:tc>
                   <a:txBody>
-                    <a:bodyPr wrap="square"/>
+                    <a:bodyPr/>
                     <a:lstStyle/>
                     <a:p>
                       <a:r>
@@ -4539,11 +4859,16 @@
                   </a:txBody>
                   <a:tcPr marL="54864" marR="54864" marT="27432" marB="27432"/>
                 </a:tc>
+                <a:extLst>
+                  <a:ext uri="{0D108BD9-81ED-4DB2-BD59-A6C34878D82A}">
+                    <a16:rowId xmlns:a16="http://schemas.microsoft.com/office/drawing/2014/main" val="10006"/>
+                  </a:ext>
+                </a:extLst>
               </a:tr>
               <a:tr h="268478">
                 <a:tc>
                   <a:txBody>
-                    <a:bodyPr wrap="square"/>
+                    <a:bodyPr/>
                     <a:lstStyle/>
                     <a:p>
                       <a:pPr algn="r"/>
@@ -4557,7 +4882,7 @@
                 </a:tc>
                 <a:tc>
                   <a:txBody>
-                    <a:bodyPr wrap="square"/>
+                    <a:bodyPr/>
                     <a:lstStyle/>
                     <a:p>
                       <a:r>
@@ -4570,7 +4895,7 @@
                 </a:tc>
                 <a:tc>
                   <a:txBody>
-                    <a:bodyPr wrap="square"/>
+                    <a:bodyPr/>
                     <a:lstStyle/>
                     <a:p>
                       <a:r>
@@ -4583,7 +4908,7 @@
                 </a:tc>
                 <a:tc>
                   <a:txBody>
-                    <a:bodyPr wrap="square"/>
+                    <a:bodyPr/>
                     <a:lstStyle/>
                     <a:p>
                       <a:r>
@@ -4596,7 +4921,7 @@
                 </a:tc>
                 <a:tc>
                   <a:txBody>
-                    <a:bodyPr wrap="square"/>
+                    <a:bodyPr/>
                     <a:lstStyle/>
                     <a:p>
                       <a:r>
@@ -4607,11 +4932,16 @@
                   </a:txBody>
                   <a:tcPr marL="54864" marR="54864" marT="27432" marB="27432"/>
                 </a:tc>
+                <a:extLst>
+                  <a:ext uri="{0D108BD9-81ED-4DB2-BD59-A6C34878D82A}">
+                    <a16:rowId xmlns:a16="http://schemas.microsoft.com/office/drawing/2014/main" val="10007"/>
+                  </a:ext>
+                </a:extLst>
               </a:tr>
               <a:tr h="268478">
                 <a:tc>
                   <a:txBody>
-                    <a:bodyPr wrap="square"/>
+                    <a:bodyPr/>
                     <a:lstStyle/>
                     <a:p>
                       <a:pPr algn="r"/>
@@ -4625,7 +4955,7 @@
                 </a:tc>
                 <a:tc>
                   <a:txBody>
-                    <a:bodyPr wrap="square"/>
+                    <a:bodyPr/>
                     <a:lstStyle/>
                     <a:p>
                       <a:r>
@@ -4638,7 +4968,7 @@
                 </a:tc>
                 <a:tc>
                   <a:txBody>
-                    <a:bodyPr wrap="square"/>
+                    <a:bodyPr/>
                     <a:lstStyle/>
                     <a:p>
                       <a:r>
@@ -4651,7 +4981,7 @@
                 </a:tc>
                 <a:tc>
                   <a:txBody>
-                    <a:bodyPr wrap="square"/>
+                    <a:bodyPr/>
                     <a:lstStyle/>
                     <a:p>
                       <a:r>
@@ -4668,22 +4998,27 @@
                 </a:tc>
                 <a:tc>
                   <a:txBody>
-                    <a:bodyPr wrap="square"/>
+                    <a:bodyPr/>
                     <a:lstStyle/>
                     <a:p>
                       <a:r>
                         <a:rPr sz="1000"/>
-                        <a:t>온라인 과제 — 프로젝트 대상지 확정</a:t>
-                      </a:r>
-                    </a:p>
-                  </a:txBody>
-                  <a:tcPr marL="54864" marR="54864" marT="27432" marB="27432"/>
-                </a:tc>
+                        <a:t>HW3 — 무당이 GTFS·승하차 조사</a:t>
+                      </a:r>
+                    </a:p>
+                  </a:txBody>
+                  <a:tcPr marL="54864" marR="54864" marT="27432" marB="27432"/>
+                </a:tc>
+                <a:extLst>
+                  <a:ext uri="{0D108BD9-81ED-4DB2-BD59-A6C34878D82A}">
+                    <a16:rowId xmlns:a16="http://schemas.microsoft.com/office/drawing/2014/main" val="10008"/>
+                  </a:ext>
+                </a:extLst>
               </a:tr>
               <a:tr h="268478">
                 <a:tc>
                   <a:txBody>
-                    <a:bodyPr wrap="square"/>
+                    <a:bodyPr/>
                     <a:lstStyle/>
                     <a:p>
                       <a:pPr algn="r"/>
@@ -4697,7 +5032,7 @@
                 </a:tc>
                 <a:tc>
                   <a:txBody>
-                    <a:bodyPr wrap="square"/>
+                    <a:bodyPr/>
                     <a:lstStyle/>
                     <a:p>
                       <a:r>
@@ -4714,7 +5049,7 @@
                 </a:tc>
                 <a:tc>
                   <a:txBody>
-                    <a:bodyPr wrap="square"/>
+                    <a:bodyPr/>
                     <a:lstStyle/>
                     <a:p>
                       <a:r>
@@ -4727,7 +5062,7 @@
                 </a:tc>
                 <a:tc>
                   <a:txBody>
-                    <a:bodyPr wrap="square"/>
+                    <a:bodyPr/>
                     <a:lstStyle/>
                     <a:p>
                       <a:r>
@@ -4740,7 +5075,7 @@
                 </a:tc>
                 <a:tc>
                   <a:txBody>
-                    <a:bodyPr wrap="square"/>
+                    <a:bodyPr/>
                     <a:lstStyle/>
                     <a:p>
                       <a:r>
@@ -4751,11 +5086,16 @@
                   </a:txBody>
                   <a:tcPr marL="54864" marR="54864" marT="27432" marB="27432"/>
                 </a:tc>
+                <a:extLst>
+                  <a:ext uri="{0D108BD9-81ED-4DB2-BD59-A6C34878D82A}">
+                    <a16:rowId xmlns:a16="http://schemas.microsoft.com/office/drawing/2014/main" val="10009"/>
+                  </a:ext>
+                </a:extLst>
               </a:tr>
               <a:tr h="268478">
                 <a:tc>
                   <a:txBody>
-                    <a:bodyPr wrap="square"/>
+                    <a:bodyPr/>
                     <a:lstStyle/>
                     <a:p>
                       <a:pPr algn="r"/>
@@ -4769,7 +5109,7 @@
                 </a:tc>
                 <a:tc>
                   <a:txBody>
-                    <a:bodyPr wrap="square"/>
+                    <a:bodyPr/>
                     <a:lstStyle/>
                     <a:p>
                       <a:r>
@@ -4782,7 +5122,7 @@
                 </a:tc>
                 <a:tc>
                   <a:txBody>
-                    <a:bodyPr wrap="square"/>
+                    <a:bodyPr/>
                     <a:lstStyle/>
                     <a:p>
                       <a:r>
@@ -4795,7 +5135,7 @@
                 </a:tc>
                 <a:tc>
                   <a:txBody>
-                    <a:bodyPr wrap="square"/>
+                    <a:bodyPr/>
                     <a:lstStyle/>
                     <a:p>
                       <a:r>
@@ -4808,7 +5148,7 @@
                 </a:tc>
                 <a:tc>
                   <a:txBody>
-                    <a:bodyPr wrap="square"/>
+                    <a:bodyPr/>
                     <a:lstStyle/>
                     <a:p>
                       <a:r>
@@ -4819,11 +5159,16 @@
                   </a:txBody>
                   <a:tcPr marL="54864" marR="54864" marT="27432" marB="27432"/>
                 </a:tc>
+                <a:extLst>
+                  <a:ext uri="{0D108BD9-81ED-4DB2-BD59-A6C34878D82A}">
+                    <a16:rowId xmlns:a16="http://schemas.microsoft.com/office/drawing/2014/main" val="10010"/>
+                  </a:ext>
+                </a:extLst>
               </a:tr>
               <a:tr h="268478">
                 <a:tc>
                   <a:txBody>
-                    <a:bodyPr wrap="square"/>
+                    <a:bodyPr/>
                     <a:lstStyle/>
                     <a:p>
                       <a:pPr algn="r"/>
@@ -4837,7 +5182,7 @@
                 </a:tc>
                 <a:tc>
                   <a:txBody>
-                    <a:bodyPr wrap="square"/>
+                    <a:bodyPr/>
                     <a:lstStyle/>
                     <a:p>
                       <a:r>
@@ -4850,7 +5195,7 @@
                 </a:tc>
                 <a:tc>
                   <a:txBody>
-                    <a:bodyPr wrap="square"/>
+                    <a:bodyPr/>
                     <a:lstStyle/>
                     <a:p>
                       <a:r>
@@ -4863,7 +5208,7 @@
                 </a:tc>
                 <a:tc>
                   <a:txBody>
-                    <a:bodyPr wrap="square"/>
+                    <a:bodyPr/>
                     <a:lstStyle/>
                     <a:p>
                       <a:r>
@@ -4876,7 +5221,7 @@
                 </a:tc>
                 <a:tc>
                   <a:txBody>
-                    <a:bodyPr wrap="square"/>
+                    <a:bodyPr/>
                     <a:lstStyle/>
                     <a:p>
                       <a:r>
@@ -4887,11 +5232,16 @@
                   </a:txBody>
                   <a:tcPr marL="54864" marR="54864" marT="27432" marB="27432"/>
                 </a:tc>
+                <a:extLst>
+                  <a:ext uri="{0D108BD9-81ED-4DB2-BD59-A6C34878D82A}">
+                    <a16:rowId xmlns:a16="http://schemas.microsoft.com/office/drawing/2014/main" val="10011"/>
+                  </a:ext>
+                </a:extLst>
               </a:tr>
               <a:tr h="268478">
                 <a:tc>
                   <a:txBody>
-                    <a:bodyPr wrap="square"/>
+                    <a:bodyPr/>
                     <a:lstStyle/>
                     <a:p>
                       <a:pPr algn="r"/>
@@ -4905,7 +5255,7 @@
                 </a:tc>
                 <a:tc>
                   <a:txBody>
-                    <a:bodyPr wrap="square"/>
+                    <a:bodyPr/>
                     <a:lstStyle/>
                     <a:p>
                       <a:r>
@@ -4918,7 +5268,7 @@
                 </a:tc>
                 <a:tc>
                   <a:txBody>
-                    <a:bodyPr wrap="square"/>
+                    <a:bodyPr/>
                     <a:lstStyle/>
                     <a:p>
                       <a:r>
@@ -4931,30 +5281,35 @@
                 </a:tc>
                 <a:tc>
                   <a:txBody>
-                    <a:bodyPr wrap="square"/>
+                    <a:bodyPr/>
                     <a:lstStyle/>
                     <a:p>
                       <a:r>
                         <a:rPr sz="1000"/>
-                        <a:t>기말 프로젝트 발표</a:t>
-                      </a:r>
-                    </a:p>
-                  </a:txBody>
-                  <a:tcPr marL="54864" marR="54864" marT="27432" marB="27432"/>
-                </a:tc>
-                <a:tc>
-                  <a:txBody>
-                    <a:bodyPr wrap="square"/>
+                        <a:t>기말 프로젝트 마무리</a:t>
+                      </a:r>
+                    </a:p>
+                  </a:txBody>
+                  <a:tcPr marL="54864" marR="54864" marT="27432" marB="27432"/>
+                </a:tc>
+                <a:tc>
+                  <a:txBody>
+                    <a:bodyPr/>
                     <a:lstStyle/>
                     <a:p>
                       <a:r>
                         <a:rPr sz="1000"/>
-                        <a:t>개인 프로젝트 제출·발표</a:t>
-                      </a:r>
-                    </a:p>
-                  </a:txBody>
-                  <a:tcPr marL="54864" marR="54864" marT="27432" marB="27432"/>
-                </a:tc>
+                        <a:t>개인 보고서 제출</a:t>
+                      </a:r>
+                    </a:p>
+                  </a:txBody>
+                  <a:tcPr marL="54864" marR="54864" marT="27432" marB="27432"/>
+                </a:tc>
+                <a:extLst>
+                  <a:ext uri="{0D108BD9-81ED-4DB2-BD59-A6C34878D82A}">
+                    <a16:rowId xmlns:a16="http://schemas.microsoft.com/office/drawing/2014/main" val="10012"/>
+                  </a:ext>
+                </a:extLst>
               </a:tr>
             </a:tbl>
           </a:graphicData>
@@ -4968,8 +5323,8 @@
 </p:sld>
 </file>
 
-<file path=ppt/slides/slide6.xml><?xml version="1.0" encoding="utf-8"?>
-<p:sld xmlns:a="http://schemas.openxmlformats.org/drawingml/2006/main" xmlns:p="http://schemas.openxmlformats.org/presentationml/2006/main" xmlns:r="http://schemas.openxmlformats.org/officeDocument/2006/relationships">
+<file path=ppt/slides/slide5.xml><?xml version="1.0" encoding="utf-8"?>
+<p:sld xmlns:a="http://schemas.openxmlformats.org/drawingml/2006/main" xmlns:r="http://schemas.openxmlformats.org/officeDocument/2006/relationships" xmlns:p="http://schemas.openxmlformats.org/presentationml/2006/main">
   <p:cSld name="md:5#1|6f23aca92f">
     <p:spTree>
       <p:nvGrpSpPr>
@@ -4977,7 +5332,14 @@
         <p:cNvGrpSpPr/>
         <p:nvPr/>
       </p:nvGrpSpPr>
-      <p:grpSpPr/>
+      <p:grpSpPr>
+        <a:xfrm>
+          <a:off x="0" y="0"/>
+          <a:ext cx="0" cy="0"/>
+          <a:chOff x="0" y="0"/>
+          <a:chExt cx="0" cy="0"/>
+        </a:xfrm>
+      </p:grpSpPr>
       <p:sp>
         <p:nvSpPr>
           <p:cNvPr id="2" name="Title 1"/>
@@ -5014,34 +5376,332 @@
           <a:bodyPr/>
           <a:lstStyle/>
           <a:p>
-            <a:pPr/>
-            <a:r>
-              <a:t>화요일에 개념과 코드를 함께 보고, 수요일에 직접 짜고 돌립니다. 노트북을 매 시간 가져옵니다.</a:t>
-            </a:r>
-          </a:p>
-          <a:p>
-            <a:pPr/>
-            <a:r>
-              <a:t>LLM을 수업 중에도 씁니다. ChatGPT, Claude, Gemini 등의 구독을 권장합니다.</a:t>
-            </a:r>
+            <a:r>
+              <a:rPr dirty="0" err="1"/>
+              <a:t>화요일에</a:t>
+            </a:r>
+            <a:r>
+              <a:rPr dirty="0"/>
+              <a:t> </a:t>
+            </a:r>
+            <a:r>
+              <a:rPr dirty="0" err="1"/>
+              <a:t>개념과</a:t>
+            </a:r>
+            <a:r>
+              <a:rPr dirty="0"/>
+              <a:t> </a:t>
+            </a:r>
+            <a:r>
+              <a:rPr dirty="0" err="1"/>
+              <a:t>코드를</a:t>
+            </a:r>
+            <a:r>
+              <a:rPr dirty="0"/>
+              <a:t> </a:t>
+            </a:r>
+            <a:r>
+              <a:rPr dirty="0" err="1"/>
+              <a:t>함께</a:t>
+            </a:r>
+            <a:r>
+              <a:rPr dirty="0"/>
+              <a:t> </a:t>
+            </a:r>
+            <a:r>
+              <a:rPr dirty="0" err="1"/>
+              <a:t>보고</a:t>
+            </a:r>
+            <a:r>
+              <a:rPr dirty="0"/>
+              <a:t>, </a:t>
+            </a:r>
+            <a:r>
+              <a:rPr dirty="0" err="1"/>
+              <a:t>수요일에</a:t>
+            </a:r>
+            <a:r>
+              <a:rPr dirty="0"/>
+              <a:t> </a:t>
+            </a:r>
+            <a:r>
+              <a:rPr dirty="0" err="1"/>
+              <a:t>직접</a:t>
+            </a:r>
+            <a:r>
+              <a:rPr dirty="0"/>
+              <a:t> </a:t>
+            </a:r>
+            <a:r>
+              <a:rPr dirty="0" err="1"/>
+              <a:t>짜고</a:t>
+            </a:r>
+            <a:r>
+              <a:rPr dirty="0"/>
+              <a:t> </a:t>
+            </a:r>
+            <a:r>
+              <a:rPr dirty="0" err="1"/>
+              <a:t>돌립니다</a:t>
+            </a:r>
+            <a:r>
+              <a:rPr dirty="0"/>
+              <a:t>. </a:t>
+            </a:r>
+            <a:r>
+              <a:rPr dirty="0" err="1"/>
+              <a:t>노트북을</a:t>
+            </a:r>
+            <a:r>
+              <a:rPr dirty="0"/>
+              <a:t> </a:t>
+            </a:r>
+            <a:r>
+              <a:rPr dirty="0" err="1"/>
+              <a:t>매</a:t>
+            </a:r>
+            <a:r>
+              <a:rPr dirty="0"/>
+              <a:t> </a:t>
+            </a:r>
+            <a:r>
+              <a:rPr dirty="0" err="1"/>
+              <a:t>시간</a:t>
+            </a:r>
+            <a:r>
+              <a:rPr dirty="0"/>
+              <a:t> </a:t>
+            </a:r>
+            <a:r>
+              <a:rPr dirty="0" err="1"/>
+              <a:t>가져옵니다</a:t>
+            </a:r>
+            <a:r>
+              <a:rPr dirty="0"/>
+              <a:t>.</a:t>
+            </a:r>
+            <a:endParaRPr lang="en-US" dirty="0"/>
+          </a:p>
+          <a:p>
+            <a:endParaRPr dirty="0"/>
+          </a:p>
+          <a:p>
+            <a:r>
+              <a:rPr dirty="0" err="1"/>
+              <a:t>LLM을</a:t>
+            </a:r>
+            <a:r>
+              <a:rPr dirty="0"/>
+              <a:t> </a:t>
+            </a:r>
+            <a:r>
+              <a:rPr dirty="0" err="1"/>
+              <a:t>수업</a:t>
+            </a:r>
+            <a:r>
+              <a:rPr dirty="0"/>
+              <a:t> </a:t>
+            </a:r>
+            <a:r>
+              <a:rPr dirty="0" err="1"/>
+              <a:t>중에도</a:t>
+            </a:r>
+            <a:r>
+              <a:rPr dirty="0"/>
+              <a:t> </a:t>
+            </a:r>
+            <a:r>
+              <a:rPr dirty="0" err="1"/>
+              <a:t>씁니다</a:t>
+            </a:r>
+            <a:r>
+              <a:rPr dirty="0"/>
+              <a:t>. </a:t>
+            </a:r>
+            <a:r>
+              <a:rPr dirty="0" err="1"/>
+              <a:t>ChatGPT</a:t>
+            </a:r>
+            <a:r>
+              <a:rPr dirty="0"/>
+              <a:t>, Claude, Gemini </a:t>
+            </a:r>
+            <a:r>
+              <a:rPr dirty="0" err="1"/>
+              <a:t>등의</a:t>
+            </a:r>
+            <a:r>
+              <a:rPr dirty="0"/>
+              <a:t> </a:t>
+            </a:r>
+            <a:r>
+              <a:rPr dirty="0" err="1"/>
+              <a:t>구독을</a:t>
+            </a:r>
+            <a:r>
+              <a:rPr dirty="0"/>
+              <a:t> </a:t>
+            </a:r>
+            <a:r>
+              <a:rPr dirty="0" err="1"/>
+              <a:t>권장합니다</a:t>
+            </a:r>
+            <a:r>
+              <a:rPr dirty="0"/>
+              <a:t>.</a:t>
+            </a:r>
+            <a:endParaRPr lang="en-US" dirty="0"/>
+          </a:p>
+          <a:p>
+            <a:endParaRPr dirty="0"/>
           </a:p>
           <a:p>
             <a:pPr lvl="1"/>
             <a:r>
-              <a:t>나온 코드를 이해하고, 실행되지 않을 때 어디서 막혔는지 짚고 고칠 수 있어야 합니다. 중간시험 코딩테스트에서도 쓸 수 있습니다.</a:t>
-            </a:r>
-          </a:p>
-          <a:p>
-            <a:pPr/>
-            <a:r>
-              <a:t>"돌아간다"와 "맞다"는 다릅니다. 직접 짠 코드는 항상 기준과 대조합니다. 이 습관이 이 과목에서 가장 오래 남는 것입니다.</a:t>
-            </a:r>
-          </a:p>
-          <a:p>
-            <a:pPr/>
-            <a:r>
-              <a:t>8주차(10-20, 10-21)는 강릉세계총회 참석으로 휴강합니다. 온라인 과제로 대체하고, 필요하면 보강기간(11-24~11-25)을 씁니다.</a:t>
-            </a:r>
+              <a:rPr dirty="0" err="1"/>
+              <a:t>나온</a:t>
+            </a:r>
+            <a:r>
+              <a:rPr dirty="0"/>
+              <a:t> </a:t>
+            </a:r>
+            <a:r>
+              <a:rPr dirty="0" err="1"/>
+              <a:t>코드를</a:t>
+            </a:r>
+            <a:r>
+              <a:rPr dirty="0"/>
+              <a:t> </a:t>
+            </a:r>
+            <a:r>
+              <a:rPr dirty="0" err="1"/>
+              <a:t>이해하고</a:t>
+            </a:r>
+            <a:r>
+              <a:rPr dirty="0"/>
+              <a:t>, </a:t>
+            </a:r>
+            <a:r>
+              <a:rPr dirty="0" err="1"/>
+              <a:t>실행되지</a:t>
+            </a:r>
+            <a:r>
+              <a:rPr dirty="0"/>
+              <a:t> </a:t>
+            </a:r>
+            <a:r>
+              <a:rPr dirty="0" err="1"/>
+              <a:t>않을</a:t>
+            </a:r>
+            <a:r>
+              <a:rPr dirty="0"/>
+              <a:t> </a:t>
+            </a:r>
+            <a:r>
+              <a:rPr dirty="0" err="1"/>
+              <a:t>때</a:t>
+            </a:r>
+            <a:r>
+              <a:rPr dirty="0"/>
+              <a:t> </a:t>
+            </a:r>
+            <a:r>
+              <a:rPr dirty="0" err="1"/>
+              <a:t>어디서</a:t>
+            </a:r>
+            <a:r>
+              <a:rPr dirty="0"/>
+              <a:t> </a:t>
+            </a:r>
+            <a:r>
+              <a:rPr dirty="0" err="1"/>
+              <a:t>막혔는지</a:t>
+            </a:r>
+            <a:r>
+              <a:rPr dirty="0"/>
+              <a:t> </a:t>
+            </a:r>
+            <a:r>
+              <a:rPr dirty="0" err="1"/>
+              <a:t>짚고</a:t>
+            </a:r>
+            <a:r>
+              <a:rPr dirty="0"/>
+              <a:t> </a:t>
+            </a:r>
+            <a:r>
+              <a:rPr dirty="0" err="1"/>
+              <a:t>고칠</a:t>
+            </a:r>
+            <a:r>
+              <a:rPr dirty="0"/>
+              <a:t> </a:t>
+            </a:r>
+            <a:r>
+              <a:rPr dirty="0" err="1"/>
+              <a:t>수</a:t>
+            </a:r>
+            <a:r>
+              <a:rPr dirty="0"/>
+              <a:t> </a:t>
+            </a:r>
+            <a:r>
+              <a:rPr dirty="0" err="1"/>
+              <a:t>있어야</a:t>
+            </a:r>
+            <a:r>
+              <a:rPr dirty="0"/>
+              <a:t> </a:t>
+            </a:r>
+            <a:r>
+              <a:rPr dirty="0" err="1"/>
+              <a:t>합니다</a:t>
+            </a:r>
+            <a:r>
+              <a:rPr dirty="0"/>
+              <a:t>. </a:t>
+            </a:r>
+            <a:r>
+              <a:rPr dirty="0" err="1"/>
+              <a:t>중간시험</a:t>
+            </a:r>
+            <a:r>
+              <a:rPr dirty="0"/>
+              <a:t> </a:t>
+            </a:r>
+            <a:r>
+              <a:rPr dirty="0" err="1"/>
+              <a:t>코딩테스트에서도</a:t>
+            </a:r>
+            <a:r>
+              <a:rPr dirty="0"/>
+              <a:t> </a:t>
+            </a:r>
+            <a:r>
+              <a:rPr dirty="0" err="1"/>
+              <a:t>쓸</a:t>
+            </a:r>
+            <a:r>
+              <a:rPr dirty="0"/>
+              <a:t> </a:t>
+            </a:r>
+            <a:r>
+              <a:rPr dirty="0" err="1"/>
+              <a:t>수</a:t>
+            </a:r>
+            <a:r>
+              <a:rPr dirty="0"/>
+              <a:t> </a:t>
+            </a:r>
+            <a:r>
+              <a:rPr dirty="0" err="1"/>
+              <a:t>있습니다</a:t>
+            </a:r>
+            <a:r>
+              <a:rPr dirty="0"/>
+              <a:t>.</a:t>
+            </a:r>
+            <a:endParaRPr lang="en-US" dirty="0"/>
           </a:p>
         </p:txBody>
       </p:sp>
@@ -5093,7 +5753,7 @@
           <a:p>
             <a:fld id="{C1FF6DA9-008F-8B48-92A6-B652298478BF}" type="slidenum">
               <a:rPr lang="en-US" smtClean="0"/>
-              <a:t>‹#›</a:t>
+              <a:t>5</a:t>
             </a:fld>
             <a:endParaRPr lang="en-US"/>
           </a:p>
@@ -5107,8 +5767,8 @@
 </p:sld>
 </file>
 
-<file path=ppt/slides/slide7.xml><?xml version="1.0" encoding="utf-8"?>
-<p:sld xmlns:a="http://schemas.openxmlformats.org/drawingml/2006/main" xmlns:p="http://schemas.openxmlformats.org/presentationml/2006/main" xmlns:r="http://schemas.openxmlformats.org/officeDocument/2006/relationships">
+<file path=ppt/slides/slide6.xml><?xml version="1.0" encoding="utf-8"?>
+<p:sld xmlns:a="http://schemas.openxmlformats.org/drawingml/2006/main" xmlns:r="http://schemas.openxmlformats.org/officeDocument/2006/relationships" xmlns:p="http://schemas.openxmlformats.org/presentationml/2006/main">
   <p:cSld name="md:6#1|29927a16ee">
     <p:spTree>
       <p:nvGrpSpPr>
@@ -5116,7 +5776,14 @@
         <p:cNvGrpSpPr/>
         <p:nvPr/>
       </p:nvGrpSpPr>
-      <p:grpSpPr/>
+      <p:grpSpPr>
+        <a:xfrm>
+          <a:off x="0" y="0"/>
+          <a:ext cx="0" cy="0"/>
+          <a:chOff x="0" y="0"/>
+          <a:chExt cx="0" cy="0"/>
+        </a:xfrm>
+      </p:grpSpPr>
       <p:sp>
         <p:nvSpPr>
           <p:cNvPr id="2" name="Title 1"/>
@@ -5186,7 +5853,7 @@
           <a:p>
             <a:fld id="{C1FF6DA9-008F-8B48-92A6-B652298478BF}" type="slidenum">
               <a:rPr lang="en-US" smtClean="0"/>
-              <a:t>‹#›</a:t>
+              <a:t>6</a:t>
             </a:fld>
             <a:endParaRPr lang="en-US"/>
           </a:p>
@@ -5211,14 +5878,32 @@
                 <a:tableStyleId>{5940675A-B579-460E-94D1-54222C63F5DA}</a:tableStyleId>
               </a:tblPr>
               <a:tblGrid>
-                <a:gridCol w="2476523"/>
-                <a:gridCol w="1141547"/>
-                <a:gridCol w="7476343"/>
+                <a:gridCol w="2476523">
+                  <a:extLst>
+                    <a:ext uri="{9D8B030D-6E8A-4147-A177-3AD203B41FA5}">
+                      <a16:colId xmlns:a16="http://schemas.microsoft.com/office/drawing/2014/main" val="20000"/>
+                    </a:ext>
+                  </a:extLst>
+                </a:gridCol>
+                <a:gridCol w="1141547">
+                  <a:extLst>
+                    <a:ext uri="{9D8B030D-6E8A-4147-A177-3AD203B41FA5}">
+                      <a16:colId xmlns:a16="http://schemas.microsoft.com/office/drawing/2014/main" val="20001"/>
+                    </a:ext>
+                  </a:extLst>
+                </a:gridCol>
+                <a:gridCol w="7476343">
+                  <a:extLst>
+                    <a:ext uri="{9D8B030D-6E8A-4147-A177-3AD203B41FA5}">
+                      <a16:colId xmlns:a16="http://schemas.microsoft.com/office/drawing/2014/main" val="20002"/>
+                    </a:ext>
+                  </a:extLst>
+                </a:gridCol>
               </a:tblGrid>
               <a:tr h="331978">
                 <a:tc>
                   <a:txBody>
-                    <a:bodyPr wrap="square"/>
+                    <a:bodyPr/>
                     <a:lstStyle/>
                     <a:p>
                       <a:pPr algn="ctr"/>
@@ -5236,7 +5921,7 @@
                 </a:tc>
                 <a:tc>
                   <a:txBody>
-                    <a:bodyPr wrap="square"/>
+                    <a:bodyPr/>
                     <a:lstStyle/>
                     <a:p>
                       <a:pPr algn="ctr"/>
@@ -5254,7 +5939,7 @@
                 </a:tc>
                 <a:tc>
                   <a:txBody>
-                    <a:bodyPr wrap="square"/>
+                    <a:bodyPr/>
                     <a:lstStyle/>
                     <a:p>
                       <a:pPr algn="ctr"/>
@@ -5270,11 +5955,16 @@
                     </a:solidFill>
                   </a:tcPr>
                 </a:tc>
+                <a:extLst>
+                  <a:ext uri="{0D108BD9-81ED-4DB2-BD59-A6C34878D82A}">
+                    <a16:rowId xmlns:a16="http://schemas.microsoft.com/office/drawing/2014/main" val="10000"/>
+                  </a:ext>
+                </a:extLst>
               </a:tr>
               <a:tr h="331978">
                 <a:tc>
                   <a:txBody>
-                    <a:bodyPr wrap="square"/>
+                    <a:bodyPr/>
                     <a:lstStyle/>
                     <a:p>
                       <a:r>
@@ -5287,7 +5977,7 @@
                 </a:tc>
                 <a:tc>
                   <a:txBody>
-                    <a:bodyPr wrap="square"/>
+                    <a:bodyPr/>
                     <a:lstStyle/>
                     <a:p>
                       <a:pPr algn="r"/>
@@ -5301,7 +5991,7 @@
                 </a:tc>
                 <a:tc>
                   <a:txBody>
-                    <a:bodyPr wrap="square"/>
+                    <a:bodyPr/>
                     <a:lstStyle/>
                     <a:p>
                       <a:r>
@@ -5312,11 +6002,16 @@
                   </a:txBody>
                   <a:tcPr marL="54864" marR="54864" marT="27432" marB="27432"/>
                 </a:tc>
+                <a:extLst>
+                  <a:ext uri="{0D108BD9-81ED-4DB2-BD59-A6C34878D82A}">
+                    <a16:rowId xmlns:a16="http://schemas.microsoft.com/office/drawing/2014/main" val="10001"/>
+                  </a:ext>
+                </a:extLst>
               </a:tr>
               <a:tr h="331978">
                 <a:tc>
                   <a:txBody>
-                    <a:bodyPr wrap="square"/>
+                    <a:bodyPr/>
                     <a:lstStyle/>
                     <a:p>
                       <a:r>
@@ -5329,7 +6024,7 @@
                 </a:tc>
                 <a:tc>
                   <a:txBody>
-                    <a:bodyPr wrap="square"/>
+                    <a:bodyPr/>
                     <a:lstStyle/>
                     <a:p>
                       <a:pPr algn="r"/>
@@ -5343,22 +6038,27 @@
                 </a:tc>
                 <a:tc>
                   <a:txBody>
-                    <a:bodyPr wrap="square"/>
+                    <a:bodyPr/>
                     <a:lstStyle/>
                     <a:p>
                       <a:r>
                         <a:rPr sz="1400"/>
-                        <a:t>내가 사는 동네의 대중교통 시뮬레이션</a:t>
-                      </a:r>
-                    </a:p>
-                  </a:txBody>
-                  <a:tcPr marL="54864" marR="54864" marT="27432" marB="27432"/>
-                </a:tc>
+                        <a:t>take-home 시험 · 무당이 시뮬레이션과 개선 분석 보고서</a:t>
+                      </a:r>
+                    </a:p>
+                  </a:txBody>
+                  <a:tcPr marL="54864" marR="54864" marT="27432" marB="27432"/>
+                </a:tc>
+                <a:extLst>
+                  <a:ext uri="{0D108BD9-81ED-4DB2-BD59-A6C34878D82A}">
+                    <a16:rowId xmlns:a16="http://schemas.microsoft.com/office/drawing/2014/main" val="10002"/>
+                  </a:ext>
+                </a:extLst>
               </a:tr>
               <a:tr h="331978">
                 <a:tc>
                   <a:txBody>
-                    <a:bodyPr wrap="square"/>
+                    <a:bodyPr/>
                     <a:lstStyle/>
                     <a:p>
                       <a:r>
@@ -5371,7 +6071,7 @@
                 </a:tc>
                 <a:tc>
                   <a:txBody>
-                    <a:bodyPr wrap="square"/>
+                    <a:bodyPr/>
                     <a:lstStyle/>
                     <a:p>
                       <a:pPr algn="r"/>
@@ -5385,7 +6085,7 @@
                 </a:tc>
                 <a:tc>
                   <a:txBody>
-                    <a:bodyPr wrap="square"/>
+                    <a:bodyPr/>
                     <a:lstStyle/>
                     <a:p>
                       <a:r>
@@ -5396,11 +6096,16 @@
                   </a:txBody>
                   <a:tcPr marL="54864" marR="54864" marT="27432" marB="27432"/>
                 </a:tc>
+                <a:extLst>
+                  <a:ext uri="{0D108BD9-81ED-4DB2-BD59-A6C34878D82A}">
+                    <a16:rowId xmlns:a16="http://schemas.microsoft.com/office/drawing/2014/main" val="10003"/>
+                  </a:ext>
+                </a:extLst>
               </a:tr>
               <a:tr h="331978">
                 <a:tc>
                   <a:txBody>
-                    <a:bodyPr wrap="square"/>
+                    <a:bodyPr/>
                     <a:lstStyle/>
                     <a:p>
                       <a:r>
@@ -5413,7 +6118,7 @@
                 </a:tc>
                 <a:tc>
                   <a:txBody>
-                    <a:bodyPr wrap="square"/>
+                    <a:bodyPr/>
                     <a:lstStyle/>
                     <a:p>
                       <a:pPr algn="r"/>
@@ -5427,7 +6132,7 @@
                 </a:tc>
                 <a:tc>
                   <a:txBody>
-                    <a:bodyPr wrap="square"/>
+                    <a:bodyPr/>
                     <a:lstStyle/>
                     <a:p>
                       <a:r>
@@ -5438,6 +6143,11 @@
                   </a:txBody>
                   <a:tcPr marL="54864" marR="54864" marT="27432" marB="27432"/>
                 </a:tc>
+                <a:extLst>
+                  <a:ext uri="{0D108BD9-81ED-4DB2-BD59-A6C34878D82A}">
+                    <a16:rowId xmlns:a16="http://schemas.microsoft.com/office/drawing/2014/main" val="10004"/>
+                  </a:ext>
+                </a:extLst>
               </a:tr>
             </a:tbl>
           </a:graphicData>
@@ -5452,7 +6162,7 @@
         <p:spPr>
           <a:xfrm>
             <a:off x="548640" y="3442970"/>
-            <a:ext cx="11094415" cy="2683510"/>
+            <a:ext cx="11094415" cy="646331"/>
           </a:xfrm>
           <a:prstGeom prst="rect">
             <a:avLst/>
@@ -5476,10 +6186,226 @@
               <a:buChar char="•"/>
             </a:pPr>
             <a:r>
+              <a:rPr sz="1800" dirty="0" err="1"/>
+              <a:t>중간시험은</a:t>
+            </a:r>
+            <a:r>
+              <a:rPr sz="1800" dirty="0"/>
+              <a:t> </a:t>
+            </a:r>
+            <a:r>
+              <a:rPr sz="1800" dirty="0" err="1"/>
+              <a:t>단답형</a:t>
+            </a:r>
+            <a:r>
+              <a:rPr sz="1800" dirty="0"/>
+              <a:t>(closed-book, 40%)</a:t>
+            </a:r>
+            <a:r>
+              <a:rPr sz="1800" dirty="0" err="1"/>
+              <a:t>과</a:t>
+            </a:r>
+            <a:r>
+              <a:rPr sz="1800" dirty="0"/>
+              <a:t> </a:t>
+            </a:r>
+            <a:r>
+              <a:rPr sz="1800" dirty="0" err="1"/>
+              <a:t>코딩테스트</a:t>
+            </a:r>
+            <a:r>
+              <a:rPr sz="1800" dirty="0"/>
+              <a:t>(open-book, 60%)</a:t>
+            </a:r>
+            <a:r>
+              <a:rPr sz="1800" dirty="0" err="1"/>
+              <a:t>입니다</a:t>
+            </a:r>
+            <a:r>
+              <a:rPr sz="1800" dirty="0"/>
+              <a:t>. </a:t>
+            </a:r>
+            <a:r>
+              <a:rPr sz="1800" dirty="0" err="1"/>
+              <a:t>코딩테스트는</a:t>
+            </a:r>
+            <a:r>
+              <a:rPr sz="1800" dirty="0"/>
+              <a:t> </a:t>
+            </a:r>
+            <a:r>
+              <a:rPr sz="1800" dirty="0" err="1"/>
+              <a:t>사이버캠퍼스로</a:t>
+            </a:r>
+            <a:r>
+              <a:rPr sz="1800" dirty="0"/>
+              <a:t> </a:t>
+            </a:r>
+            <a:r>
+              <a:rPr sz="1800" dirty="0" err="1"/>
+              <a:t>출제하고</a:t>
+            </a:r>
+            <a:r>
+              <a:rPr sz="1800" dirty="0"/>
+              <a:t>, </a:t>
+            </a:r>
+            <a:r>
+              <a:rPr sz="1800" dirty="0" err="1"/>
+              <a:t>LLM을</a:t>
+            </a:r>
+            <a:r>
+              <a:rPr sz="1800" dirty="0"/>
+              <a:t> </a:t>
+            </a:r>
+            <a:r>
+              <a:rPr sz="1800" dirty="0" err="1"/>
+              <a:t>쓸</a:t>
+            </a:r>
+            <a:r>
+              <a:rPr sz="1800" dirty="0"/>
+              <a:t> </a:t>
+            </a:r>
+            <a:r>
+              <a:rPr sz="1800" dirty="0" err="1"/>
+              <a:t>수</a:t>
+            </a:r>
+            <a:r>
+              <a:rPr sz="1800" dirty="0"/>
+              <a:t> </a:t>
+            </a:r>
+            <a:r>
+              <a:rPr sz="1800" dirty="0" err="1"/>
+              <a:t>있습니다</a:t>
+            </a:r>
+            <a:r>
               <a:rPr sz="1800"/>
-              <a:t>중간시험은 단답형(closed-book, 40%)과 코딩테스트(open-book, 60%)입니다. 코딩테스트는 사이버캠퍼스로 출제하고, LLM을 쓸 수 있습니다.</a:t>
-            </a:r>
-          </a:p>
+              <a:t>.</a:t>
+            </a:r>
+            <a:endParaRPr sz="1800" dirty="0"/>
+          </a:p>
+        </p:txBody>
+      </p:sp>
+    </p:spTree>
+  </p:cSld>
+  <p:clrMapOvr>
+    <a:masterClrMapping/>
+  </p:clrMapOvr>
+</p:sld>
+</file>
+
+<file path=ppt/slides/slide7.xml><?xml version="1.0" encoding="utf-8"?>
+<p:sld xmlns:a="http://schemas.openxmlformats.org/drawingml/2006/main" xmlns:r="http://schemas.openxmlformats.org/officeDocument/2006/relationships" xmlns:p="http://schemas.openxmlformats.org/presentationml/2006/main">
+  <p:cSld name="md:7#1|bf456bdccc">
+    <p:spTree>
+      <p:nvGrpSpPr>
+        <p:cNvPr id="1" name=""/>
+        <p:cNvGrpSpPr/>
+        <p:nvPr/>
+      </p:nvGrpSpPr>
+      <p:grpSpPr>
+        <a:xfrm>
+          <a:off x="0" y="0"/>
+          <a:ext cx="0" cy="0"/>
+          <a:chOff x="0" y="0"/>
+          <a:chExt cx="0" cy="0"/>
+        </a:xfrm>
+      </p:grpSpPr>
+      <p:sp>
+        <p:nvSpPr>
+          <p:cNvPr id="2" name="Title 1"/>
+          <p:cNvSpPr>
+            <a:spLocks noGrp="1"/>
+          </p:cNvSpPr>
+          <p:nvPr>
+            <p:ph type="title"/>
+          </p:nvPr>
+        </p:nvSpPr>
+        <p:spPr/>
+        <p:txBody>
+          <a:bodyPr/>
+          <a:lstStyle/>
+          <a:p>
+            <a:r>
+              <a:t>7. 기말 개인 프로젝트 — 가천대 교내셔틀 무당이</a:t>
+            </a:r>
+          </a:p>
+        </p:txBody>
+      </p:sp>
+      <p:sp>
+        <p:nvSpPr>
+          <p:cNvPr id="100" name="Footer Placeholder 3"/>
+          <p:cNvSpPr>
+            <a:spLocks noGrp="1"/>
+          </p:cNvSpPr>
+          <p:nvPr>
+            <p:ph type="ftr" sz="quarter" idx="11"/>
+          </p:nvPr>
+        </p:nvSpPr>
+        <p:spPr>
+          <a:xfrm>
+            <a:off x="548640" y="6355080"/>
+            <a:ext cx="8229600" cy="320040"/>
+          </a:xfrm>
+        </p:spPr>
+        <p:txBody>
+          <a:bodyPr/>
+          <a:lstStyle/>
+          <a:p>
+            <a:r>
+              <a:t>스마트 교통물류 2026-2 · 오리엔테이션</a:t>
+            </a:r>
+          </a:p>
+        </p:txBody>
+      </p:sp>
+      <p:sp>
+        <p:nvSpPr>
+          <p:cNvPr id="101" name="Slide Number Placeholder 4"/>
+          <p:cNvSpPr>
+            <a:spLocks noGrp="1"/>
+          </p:cNvSpPr>
+          <p:nvPr>
+            <p:ph type="sldNum" sz="quarter" idx="12"/>
+          </p:nvPr>
+        </p:nvSpPr>
+        <p:spPr>
+          <a:xfrm>
+            <a:off x="10545775" y="6355080"/>
+            <a:ext cx="1097280" cy="320040"/>
+          </a:xfrm>
+        </p:spPr>
+        <p:txBody>
+          <a:bodyPr/>
+          <a:lstStyle/>
+          <a:p>
+            <a:fld id="{C1FF6DA9-008F-8B48-92A6-B652298478BF}" type="slidenum">
+              <a:rPr lang="en-US" smtClean="0"/>
+              <a:t>7</a:t>
+            </a:fld>
+            <a:endParaRPr lang="en-US"/>
+          </a:p>
+        </p:txBody>
+      </p:sp>
+      <p:sp>
+        <p:nvSpPr>
+          <p:cNvPr id="102" name="Text"/>
+          <p:cNvSpPr txBox="1"/>
+          <p:nvPr/>
+        </p:nvSpPr>
+        <p:spPr>
+          <a:xfrm>
+            <a:off x="548640" y="1600200"/>
+            <a:ext cx="11094415" cy="2200000"/>
+          </a:xfrm>
+          <a:prstGeom prst="rect">
+            <a:avLst/>
+          </a:prstGeom>
+          <a:noFill/>
+        </p:spPr>
+        <p:txBody>
+          <a:bodyPr wrap="square" anchor="t">
+            <a:spAutoFit/>
+          </a:bodyPr>
+          <a:lstStyle/>
           <a:p>
             <a:pPr marL="256032" indent="-256032">
               <a:spcBef>
@@ -5492,126 +6418,10 @@
               <a:buChar char="•"/>
             </a:pPr>
             <a:r>
-              <a:rPr sz="1800"/>
-              <a:t>코딩테스트는 외운 것을 묻지 않습니다. 주어진 데이터에서 답을 뽑아내는 과정을 봅니다.</a:t>
-            </a:r>
-          </a:p>
-        </p:txBody>
-      </p:sp>
-    </p:spTree>
-  </p:cSld>
-  <p:clrMapOvr>
-    <a:masterClrMapping/>
-  </p:clrMapOvr>
-</p:sld>
-</file>
-
-<file path=ppt/slides/slide8.xml><?xml version="1.0" encoding="utf-8"?>
-<p:sld xmlns:a="http://schemas.openxmlformats.org/drawingml/2006/main" xmlns:p="http://schemas.openxmlformats.org/presentationml/2006/main" xmlns:r="http://schemas.openxmlformats.org/officeDocument/2006/relationships">
-  <p:cSld name="md:7#1|bf456bdccc">
-    <p:spTree>
-      <p:nvGrpSpPr>
-        <p:cNvPr id="1" name=""/>
-        <p:cNvGrpSpPr/>
-        <p:nvPr/>
-      </p:nvGrpSpPr>
-      <p:grpSpPr/>
-      <p:sp>
-        <p:nvSpPr>
-          <p:cNvPr id="2" name="Title 1"/>
-          <p:cNvSpPr>
-            <a:spLocks noGrp="1"/>
-          </p:cNvSpPr>
-          <p:nvPr>
-            <p:ph type="title"/>
-          </p:nvPr>
-        </p:nvSpPr>
-        <p:spPr/>
-        <p:txBody>
-          <a:bodyPr/>
-          <a:lstStyle/>
-          <a:p>
-            <a:r>
-              <a:t>7. 기말 개인 프로젝트 — 내가 사는 동네의 대중교통</a:t>
-            </a:r>
-          </a:p>
-        </p:txBody>
-      </p:sp>
-      <p:sp>
-        <p:nvSpPr>
-          <p:cNvPr id="100" name="Footer Placeholder 3"/>
-          <p:cNvSpPr>
-            <a:spLocks noGrp="1"/>
-          </p:cNvSpPr>
-          <p:nvPr>
-            <p:ph type="ftr" sz="quarter" idx="11"/>
-          </p:nvPr>
-        </p:nvSpPr>
-        <p:spPr>
-          <a:xfrm>
-            <a:off x="548640" y="6355080"/>
-            <a:ext cx="8229600" cy="320040"/>
-          </a:xfrm>
-        </p:spPr>
-        <p:txBody>
-          <a:bodyPr/>
-          <a:lstStyle/>
-          <a:p>
-            <a:r>
-              <a:t>스마트 교통물류 2026-2 · 오리엔테이션</a:t>
-            </a:r>
-          </a:p>
-        </p:txBody>
-      </p:sp>
-      <p:sp>
-        <p:nvSpPr>
-          <p:cNvPr id="101" name="Slide Number Placeholder 4"/>
-          <p:cNvSpPr>
-            <a:spLocks noGrp="1"/>
-          </p:cNvSpPr>
-          <p:nvPr>
-            <p:ph type="sldNum" sz="quarter" idx="12"/>
-          </p:nvPr>
-        </p:nvSpPr>
-        <p:spPr>
-          <a:xfrm>
-            <a:off x="10545775" y="6355080"/>
-            <a:ext cx="1097280" cy="320040"/>
-          </a:xfrm>
-        </p:spPr>
-        <p:txBody>
-          <a:bodyPr/>
-          <a:lstStyle/>
-          <a:p>
-            <a:fld id="{C1FF6DA9-008F-8B48-92A6-B652298478BF}" type="slidenum">
-              <a:rPr lang="en-US" smtClean="0"/>
-              <a:t>‹#›</a:t>
-            </a:fld>
-            <a:endParaRPr lang="en-US"/>
-          </a:p>
-        </p:txBody>
-      </p:sp>
-      <p:sp>
-        <p:nvSpPr>
-          <p:cNvPr id="102" name="Text"/>
-          <p:cNvSpPr txBox="1"/>
-          <p:nvPr/>
-        </p:nvSpPr>
-        <p:spPr>
-          <a:xfrm>
-            <a:off x="548640" y="1600200"/>
-            <a:ext cx="11094415" cy="1334770"/>
-          </a:xfrm>
-          <a:prstGeom prst="rect">
-            <a:avLst/>
-          </a:prstGeom>
-          <a:noFill/>
-        </p:spPr>
-        <p:txBody>
-          <a:bodyPr wrap="square" anchor="t">
-            <a:spAutoFit/>
-          </a:bodyPr>
-          <a:lstStyle/>
+              <a:rPr sz="1800" dirty="0"/>
+              <a:t>가천대 교내셔틀 무당이를 시뮬레이션하고, 개선 시나리오의 효과를 숫자로 제시합니다. take-home 시험이라 6주차에 시작해 12주차에 보고서를 제출하고, 발표는 하지 않습니다.</a:t>
+            </a:r>
+          </a:p>
           <a:p>
             <a:pPr marL="256032" indent="-256032">
               <a:spcBef>
@@ -5624,8 +6434,8 @@
               <a:buChar char="•"/>
             </a:pPr>
             <a:r>
-              <a:rPr sz="1800"/>
-              <a:t>각자 사는 동네를 골라 대중교통을 시뮬레이션하고, 개선 시나리오 하나의 효과를 숫자로 제시합니다. 6주차에 시작해 12주차에 발표합니다.</a:t>
+              <a:rPr sz="1800" dirty="0"/>
+              <a:t>무당이는 GTFS도 승하차 기록도 없습니다. 시간표를 GTFS로 직접 옮기고 승하차를 직접 조사합니다. 현황 재현부터 시나리오 분석까지 전 과정을 각자 수행합니다.</a:t>
             </a:r>
           </a:p>
           <a:p>
@@ -5640,8 +6450,8 @@
               <a:buChar char="•"/>
             </a:pPr>
             <a:r>
-              <a:rPr sz="1800"/>
-              <a:t>평가 100점: 데이터 준비 20 · 경로 탐색 정확도 20 · 시나리오 설계 20 · 지표 해석 25 · 발표와 재현성 15</a:t>
+              <a:rPr sz="1800" dirty="0"/>
+              <a:t>평가 100점 — 데이터 준비 20 · 경로 탐색 정확도 20 · 시나리오 설계 20 · 지표 해석 25 · 보고서 완성도와 재현성 15.</a:t>
             </a:r>
           </a:p>
         </p:txBody>
@@ -5655,7 +6465,7 @@
           <p:nvPr/>
         </p:nvGraphicFramePr>
         <p:xfrm>
-          <a:off x="548640" y="3026410"/>
+          <a:off x="548640" y="3900000"/>
           <a:ext cx="11094414" cy="1991868"/>
         </p:xfrm>
         <a:graphic>
@@ -5665,13 +6475,25 @@
                 <a:tableStyleId>{5940675A-B579-460E-94D1-54222C63F5DA}</a:tableStyleId>
               </a:tblPr>
               <a:tblGrid>
-                <a:gridCol w="1717693"/>
-                <a:gridCol w="9376721"/>
+                <a:gridCol w="1717693">
+                  <a:extLst>
+                    <a:ext uri="{9D8B030D-6E8A-4147-A177-3AD203B41FA5}">
+                      <a16:colId xmlns:a16="http://schemas.microsoft.com/office/drawing/2014/main" val="20000"/>
+                    </a:ext>
+                  </a:extLst>
+                </a:gridCol>
+                <a:gridCol w="9376721">
+                  <a:extLst>
+                    <a:ext uri="{9D8B030D-6E8A-4147-A177-3AD203B41FA5}">
+                      <a16:colId xmlns:a16="http://schemas.microsoft.com/office/drawing/2014/main" val="20001"/>
+                    </a:ext>
+                  </a:extLst>
+                </a:gridCol>
               </a:tblGrid>
               <a:tr h="331978">
                 <a:tc>
                   <a:txBody>
-                    <a:bodyPr wrap="square"/>
+                    <a:bodyPr/>
                     <a:lstStyle/>
                     <a:p>
                       <a:pPr algn="ctr"/>
@@ -5689,7 +6511,7 @@
                 </a:tc>
                 <a:tc>
                   <a:txBody>
-                    <a:bodyPr wrap="square"/>
+                    <a:bodyPr/>
                     <a:lstStyle/>
                     <a:p>
                       <a:pPr algn="ctr"/>
@@ -5705,11 +6527,16 @@
                     </a:solidFill>
                   </a:tcPr>
                 </a:tc>
+                <a:extLst>
+                  <a:ext uri="{0D108BD9-81ED-4DB2-BD59-A6C34878D82A}">
+                    <a16:rowId xmlns:a16="http://schemas.microsoft.com/office/drawing/2014/main" val="10000"/>
+                  </a:ext>
+                </a:extLst>
               </a:tr>
               <a:tr h="331978">
                 <a:tc>
                   <a:txBody>
-                    <a:bodyPr wrap="square"/>
+                    <a:bodyPr/>
                     <a:lstStyle/>
                     <a:p>
                       <a:r>
@@ -5722,22 +6549,27 @@
                 </a:tc>
                 <a:tc>
                   <a:txBody>
-                    <a:bodyPr wrap="square"/>
+                    <a:bodyPr/>
                     <a:lstStyle/>
                     <a:p>
                       <a:r>
                         <a:rPr sz="1400"/>
-                        <a:t>대상지 선정, 경계 GeoJSON</a:t>
-                      </a:r>
-                    </a:p>
-                  </a:txBody>
-                  <a:tcPr marL="54864" marR="54864" marT="27432" marB="27432"/>
-                </a:tc>
+                        <a:t>개선 시나리오 선정</a:t>
+                      </a:r>
+                    </a:p>
+                  </a:txBody>
+                  <a:tcPr marL="54864" marR="54864" marT="27432" marB="27432"/>
+                </a:tc>
+                <a:extLst>
+                  <a:ext uri="{0D108BD9-81ED-4DB2-BD59-A6C34878D82A}">
+                    <a16:rowId xmlns:a16="http://schemas.microsoft.com/office/drawing/2014/main" val="10001"/>
+                  </a:ext>
+                </a:extLst>
               </a:tr>
               <a:tr h="331978">
                 <a:tc>
                   <a:txBody>
-                    <a:bodyPr wrap="square"/>
+                    <a:bodyPr/>
                     <a:lstStyle/>
                     <a:p>
                       <a:r>
@@ -5750,30 +6582,27 @@
                 </a:tc>
                 <a:tc>
                   <a:txBody>
-                    <a:bodyPr wrap="square"/>
+                    <a:bodyPr/>
                     <a:lstStyle/>
                     <a:p>
                       <a:r>
                         <a:rPr sz="1400"/>
-                        <a:t>필터링한 GTFS, 정류장·노선 수, </a:t>
-                      </a:r>
-                      <a:r>
-                        <a:rPr sz="1400"/>
-                        <a:t>route_type</a:t>
-                      </a:r>
-                      <a:r>
-                        <a:rPr sz="1400"/>
-                        <a:t> 분포표</a:t>
-                      </a:r>
-                    </a:p>
-                  </a:txBody>
-                  <a:tcPr marL="54864" marR="54864" marT="27432" marB="27432"/>
-                </a:tc>
+                        <a:t>무당이 GTFS와 승하차 조사표</a:t>
+                      </a:r>
+                    </a:p>
+                  </a:txBody>
+                  <a:tcPr marL="54864" marR="54864" marT="27432" marB="27432"/>
+                </a:tc>
+                <a:extLst>
+                  <a:ext uri="{0D108BD9-81ED-4DB2-BD59-A6C34878D82A}">
+                    <a16:rowId xmlns:a16="http://schemas.microsoft.com/office/drawing/2014/main" val="10002"/>
+                  </a:ext>
+                </a:extLst>
               </a:tr>
               <a:tr h="331978">
                 <a:tc>
                   <a:txBody>
-                    <a:bodyPr wrap="square"/>
+                    <a:bodyPr/>
                     <a:lstStyle/>
                     <a:p>
                       <a:r>
@@ -5786,22 +6615,27 @@
                 </a:tc>
                 <a:tc>
                   <a:txBody>
-                    <a:bodyPr wrap="square"/>
+                    <a:bodyPr/>
                     <a:lstStyle/>
                     <a:p>
                       <a:r>
                         <a:rPr sz="1400"/>
-                        <a:t>수요 데이터와 시간대별 프로파일</a:t>
-                      </a:r>
-                    </a:p>
-                  </a:txBody>
-                  <a:tcPr marL="54864" marR="54864" marT="27432" marB="27432"/>
-                </a:tc>
+                        <a:t>수요 프로파일과 현황 재현</a:t>
+                      </a:r>
+                    </a:p>
+                  </a:txBody>
+                  <a:tcPr marL="54864" marR="54864" marT="27432" marB="27432"/>
+                </a:tc>
+                <a:extLst>
+                  <a:ext uri="{0D108BD9-81ED-4DB2-BD59-A6C34878D82A}">
+                    <a16:rowId xmlns:a16="http://schemas.microsoft.com/office/drawing/2014/main" val="10003"/>
+                  </a:ext>
+                </a:extLst>
               </a:tr>
               <a:tr h="331978">
                 <a:tc>
                   <a:txBody>
-                    <a:bodyPr wrap="square"/>
+                    <a:bodyPr/>
                     <a:lstStyle/>
                     <a:p>
                       <a:r>
@@ -5814,22 +6648,27 @@
                 </a:tc>
                 <a:tc>
                   <a:txBody>
-                    <a:bodyPr wrap="square"/>
+                    <a:bodyPr/>
                     <a:lstStyle/>
                     <a:p>
                       <a:r>
                         <a:rPr sz="1400"/>
-                        <a:t>자기 RAPTOR로 O-D 100건 질의, 실제 엔진과 대조표</a:t>
-                      </a:r>
-                    </a:p>
-                  </a:txBody>
-                  <a:tcPr marL="54864" marR="54864" marT="27432" marB="27432"/>
-                </a:tc>
+                        <a:t>O-D 100건을 실제 엔진과 대조</a:t>
+                      </a:r>
+                    </a:p>
+                  </a:txBody>
+                  <a:tcPr marL="54864" marR="54864" marT="27432" marB="27432"/>
+                </a:tc>
+                <a:extLst>
+                  <a:ext uri="{0D108BD9-81ED-4DB2-BD59-A6C34878D82A}">
+                    <a16:rowId xmlns:a16="http://schemas.microsoft.com/office/drawing/2014/main" val="10004"/>
+                  </a:ext>
+                </a:extLst>
               </a:tr>
               <a:tr h="331978">
                 <a:tc>
                   <a:txBody>
-                    <a:bodyPr wrap="square"/>
+                    <a:bodyPr/>
                     <a:lstStyle/>
                     <a:p>
                       <a:r>
@@ -5842,17 +6681,22 @@
                 </a:tc>
                 <a:tc>
                   <a:txBody>
-                    <a:bodyPr wrap="square"/>
+                    <a:bodyPr/>
                     <a:lstStyle/>
                     <a:p>
                       <a:r>
                         <a:rPr sz="1400"/>
-                        <a:t>개선 시나리오 1개(배차간격 단축 / 노선 신설 / 정류장 이설)의 before-after, 발표</a:t>
-                      </a:r>
-                    </a:p>
-                  </a:txBody>
-                  <a:tcPr marL="54864" marR="54864" marT="27432" marB="27432"/>
-                </a:tc>
+                        <a:t>시나리오 before-after와 개선 분석 보고서</a:t>
+                      </a:r>
+                    </a:p>
+                  </a:txBody>
+                  <a:tcPr marL="54864" marR="54864" marT="27432" marB="27432"/>
+                </a:tc>
+                <a:extLst>
+                  <a:ext uri="{0D108BD9-81ED-4DB2-BD59-A6C34878D82A}">
+                    <a16:rowId xmlns:a16="http://schemas.microsoft.com/office/drawing/2014/main" val="10005"/>
+                  </a:ext>
+                </a:extLst>
               </a:tr>
             </a:tbl>
           </a:graphicData>
@@ -5866,8 +6710,8 @@
 </p:sld>
 </file>
 
-<file path=ppt/slides/slide9.xml><?xml version="1.0" encoding="utf-8"?>
-<p:sld xmlns:a="http://schemas.openxmlformats.org/drawingml/2006/main" xmlns:p="http://schemas.openxmlformats.org/presentationml/2006/main" xmlns:r="http://schemas.openxmlformats.org/officeDocument/2006/relationships">
+<file path=ppt/slides/slide8.xml><?xml version="1.0" encoding="utf-8"?>
+<p:sld xmlns:a="http://schemas.openxmlformats.org/drawingml/2006/main" xmlns:r="http://schemas.openxmlformats.org/officeDocument/2006/relationships" xmlns:p="http://schemas.openxmlformats.org/presentationml/2006/main">
   <p:cSld name="md:8#1|eecfd1af87">
     <p:spTree>
       <p:nvGrpSpPr>
@@ -5875,7 +6719,14 @@
         <p:cNvGrpSpPr/>
         <p:nvPr/>
       </p:nvGrpSpPr>
-      <p:grpSpPr/>
+      <p:grpSpPr>
+        <a:xfrm>
+          <a:off x="0" y="0"/>
+          <a:ext cx="0" cy="0"/>
+          <a:chOff x="0" y="0"/>
+          <a:chExt cx="0" cy="0"/>
+        </a:xfrm>
+      </p:grpSpPr>
       <p:sp>
         <p:nvSpPr>
           <p:cNvPr id="2" name="Title 1"/>
@@ -5945,7 +6796,7 @@
           <a:p>
             <a:fld id="{C1FF6DA9-008F-8B48-92A6-B652298478BF}" type="slidenum">
               <a:rPr lang="en-US" smtClean="0"/>
-              <a:t>‹#›</a:t>
+              <a:t>8</a:t>
             </a:fld>
             <a:endParaRPr lang="en-US"/>
           </a:p>
@@ -5970,14 +6821,32 @@
                 <a:tableStyleId>{5940675A-B579-460E-94D1-54222C63F5DA}</a:tableStyleId>
               </a:tblPr>
               <a:tblGrid>
-                <a:gridCol w="1974124"/>
-                <a:gridCol w="2321029"/>
-                <a:gridCol w="6799261"/>
+                <a:gridCol w="1974124">
+                  <a:extLst>
+                    <a:ext uri="{9D8B030D-6E8A-4147-A177-3AD203B41FA5}">
+                      <a16:colId xmlns:a16="http://schemas.microsoft.com/office/drawing/2014/main" val="20000"/>
+                    </a:ext>
+                  </a:extLst>
+                </a:gridCol>
+                <a:gridCol w="2321029">
+                  <a:extLst>
+                    <a:ext uri="{9D8B030D-6E8A-4147-A177-3AD203B41FA5}">
+                      <a16:colId xmlns:a16="http://schemas.microsoft.com/office/drawing/2014/main" val="20001"/>
+                    </a:ext>
+                  </a:extLst>
+                </a:gridCol>
+                <a:gridCol w="6799261">
+                  <a:extLst>
+                    <a:ext uri="{9D8B030D-6E8A-4147-A177-3AD203B41FA5}">
+                      <a16:colId xmlns:a16="http://schemas.microsoft.com/office/drawing/2014/main" val="20002"/>
+                    </a:ext>
+                  </a:extLst>
+                </a:gridCol>
               </a:tblGrid>
               <a:tr h="331978">
                 <a:tc>
                   <a:txBody>
-                    <a:bodyPr wrap="square"/>
+                    <a:bodyPr/>
                     <a:lstStyle/>
                     <a:p>
                       <a:pPr algn="ctr"/>
@@ -5995,7 +6864,7 @@
                 </a:tc>
                 <a:tc>
                   <a:txBody>
-                    <a:bodyPr wrap="square"/>
+                    <a:bodyPr/>
                     <a:lstStyle/>
                     <a:p>
                       <a:pPr algn="ctr"/>
@@ -6013,7 +6882,7 @@
                 </a:tc>
                 <a:tc>
                   <a:txBody>
-                    <a:bodyPr wrap="square"/>
+                    <a:bodyPr/>
                     <a:lstStyle/>
                     <a:p>
                       <a:pPr algn="ctr"/>
@@ -6029,11 +6898,16 @@
                     </a:solidFill>
                   </a:tcPr>
                 </a:tc>
+                <a:extLst>
+                  <a:ext uri="{0D108BD9-81ED-4DB2-BD59-A6C34878D82A}">
+                    <a16:rowId xmlns:a16="http://schemas.microsoft.com/office/drawing/2014/main" val="10000"/>
+                  </a:ext>
+                </a:extLst>
               </a:tr>
               <a:tr h="331978">
                 <a:tc>
                   <a:txBody>
-                    <a:bodyPr wrap="square"/>
+                    <a:bodyPr/>
                     <a:lstStyle/>
                     <a:p>
                       <a:r>
@@ -6046,7 +6920,7 @@
                 </a:tc>
                 <a:tc>
                   <a:txBody>
-                    <a:bodyPr wrap="square"/>
+                    <a:bodyPr/>
                     <a:lstStyle/>
                     <a:p>
                       <a:r>
@@ -6059,7 +6933,7 @@
                 </a:tc>
                 <a:tc>
                   <a:txBody>
-                    <a:bodyPr wrap="square"/>
+                    <a:bodyPr/>
                     <a:lstStyle/>
                     <a:p>
                       <a:r>
@@ -6070,11 +6944,16 @@
                   </a:txBody>
                   <a:tcPr marL="54864" marR="54864" marT="27432" marB="27432"/>
                 </a:tc>
+                <a:extLst>
+                  <a:ext uri="{0D108BD9-81ED-4DB2-BD59-A6C34878D82A}">
+                    <a16:rowId xmlns:a16="http://schemas.microsoft.com/office/drawing/2014/main" val="10001"/>
+                  </a:ext>
+                </a:extLst>
               </a:tr>
               <a:tr h="331978">
                 <a:tc>
                   <a:txBody>
-                    <a:bodyPr wrap="square"/>
+                    <a:bodyPr/>
                     <a:lstStyle/>
                     <a:p>
                       <a:r>
@@ -6087,7 +6966,7 @@
                 </a:tc>
                 <a:tc>
                   <a:txBody>
-                    <a:bodyPr wrap="square"/>
+                    <a:bodyPr/>
                     <a:lstStyle/>
                     <a:p>
                       <a:r>
@@ -6100,7 +6979,7 @@
                 </a:tc>
                 <a:tc>
                   <a:txBody>
-                    <a:bodyPr wrap="square"/>
+                    <a:bodyPr/>
                     <a:lstStyle/>
                     <a:p>
                       <a:r>
@@ -6111,11 +6990,16 @@
                   </a:txBody>
                   <a:tcPr marL="54864" marR="54864" marT="27432" marB="27432"/>
                 </a:tc>
+                <a:extLst>
+                  <a:ext uri="{0D108BD9-81ED-4DB2-BD59-A6C34878D82A}">
+                    <a16:rowId xmlns:a16="http://schemas.microsoft.com/office/drawing/2014/main" val="10002"/>
+                  </a:ext>
+                </a:extLst>
               </a:tr>
               <a:tr h="331978">
                 <a:tc>
                   <a:txBody>
-                    <a:bodyPr wrap="square"/>
+                    <a:bodyPr/>
                     <a:lstStyle/>
                     <a:p>
                       <a:r>
@@ -6128,7 +7012,7 @@
                 </a:tc>
                 <a:tc>
                   <a:txBody>
-                    <a:bodyPr wrap="square"/>
+                    <a:bodyPr/>
                     <a:lstStyle/>
                     <a:p>
                       <a:r>
@@ -6141,22 +7025,27 @@
                 </a:tc>
                 <a:tc>
                   <a:txBody>
-                    <a:bodyPr wrap="square"/>
+                    <a:bodyPr/>
                     <a:lstStyle/>
                     <a:p>
                       <a:r>
                         <a:rPr sz="1400"/>
-                        <a:t>프로젝트 대상지 GTFS 필터링 결과 (8주차 휴강 대체)</a:t>
-                      </a:r>
-                    </a:p>
-                  </a:txBody>
-                  <a:tcPr marL="54864" marR="54864" marT="27432" marB="27432"/>
-                </a:tc>
+                        <a:t>무당이 GTFS 작성·검증과 승하차 조사표 (개인 제출, 8주차 휴강 대체)</a:t>
+                      </a:r>
+                    </a:p>
+                  </a:txBody>
+                  <a:tcPr marL="54864" marR="54864" marT="27432" marB="27432"/>
+                </a:tc>
+                <a:extLst>
+                  <a:ext uri="{0D108BD9-81ED-4DB2-BD59-A6C34878D82A}">
+                    <a16:rowId xmlns:a16="http://schemas.microsoft.com/office/drawing/2014/main" val="10003"/>
+                  </a:ext>
+                </a:extLst>
               </a:tr>
               <a:tr h="331978">
                 <a:tc>
                   <a:txBody>
-                    <a:bodyPr wrap="square"/>
+                    <a:bodyPr/>
                     <a:lstStyle/>
                     <a:p>
                       <a:r>
@@ -6169,7 +7058,7 @@
                 </a:tc>
                 <a:tc>
                   <a:txBody>
-                    <a:bodyPr wrap="square"/>
+                    <a:bodyPr/>
                     <a:lstStyle/>
                     <a:p>
                       <a:r>
@@ -6182,17 +7071,22 @@
                 </a:tc>
                 <a:tc>
                   <a:txBody>
-                    <a:bodyPr wrap="square"/>
+                    <a:bodyPr/>
                     <a:lstStyle/>
                     <a:p>
                       <a:r>
                         <a:rPr sz="1400"/>
-                        <a:t>내가 사는 동네의 대중교통 시뮬레이션 (개인)</a:t>
-                      </a:r>
-                    </a:p>
-                  </a:txBody>
-                  <a:tcPr marL="54864" marR="54864" marT="27432" marB="27432"/>
-                </a:tc>
+                        <a:t>무당이 시뮬레이션과 개선 분석 보고서 (개인)</a:t>
+                      </a:r>
+                    </a:p>
+                  </a:txBody>
+                  <a:tcPr marL="54864" marR="54864" marT="27432" marB="27432"/>
+                </a:tc>
+                <a:extLst>
+                  <a:ext uri="{0D108BD9-81ED-4DB2-BD59-A6C34878D82A}">
+                    <a16:rowId xmlns:a16="http://schemas.microsoft.com/office/drawing/2014/main" val="10004"/>
+                  </a:ext>
+                </a:extLst>
               </a:tr>
             </a:tbl>
           </a:graphicData>
@@ -6233,6 +7127,293 @@
             <a:r>
               <a:rPr sz="1800"/>
               <a:t>과제는 모두 "돌아가는 코드"가 아니라 "기준과 대조한 결과"를 냅니다. 무엇과 비교했고 어디가 달랐는지를 씁니다.</a:t>
+            </a:r>
+          </a:p>
+        </p:txBody>
+      </p:sp>
+    </p:spTree>
+  </p:cSld>
+  <p:clrMapOvr>
+    <a:masterClrMapping/>
+  </p:clrMapOvr>
+</p:sld>
+</file>
+
+<file path=ppt/slides/slide9.xml><?xml version="1.0" encoding="utf-8"?>
+<p:sld xmlns:a="http://schemas.openxmlformats.org/drawingml/2006/main" xmlns:r="http://schemas.openxmlformats.org/officeDocument/2006/relationships" xmlns:p="http://schemas.openxmlformats.org/presentationml/2006/main">
+  <p:cSld name="md:9#1|580dad1d0c">
+    <p:spTree>
+      <p:nvGrpSpPr>
+        <p:cNvPr id="1" name=""/>
+        <p:cNvGrpSpPr/>
+        <p:nvPr/>
+      </p:nvGrpSpPr>
+      <p:grpSpPr>
+        <a:xfrm>
+          <a:off x="0" y="0"/>
+          <a:ext cx="0" cy="0"/>
+          <a:chOff x="0" y="0"/>
+          <a:chExt cx="0" cy="0"/>
+        </a:xfrm>
+      </p:grpSpPr>
+      <p:sp>
+        <p:nvSpPr>
+          <p:cNvPr id="2" name="Title 1"/>
+          <p:cNvSpPr>
+            <a:spLocks noGrp="1"/>
+          </p:cNvSpPr>
+          <p:nvPr>
+            <p:ph type="title"/>
+          </p:nvPr>
+        </p:nvSpPr>
+        <p:spPr/>
+        <p:txBody>
+          <a:bodyPr/>
+          <a:lstStyle/>
+          <a:p>
+            <a:r>
+              <a:t>9. 실습 환경 — 설치</a:t>
+            </a:r>
+          </a:p>
+        </p:txBody>
+      </p:sp>
+      <p:sp>
+        <p:nvSpPr>
+          <p:cNvPr id="100" name="Footer Placeholder 3"/>
+          <p:cNvSpPr>
+            <a:spLocks noGrp="1"/>
+          </p:cNvSpPr>
+          <p:nvPr>
+            <p:ph type="ftr" sz="quarter" idx="11"/>
+          </p:nvPr>
+        </p:nvSpPr>
+        <p:spPr>
+          <a:xfrm>
+            <a:off x="548640" y="6355080"/>
+            <a:ext cx="8229600" cy="320040"/>
+          </a:xfrm>
+        </p:spPr>
+        <p:txBody>
+          <a:bodyPr/>
+          <a:lstStyle/>
+          <a:p>
+            <a:r>
+              <a:t>스마트 교통물류 2026-2 · 오리엔테이션</a:t>
+            </a:r>
+          </a:p>
+        </p:txBody>
+      </p:sp>
+      <p:sp>
+        <p:nvSpPr>
+          <p:cNvPr id="101" name="Slide Number Placeholder 4"/>
+          <p:cNvSpPr>
+            <a:spLocks noGrp="1"/>
+          </p:cNvSpPr>
+          <p:nvPr>
+            <p:ph type="sldNum" sz="quarter" idx="12"/>
+          </p:nvPr>
+        </p:nvSpPr>
+        <p:spPr>
+          <a:xfrm>
+            <a:off x="10545775" y="6355080"/>
+            <a:ext cx="1097280" cy="320040"/>
+          </a:xfrm>
+        </p:spPr>
+        <p:txBody>
+          <a:bodyPr/>
+          <a:lstStyle/>
+          <a:p>
+            <a:fld id="{C1FF6DA9-008F-8B48-92A6-B652298478BF}" type="slidenum">
+              <a:rPr lang="en-US" smtClean="0"/>
+              <a:t>9</a:t>
+            </a:fld>
+            <a:endParaRPr lang="en-US"/>
+          </a:p>
+        </p:txBody>
+      </p:sp>
+      <p:sp>
+        <p:nvSpPr>
+          <p:cNvPr id="102" name="Text"/>
+          <p:cNvSpPr txBox="1"/>
+          <p:nvPr/>
+        </p:nvSpPr>
+        <p:spPr>
+          <a:xfrm>
+            <a:off x="548640" y="1600200"/>
+            <a:ext cx="11094415" cy="661670"/>
+          </a:xfrm>
+          <a:prstGeom prst="rect">
+            <a:avLst/>
+          </a:prstGeom>
+          <a:noFill/>
+        </p:spPr>
+        <p:txBody>
+          <a:bodyPr wrap="square" anchor="t">
+            <a:spAutoFit/>
+          </a:bodyPr>
+          <a:lstStyle/>
+          <a:p>
+            <a:pPr marL="256032" indent="-256032">
+              <a:spcBef>
+                <a:spcPts val="800"/>
+              </a:spcBef>
+              <a:buClr>
+                <a:schemeClr val="accent1"/>
+              </a:buClr>
+              <a:buFont typeface="Arial"/>
+              <a:buChar char="•"/>
+            </a:pPr>
+            <a:r>
+              <a:rPr sz="1800"/>
+              <a:t>Python 3.11을 씁니다. 교재 저장소를 받고 의존성을 설치하면 끝납니다.</a:t>
+            </a:r>
+          </a:p>
+        </p:txBody>
+      </p:sp>
+      <p:sp>
+        <p:nvSpPr>
+          <p:cNvPr id="103" name="Code"/>
+          <p:cNvSpPr/>
+          <p:nvPr/>
+        </p:nvSpPr>
+        <p:spPr>
+          <a:xfrm>
+            <a:off x="548640" y="2353310"/>
+            <a:ext cx="11094415" cy="937259"/>
+          </a:xfrm>
+          <a:prstGeom prst="rect">
+            <a:avLst/>
+          </a:prstGeom>
+          <a:solidFill>
+            <a:srgbClr val="F3F4F6"/>
+          </a:solidFill>
+          <a:ln>
+            <a:noFill/>
+          </a:ln>
+          <a:effectLst/>
+        </p:spPr>
+        <p:style>
+          <a:lnRef idx="1">
+            <a:schemeClr val="accent1"/>
+          </a:lnRef>
+          <a:fillRef idx="3">
+            <a:schemeClr val="accent1"/>
+          </a:fillRef>
+          <a:effectRef idx="2">
+            <a:schemeClr val="accent1"/>
+          </a:effectRef>
+          <a:fontRef idx="minor">
+            <a:schemeClr val="lt1"/>
+          </a:fontRef>
+        </p:style>
+        <p:txBody>
+          <a:bodyPr wrap="square" lIns="182880" tIns="137160" rIns="182880" bIns="137160" rtlCol="0" anchor="t"/>
+          <a:lstStyle/>
+          <a:p>
+            <a:pPr algn="l"/>
+            <a:r>
+              <a:rPr sz="1200">
+                <a:solidFill>
+                  <a:srgbClr val="1F2937"/>
+                </a:solidFill>
+                <a:latin typeface="Consolas"/>
+              </a:rPr>
+              <a:t>git clone https://github.com/jihoyeo/mobility-simulation-book.git</a:t>
+            </a:r>
+          </a:p>
+          <a:p>
+            <a:pPr algn="l"/>
+            <a:r>
+              <a:rPr sz="1200">
+                <a:solidFill>
+                  <a:srgbClr val="1F2937"/>
+                </a:solidFill>
+                <a:latin typeface="Consolas"/>
+              </a:rPr>
+              <a:t>cd mobility-simulation-book</a:t>
+            </a:r>
+          </a:p>
+          <a:p>
+            <a:pPr algn="l"/>
+            <a:r>
+              <a:rPr sz="1200">
+                <a:solidFill>
+                  <a:srgbClr val="1F2937"/>
+                </a:solidFill>
+                <a:latin typeface="Consolas"/>
+              </a:rPr>
+              <a:t>pip install -r requirements.txt</a:t>
+            </a:r>
+          </a:p>
+        </p:txBody>
+      </p:sp>
+      <p:sp>
+        <p:nvSpPr>
+          <p:cNvPr id="104" name="Text"/>
+          <p:cNvSpPr txBox="1"/>
+          <p:nvPr/>
+        </p:nvSpPr>
+        <p:spPr>
+          <a:xfrm>
+            <a:off x="548640" y="3473450"/>
+            <a:ext cx="11094415" cy="2653030"/>
+          </a:xfrm>
+          <a:prstGeom prst="rect">
+            <a:avLst/>
+          </a:prstGeom>
+          <a:noFill/>
+        </p:spPr>
+        <p:txBody>
+          <a:bodyPr wrap="square" anchor="t">
+            <a:spAutoFit/>
+          </a:bodyPr>
+          <a:lstStyle/>
+          <a:p>
+            <a:pPr marL="256032" indent="-256032">
+              <a:spcBef>
+                <a:spcPts val="800"/>
+              </a:spcBef>
+              <a:buClr>
+                <a:schemeClr val="accent1"/>
+              </a:buClr>
+              <a:buFont typeface="Arial"/>
+              <a:buChar char="•"/>
+            </a:pPr>
+            <a:r>
+              <a:rPr sz="1800">
+                <a:latin typeface="Consolas"/>
+              </a:rPr>
+              <a:t>requirements.txt</a:t>
+            </a:r>
+            <a:r>
+              <a:rPr sz="1800"/>
+              <a:t>는 버전을 전부 고정해 두었습니다. 같은 버전이면 같은 그림이 나옵니다.</a:t>
+            </a:r>
+          </a:p>
+          <a:p>
+            <a:pPr marL="256032" indent="-256032">
+              <a:spcBef>
+                <a:spcPts val="800"/>
+              </a:spcBef>
+              <a:buClr>
+                <a:schemeClr val="accent1"/>
+              </a:buClr>
+              <a:buFont typeface="Arial"/>
+              <a:buChar char="•"/>
+            </a:pPr>
+            <a:r>
+              <a:rPr sz="1800"/>
+              <a:t>설치가 끝났는지는 </a:t>
+            </a:r>
+            <a:r>
+              <a:rPr sz="1800">
+                <a:latin typeface="Consolas"/>
+              </a:rPr>
+              <a:t>from smartmob import Dtumos</a:t>
+            </a:r>
+            <a:r>
+              <a:rPr sz="1800"/>
+              <a:t> 한 줄로 확인합니다.</a:t>
             </a:r>
           </a:p>
         </p:txBody>
@@ -6514,7 +7695,7 @@
 </file>
 
 <file path=ppt/theme/theme2.xml><?xml version="1.0" encoding="utf-8"?>
-<a:theme xmlns:a="http://schemas.openxmlformats.org/drawingml/2006/main" name="Office Theme">
+<a:theme xmlns:a="http://schemas.openxmlformats.org/drawingml/2006/main" name="Office 테마">
   <a:themeElements>
     <a:clrScheme name="Office">
       <a:dk1>
@@ -6524,44 +7705,44 @@
         <a:sysClr val="window" lastClr="FFFFFF"/>
       </a:lt1>
       <a:dk2>
-        <a:srgbClr val="1F497D"/>
+        <a:srgbClr val="0E2841"/>
       </a:dk2>
       <a:lt2>
-        <a:srgbClr val="EEECE1"/>
+        <a:srgbClr val="E8E8E8"/>
       </a:lt2>
       <a:accent1>
-        <a:srgbClr val="4F81BD"/>
+        <a:srgbClr val="156082"/>
       </a:accent1>
       <a:accent2>
-        <a:srgbClr val="C0504D"/>
+        <a:srgbClr val="E97132"/>
       </a:accent2>
       <a:accent3>
-        <a:srgbClr val="9BBB59"/>
+        <a:srgbClr val="196B24"/>
       </a:accent3>
       <a:accent4>
-        <a:srgbClr val="8064A2"/>
+        <a:srgbClr val="0F9ED5"/>
       </a:accent4>
       <a:accent5>
-        <a:srgbClr val="4BACC6"/>
+        <a:srgbClr val="A02B93"/>
       </a:accent5>
       <a:accent6>
-        <a:srgbClr val="F79646"/>
+        <a:srgbClr val="4EA72E"/>
       </a:accent6>
       <a:hlink>
-        <a:srgbClr val="0000FF"/>
+        <a:srgbClr val="467886"/>
       </a:hlink>
       <a:folHlink>
-        <a:srgbClr val="800080"/>
+        <a:srgbClr val="96607D"/>
       </a:folHlink>
     </a:clrScheme>
     <a:fontScheme name="Office">
       <a:majorFont>
-        <a:latin typeface="Calibri"/>
+        <a:latin typeface="맑은 고딕" panose="02110004020202020204"/>
         <a:ea typeface=""/>
         <a:cs typeface=""/>
-        <a:font script="Jpan" typeface="ＭＳ Ｐゴシック"/>
+        <a:font script="Jpan" typeface="游ゴシック Light"/>
         <a:font script="Hang" typeface="맑은 고딕"/>
-        <a:font script="Hans" typeface="宋体"/>
+        <a:font script="Hans" typeface="等线 Light"/>
         <a:font script="Hant" typeface="新細明體"/>
         <a:font script="Arab" typeface="Times New Roman"/>
         <a:font script="Hebr" typeface="Times New Roman"/>
@@ -6589,14 +7770,31 @@
         <a:font script="Viet" typeface="Times New Roman"/>
         <a:font script="Uigh" typeface="Microsoft Uighur"/>
         <a:font script="Geor" typeface="Sylfaen"/>
+        <a:font script="Armn" typeface="Arial"/>
+        <a:font script="Bugi" typeface="Leelawadee UI"/>
+        <a:font script="Bopo" typeface="Microsoft JhengHei"/>
+        <a:font script="Java" typeface="Javanese Text"/>
+        <a:font script="Lisu" typeface="Segoe UI"/>
+        <a:font script="Mymr" typeface="Myanmar Text"/>
+        <a:font script="Nkoo" typeface="Ebrima"/>
+        <a:font script="Olck" typeface="Nirmala UI"/>
+        <a:font script="Osma" typeface="Ebrima"/>
+        <a:font script="Phag" typeface="Phagspa"/>
+        <a:font script="Syrn" typeface="Estrangelo Edessa"/>
+        <a:font script="Syrj" typeface="Estrangelo Edessa"/>
+        <a:font script="Syre" typeface="Estrangelo Edessa"/>
+        <a:font script="Sora" typeface="Nirmala UI"/>
+        <a:font script="Tale" typeface="Microsoft Tai Le"/>
+        <a:font script="Talu" typeface="Microsoft New Tai Lue"/>
+        <a:font script="Tfng" typeface="Ebrima"/>
       </a:majorFont>
       <a:minorFont>
-        <a:latin typeface="Calibri"/>
+        <a:latin typeface="맑은 고딕" panose="02110004020202020204"/>
         <a:ea typeface=""/>
         <a:cs typeface=""/>
-        <a:font script="Jpan" typeface="ＭＳ Ｐゴシック"/>
+        <a:font script="Jpan" typeface="游ゴシック"/>
         <a:font script="Hang" typeface="맑은 고딕"/>
-        <a:font script="Hans" typeface="宋体"/>
+        <a:font script="Hans" typeface="等线"/>
         <a:font script="Hant" typeface="新細明體"/>
         <a:font script="Arab" typeface="Arial"/>
         <a:font script="Hebr" typeface="Arial"/>
@@ -6624,6 +7822,23 @@
         <a:font script="Viet" typeface="Arial"/>
         <a:font script="Uigh" typeface="Microsoft Uighur"/>
         <a:font script="Geor" typeface="Sylfaen"/>
+        <a:font script="Armn" typeface="Arial"/>
+        <a:font script="Bugi" typeface="Leelawadee UI"/>
+        <a:font script="Bopo" typeface="Microsoft JhengHei"/>
+        <a:font script="Java" typeface="Javanese Text"/>
+        <a:font script="Lisu" typeface="Segoe UI"/>
+        <a:font script="Mymr" typeface="Myanmar Text"/>
+        <a:font script="Nkoo" typeface="Ebrima"/>
+        <a:font script="Olck" typeface="Nirmala UI"/>
+        <a:font script="Osma" typeface="Ebrima"/>
+        <a:font script="Phag" typeface="Phagspa"/>
+        <a:font script="Syrn" typeface="Estrangelo Edessa"/>
+        <a:font script="Syrj" typeface="Estrangelo Edessa"/>
+        <a:font script="Syre" typeface="Estrangelo Edessa"/>
+        <a:font script="Sora" typeface="Nirmala UI"/>
+        <a:font script="Tale" typeface="Microsoft Tai Le"/>
+        <a:font script="Talu" typeface="Microsoft New Tai Lue"/>
+        <a:font script="Tfng" typeface="Ebrima"/>
       </a:minorFont>
     </a:fontScheme>
     <a:fmtScheme name="Office">
@@ -6635,180 +7850,136 @@
           <a:gsLst>
             <a:gs pos="0">
               <a:schemeClr val="phClr">
-                <a:tint val="50000"/>
-                <a:satMod val="300000"/>
+                <a:lumMod val="110000"/>
+                <a:satMod val="105000"/>
+                <a:tint val="67000"/>
               </a:schemeClr>
             </a:gs>
-            <a:gs pos="35000">
+            <a:gs pos="50000">
               <a:schemeClr val="phClr">
-                <a:tint val="37000"/>
-                <a:satMod val="300000"/>
+                <a:lumMod val="105000"/>
+                <a:satMod val="103000"/>
+                <a:tint val="73000"/>
               </a:schemeClr>
             </a:gs>
             <a:gs pos="100000">
               <a:schemeClr val="phClr">
-                <a:tint val="15000"/>
-                <a:satMod val="350000"/>
+                <a:lumMod val="105000"/>
+                <a:satMod val="109000"/>
+                <a:tint val="81000"/>
               </a:schemeClr>
             </a:gs>
           </a:gsLst>
-          <a:lin ang="16200000" scaled="1"/>
+          <a:lin ang="5400000" scaled="0"/>
         </a:gradFill>
         <a:gradFill rotWithShape="1">
           <a:gsLst>
             <a:gs pos="0">
               <a:schemeClr val="phClr">
-                <a:tint val="100000"/>
+                <a:satMod val="103000"/>
+                <a:lumMod val="102000"/>
+                <a:tint val="94000"/>
+              </a:schemeClr>
+            </a:gs>
+            <a:gs pos="50000">
+              <a:schemeClr val="phClr">
+                <a:satMod val="110000"/>
+                <a:lumMod val="100000"/>
                 <a:shade val="100000"/>
-                <a:satMod val="130000"/>
               </a:schemeClr>
             </a:gs>
             <a:gs pos="100000">
               <a:schemeClr val="phClr">
-                <a:tint val="50000"/>
-                <a:shade val="100000"/>
-                <a:satMod val="350000"/>
+                <a:lumMod val="99000"/>
+                <a:satMod val="120000"/>
+                <a:shade val="78000"/>
               </a:schemeClr>
             </a:gs>
           </a:gsLst>
-          <a:lin ang="16200000" scaled="0"/>
+          <a:lin ang="5400000" scaled="0"/>
         </a:gradFill>
       </a:fillStyleLst>
       <a:lnStyleLst>
-        <a:ln w="9525" cap="flat" cmpd="sng" algn="ctr">
+        <a:ln w="12700" cap="flat" cmpd="sng" algn="ctr">
           <a:solidFill>
-            <a:schemeClr val="phClr">
-              <a:shade val="95000"/>
-              <a:satMod val="105000"/>
-            </a:schemeClr>
+            <a:schemeClr val="phClr"/>
           </a:solidFill>
           <a:prstDash val="solid"/>
+          <a:miter lim="800000"/>
+        </a:ln>
+        <a:ln w="19050" cap="flat" cmpd="sng" algn="ctr">
+          <a:solidFill>
+            <a:schemeClr val="phClr"/>
+          </a:solidFill>
+          <a:prstDash val="solid"/>
+          <a:miter lim="800000"/>
         </a:ln>
         <a:ln w="25400" cap="flat" cmpd="sng" algn="ctr">
           <a:solidFill>
             <a:schemeClr val="phClr"/>
           </a:solidFill>
           <a:prstDash val="solid"/>
-        </a:ln>
-        <a:ln w="38100" cap="flat" cmpd="sng" algn="ctr">
-          <a:solidFill>
-            <a:schemeClr val="phClr"/>
-          </a:solidFill>
-          <a:prstDash val="solid"/>
+          <a:miter lim="800000"/>
         </a:ln>
       </a:lnStyleLst>
       <a:effectStyleLst>
         <a:effectStyle>
+          <a:effectLst/>
+        </a:effectStyle>
+        <a:effectStyle>
+          <a:effectLst/>
+        </a:effectStyle>
+        <a:effectStyle>
           <a:effectLst>
-            <a:outerShdw blurRad="40000" dist="20000" dir="5400000" rotWithShape="0">
+            <a:outerShdw blurRad="57150" dist="19050" dir="5400000" algn="ctr" rotWithShape="0">
               <a:srgbClr val="000000">
-                <a:alpha val="38000"/>
+                <a:alpha val="63000"/>
               </a:srgbClr>
             </a:outerShdw>
           </a:effectLst>
-        </a:effectStyle>
-        <a:effectStyle>
-          <a:effectLst>
-            <a:outerShdw blurRad="40000" dist="23000" dir="5400000" rotWithShape="0">
-              <a:srgbClr val="000000">
-                <a:alpha val="35000"/>
-              </a:srgbClr>
-            </a:outerShdw>
-          </a:effectLst>
-        </a:effectStyle>
-        <a:effectStyle>
-          <a:effectLst>
-            <a:outerShdw blurRad="40000" dist="23000" dir="5400000" rotWithShape="0">
-              <a:srgbClr val="000000">
-                <a:alpha val="35000"/>
-              </a:srgbClr>
-            </a:outerShdw>
-          </a:effectLst>
-          <a:scene3d>
-            <a:camera prst="orthographicFront">
-              <a:rot lat="0" lon="0" rev="0"/>
-            </a:camera>
-            <a:lightRig rig="threePt" dir="t">
-              <a:rot lat="0" lon="0" rev="1200000"/>
-            </a:lightRig>
-          </a:scene3d>
-          <a:sp3d>
-            <a:bevelT w="63500" h="25400"/>
-          </a:sp3d>
         </a:effectStyle>
       </a:effectStyleLst>
       <a:bgFillStyleLst>
         <a:solidFill>
           <a:schemeClr val="phClr"/>
         </a:solidFill>
+        <a:solidFill>
+          <a:schemeClr val="phClr">
+            <a:tint val="95000"/>
+            <a:satMod val="170000"/>
+          </a:schemeClr>
+        </a:solidFill>
         <a:gradFill rotWithShape="1">
           <a:gsLst>
             <a:gs pos="0">
               <a:schemeClr val="phClr">
-                <a:tint val="40000"/>
-                <a:satMod val="350000"/>
+                <a:tint val="93000"/>
+                <a:satMod val="150000"/>
+                <a:shade val="98000"/>
+                <a:lumMod val="102000"/>
               </a:schemeClr>
             </a:gs>
-            <a:gs pos="40000">
+            <a:gs pos="50000">
               <a:schemeClr val="phClr">
-                <a:tint val="45000"/>
-                <a:shade val="99000"/>
-                <a:satMod val="350000"/>
+                <a:tint val="98000"/>
+                <a:satMod val="130000"/>
+                <a:shade val="90000"/>
+                <a:lumMod val="103000"/>
               </a:schemeClr>
             </a:gs>
             <a:gs pos="100000">
               <a:schemeClr val="phClr">
-                <a:shade val="20000"/>
-                <a:satMod val="255000"/>
+                <a:shade val="63000"/>
+                <a:satMod val="120000"/>
               </a:schemeClr>
             </a:gs>
           </a:gsLst>
-          <a:path path="circle">
-            <a:fillToRect l="50000" t="-80000" r="50000" b="180000"/>
-          </a:path>
-        </a:gradFill>
-        <a:gradFill rotWithShape="1">
-          <a:gsLst>
-            <a:gs pos="0">
-              <a:schemeClr val="phClr">
-                <a:tint val="80000"/>
-                <a:satMod val="300000"/>
-              </a:schemeClr>
-            </a:gs>
-            <a:gs pos="100000">
-              <a:schemeClr val="phClr">
-                <a:shade val="30000"/>
-                <a:satMod val="200000"/>
-              </a:schemeClr>
-            </a:gs>
-          </a:gsLst>
-          <a:path path="circle">
-            <a:fillToRect l="50000" t="50000" r="50000" b="50000"/>
-          </a:path>
+          <a:lin ang="5400000" scaled="0"/>
         </a:gradFill>
       </a:bgFillStyleLst>
     </a:fmtScheme>
   </a:themeElements>
   <a:objectDefaults>
-    <a:spDef>
-      <a:spPr/>
-      <a:bodyPr/>
-      <a:lstStyle/>
-      <a:style>
-        <a:lnRef idx="1">
-          <a:schemeClr val="accent1"/>
-        </a:lnRef>
-        <a:fillRef idx="3">
-          <a:schemeClr val="accent1"/>
-        </a:fillRef>
-        <a:effectRef idx="2">
-          <a:schemeClr val="accent1"/>
-        </a:effectRef>
-        <a:fontRef idx="minor">
-          <a:schemeClr val="lt1"/>
-        </a:fontRef>
-      </a:style>
-    </a:spDef>
     <a:lnDef>
       <a:spPr/>
       <a:bodyPr/>
@@ -6830,5 +8001,10 @@
     </a:lnDef>
   </a:objectDefaults>
   <a:extraClrSchemeLst/>
+  <a:extLst>
+    <a:ext uri="{05A4C25C-085E-4340-85A3-A5531E510DB2}">
+      <thm15:themeFamily xmlns:thm15="http://schemas.microsoft.com/office/thememl/2012/main" name="Office Theme" id="{2E142A2C-CD16-42D6-873A-C26D2A0506FA}" vid="{1BDDFF52-6CD6-40A5-AB3C-68EB2F1E4D0A}"/>
+    </a:ext>
+  </a:extLst>
 </a:theme>
 </file>